--- a/LabBook_20.pptx
+++ b/LabBook_20.pptx
@@ -819,7 +819,7 @@
           <a:p>
             <a:fld id="{8438F8DC-35B0-48E6-A86E-42F1F08DD00F}" type="datetimeFigureOut">
               <a:rPr lang="es-ES" smtClean="0"/>
-              <a:t>09/03/2026</a:t>
+              <a:t>04/05/2026</a:t>
             </a:fld>
             <a:endParaRPr lang="es-ES"/>
           </a:p>
@@ -996,7 +996,7 @@
           <a:p>
             <a:fld id="{FACBDC12-F39B-4B97-8F4D-6734F9D366FF}" type="datetimeFigureOut">
               <a:rPr lang="es-ES" smtClean="0"/>
-              <a:t>09/03/2026</a:t>
+              <a:t>04/05/2026</a:t>
             </a:fld>
             <a:endParaRPr lang="es-ES"/>
           </a:p>
@@ -3415,10 +3415,10 @@
           <p:nvPr userDrawn="1"/>
         </p:nvPicPr>
         <p:blipFill>
-          <a:blip r:embed="rId3">
+          <a:blip>
             <a:extLst>
               <a:ext uri="{96DAC541-7B7A-43D3-8B79-37D633B846F1}">
-                <asvg:svgBlip xmlns:asvg="http://schemas.microsoft.com/office/drawing/2016/SVG/main" r:embed="rId4"/>
+                <asvg:svgBlip xmlns:asvg="http://schemas.microsoft.com/office/drawing/2016/SVG/main" r:embed="rId3"/>
               </a:ext>
             </a:extLst>
           </a:blip>
@@ -3579,10 +3579,10 @@
           <p:nvPr userDrawn="1"/>
         </p:nvPicPr>
         <p:blipFill>
-          <a:blip r:embed="rId3">
+          <a:blip>
             <a:extLst>
               <a:ext uri="{96DAC541-7B7A-43D3-8B79-37D633B846F1}">
-                <asvg:svgBlip xmlns:asvg="http://schemas.microsoft.com/office/drawing/2016/SVG/main" r:embed="rId4"/>
+                <asvg:svgBlip xmlns:asvg="http://schemas.microsoft.com/office/drawing/2016/SVG/main" r:embed="rId3"/>
               </a:ext>
             </a:extLst>
           </a:blip>
@@ -4125,18 +4125,11 @@
               </a:spcBef>
             </a:pPr>
             <a:r>
-              <a:rPr lang="es-ES" spc="165" dirty="0" err="1">
-                <a:latin typeface="Arial"/>
-                <a:cs typeface="Arial"/>
-              </a:rPr>
-              <a:t>Student</a:t>
-            </a:r>
-            <a:r>
               <a:rPr lang="es-ES" spc="165" dirty="0">
                 <a:latin typeface="Arial"/>
                 <a:cs typeface="Arial"/>
               </a:rPr>
-              <a:t>: </a:t>
+              <a:t>Student: Hugo Beltrán Sanz</a:t>
             </a:r>
             <a:endParaRPr sz="1800" dirty="0">
               <a:latin typeface="Arial"/>
@@ -4265,37 +4258,19 @@
           </a:bodyPr>
           <a:lstStyle/>
           <a:p>
-            <a:pPr marL="12700">
-              <a:lnSpc>
-                <a:spcPct val="100000"/>
-              </a:lnSpc>
-              <a:spcBef>
-                <a:spcPts val="100"/>
-              </a:spcBef>
-            </a:pPr>
-            <a:r>
-              <a:rPr lang="en-US" sz="2500" dirty="0"/>
-              <a:t>Learning outcome #6 – 6.1 2x2 Multimode Interference Coupler </a:t>
-            </a:r>
-            <a:br>
-              <a:rPr lang="en-US" sz="2500" dirty="0"/>
-            </a:br>
-            <a:r>
-              <a:rPr lang="en-US" b="0" dirty="0"/>
-              <a:t>Wavelength 1.55 µm, </a:t>
-            </a:r>
-            <a:r>
-              <a:rPr lang="en-US" b="0" dirty="0" err="1"/>
-              <a:t>wMMI</a:t>
-            </a:r>
-            <a:r>
-              <a:rPr lang="en-US" b="0" dirty="0"/>
-              <a:t> = 6.6 µm</a:t>
-            </a:r>
-            <a:endParaRPr lang="en-US" sz="2500" b="0" dirty="0">
-              <a:latin typeface="+mj-lt"/>
-              <a:cs typeface="Lucida Sans"/>
-            </a:endParaRPr>
+            <a:r>
+              <a:rPr sz="2100" b="1">
+                <a:latin typeface="Aptos"/>
+              </a:rPr>
+              <a:t>Learning outcome #6.1 - 2x2 Multimode Interference Coupler</a:t>
+            </a:r>
+            <a:br/>
+            <a:r>
+              <a:rPr sz="2100" b="1">
+                <a:latin typeface="Aptos"/>
+              </a:rPr>
+              <a:t>Wavelength 1.55 um, wMMI = 6.6 um</a:t>
+            </a:r>
           </a:p>
         </p:txBody>
       </p:sp>
@@ -4314,10 +4289,10 @@
           <p:nvPr/>
         </p:nvPicPr>
         <p:blipFill>
-          <a:blip r:embed="rId3">
+          <a:blip>
             <a:extLst>
               <a:ext uri="{96DAC541-7B7A-43D3-8B79-37D633B846F1}">
-                <asvg:svgBlip xmlns:asvg="http://schemas.microsoft.com/office/drawing/2016/SVG/main" r:embed="rId4"/>
+                <asvg:svgBlip xmlns:asvg="http://schemas.microsoft.com/office/drawing/2016/SVG/main" r:embed="rId3"/>
               </a:ext>
             </a:extLst>
           </a:blip>
@@ -4398,203 +4373,111 @@
           </a:p>
         </p:txBody>
       </p:sp>
-      <p:sp>
-        <p:nvSpPr>
-          <p:cNvPr id="2" name="CuadroTexto 1">
-            <a:extLst>
-              <a:ext uri="{FF2B5EF4-FFF2-40B4-BE49-F238E27FC236}">
-                <a16:creationId xmlns:a16="http://schemas.microsoft.com/office/drawing/2014/main" id="{B5029729-ADF3-3B30-4FF9-83BE1DB82BD7}"/>
-              </a:ext>
-            </a:extLst>
-          </p:cNvPr>
+      <p:pic>
+        <p:nvPicPr>
+          <p:cNvPr id="85" name="Picture 84" descr="image.png"/>
+          <p:cNvPicPr>
+            <a:picLocks noChangeAspect="1"/>
+          </p:cNvPicPr>
+          <p:nvPr/>
+        </p:nvPicPr>
+        <p:blipFill>
+          <a:blip r:embed="rId4"/>
+          <a:stretch>
+            <a:fillRect/>
+          </a:stretch>
+        </p:blipFill>
+        <p:spPr>
+          <a:xfrm>
+            <a:off x="1975410" y="1051560"/>
+            <a:ext cx="7936380" cy="3246120"/>
+          </a:xfrm>
+          <a:prstGeom prst="rect">
+            <a:avLst/>
+          </a:prstGeom>
+        </p:spPr>
+      </p:pic>
+      <p:sp>
+        <p:nvSpPr>
+          <p:cNvPr id="86" name="TextBox 85"/>
           <p:cNvSpPr txBox="1"/>
           <p:nvPr/>
         </p:nvSpPr>
         <p:spPr>
           <a:xfrm>
-            <a:off x="609441" y="4819471"/>
-            <a:ext cx="11199971" cy="1200329"/>
+            <a:off x="822960" y="4434840"/>
+            <a:ext cx="10332720" cy="1005840"/>
           </a:xfrm>
           <a:prstGeom prst="rect">
             <a:avLst/>
           </a:prstGeom>
           <a:solidFill>
-            <a:schemeClr val="bg1">
-              <a:lumMod val="95000"/>
-            </a:schemeClr>
+            <a:srgbClr val="FFFFFF"/>
           </a:solidFill>
-          <a:ln w="28575">
+          <a:ln>
             <a:solidFill>
-              <a:srgbClr val="E0700D"/>
+              <a:srgbClr val="D2D2D2"/>
             </a:solidFill>
           </a:ln>
         </p:spPr>
         <p:txBody>
-          <a:bodyPr wrap="square" rtlCol="0">
-            <a:spAutoFit/>
+          <a:bodyPr wrap="square">
+            <a:normAutofit/>
           </a:bodyPr>
           <a:lstStyle/>
           <a:p>
-            <a:pPr algn="just"/>
-            <a:r>
-              <a:rPr lang="en-US" sz="1200" dirty="0">
+            <a:pPr>
+              <a:spcAft>
+                <a:spcPts val="200"/>
+              </a:spcAft>
+            </a:pPr>
+            <a:r>
+              <a:rPr lang="en-US" sz="1350">
+                <a:solidFill>
+                  <a:srgbClr val="202020"/>
+                </a:solidFill>
                 <a:latin typeface="Arial" panose="020B0604020202020204" pitchFamily="34" charset="0"/>
-                <a:cs typeface="Arial" panose="020B0604020202020204" pitchFamily="34" charset="0"/>
               </a:rPr>
-              <a:t>Comment results (Coupling relationship, </a:t>
-            </a:r>
-            <a:r>
-              <a:rPr lang="en-US" sz="1200" dirty="0" err="1">
+              <a:t>Baseline: L = 0.5 Lpi = 34.52 um, I/O at +/- W/6. Total OUT power = 0.9075, EL = 0.4217 dB, ratio = 0.5152/0.4848.</a:t>
+            </a:r>
+          </a:p>
+          <a:p>
+            <a:pPr>
+              <a:spcAft>
+                <a:spcPts val="200"/>
+              </a:spcAft>
+            </a:pPr>
+            <a:r>
+              <a:rPr lang="en-US" sz="1350">
+                <a:solidFill>
+                  <a:srgbClr val="202020"/>
+                </a:solidFill>
                 <a:latin typeface="Arial" panose="020B0604020202020204" pitchFamily="34" charset="0"/>
-                <a:cs typeface="Arial" panose="020B0604020202020204" pitchFamily="34" charset="0"/>
               </a:rPr>
-              <a:t>Lpi</a:t>
-            </a:r>
-            <a:r>
-              <a:rPr lang="en-US" sz="1200" dirty="0">
+              <a:t>Compared with the DC 50/50 case at gap = 0.6 um, the MMI is shorter (34.52 um vs 47.01 um), but its baseline excess loss is higher before optimization.</a:t>
+            </a:r>
+          </a:p>
+          <a:p>
+            <a:pPr>
+              <a:spcAft>
+                <a:spcPts val="200"/>
+              </a:spcAft>
+            </a:pPr>
+            <a:r>
+              <a:rPr lang="en-US" sz="1350">
+                <a:solidFill>
+                  <a:srgbClr val="202020"/>
+                </a:solidFill>
                 <a:latin typeface="Arial" panose="020B0604020202020204" pitchFamily="34" charset="0"/>
-                <a:cs typeface="Arial" panose="020B0604020202020204" pitchFamily="34" charset="0"/>
               </a:rPr>
-              <a:t>,  losses, comparison with Directional Coupler… )</a:t>
-            </a:r>
-          </a:p>
-          <a:p>
-            <a:pPr algn="just"/>
-            <a:endParaRPr lang="en-US" sz="1200" dirty="0">
+              <a:t>Imbalance is about 3.0 percentage points, so this is a useful starting point but needs optimization.</a:t>
+            </a:r>
+            <a:endParaRPr sz="1350">
+              <a:solidFill>
+                <a:srgbClr val="202020"/>
+              </a:solidFill>
               <a:latin typeface="Arial" panose="020B0604020202020204" pitchFamily="34" charset="0"/>
-              <a:cs typeface="Arial" panose="020B0604020202020204" pitchFamily="34" charset="0"/>
             </a:endParaRPr>
-          </a:p>
-          <a:p>
-            <a:pPr algn="just"/>
-            <a:endParaRPr lang="en-US" sz="1200" dirty="0">
-              <a:latin typeface="Arial" panose="020B0604020202020204" pitchFamily="34" charset="0"/>
-              <a:cs typeface="Arial" panose="020B0604020202020204" pitchFamily="34" charset="0"/>
-            </a:endParaRPr>
-          </a:p>
-          <a:p>
-            <a:pPr algn="just"/>
-            <a:endParaRPr lang="en-US" sz="1200" dirty="0">
-              <a:latin typeface="Arial" panose="020B0604020202020204" pitchFamily="34" charset="0"/>
-              <a:cs typeface="Arial" panose="020B0604020202020204" pitchFamily="34" charset="0"/>
-            </a:endParaRPr>
-          </a:p>
-          <a:p>
-            <a:pPr algn="just"/>
-            <a:endParaRPr lang="en-US" sz="1200" dirty="0">
-              <a:latin typeface="Arial" panose="020B0604020202020204" pitchFamily="34" charset="0"/>
-              <a:cs typeface="Arial" panose="020B0604020202020204" pitchFamily="34" charset="0"/>
-            </a:endParaRPr>
-          </a:p>
-          <a:p>
-            <a:pPr algn="just"/>
-            <a:endParaRPr lang="en-US" sz="1200" dirty="0">
-              <a:latin typeface="Arial" panose="020B0604020202020204" pitchFamily="34" charset="0"/>
-              <a:cs typeface="Arial" panose="020B0604020202020204" pitchFamily="34" charset="0"/>
-            </a:endParaRPr>
-          </a:p>
-        </p:txBody>
-      </p:sp>
-      <p:sp>
-        <p:nvSpPr>
-          <p:cNvPr id="7" name="Rectángulo 6">
-            <a:extLst>
-              <a:ext uri="{FF2B5EF4-FFF2-40B4-BE49-F238E27FC236}">
-                <a16:creationId xmlns:a16="http://schemas.microsoft.com/office/drawing/2014/main" id="{98DE5FDA-4E91-E843-E84A-1467BFAA9986}"/>
-              </a:ext>
-            </a:extLst>
-          </p:cNvPr>
-          <p:cNvSpPr/>
-          <p:nvPr/>
-        </p:nvSpPr>
-        <p:spPr>
-          <a:xfrm>
-            <a:off x="609441" y="1377510"/>
-            <a:ext cx="11199971" cy="3306028"/>
-          </a:xfrm>
-          <a:prstGeom prst="rect">
-            <a:avLst/>
-          </a:prstGeom>
-          <a:noFill/>
-          <a:ln w="28575">
-            <a:solidFill>
-              <a:srgbClr val="E0700D"/>
-            </a:solidFill>
-          </a:ln>
-        </p:spPr>
-        <p:style>
-          <a:lnRef idx="2">
-            <a:schemeClr val="accent1">
-              <a:shade val="15000"/>
-            </a:schemeClr>
-          </a:lnRef>
-          <a:fillRef idx="1">
-            <a:schemeClr val="accent1"/>
-          </a:fillRef>
-          <a:effectRef idx="0">
-            <a:schemeClr val="accent1"/>
-          </a:effectRef>
-          <a:fontRef idx="minor">
-            <a:schemeClr val="lt1"/>
-          </a:fontRef>
-        </p:style>
-        <p:txBody>
-          <a:bodyPr rtlCol="0" anchor="ctr"/>
-          <a:lstStyle/>
-          <a:p>
-            <a:pPr algn="ctr"/>
-            <a:endParaRPr lang="en-US"/>
-          </a:p>
-        </p:txBody>
-      </p:sp>
-      <p:sp>
-        <p:nvSpPr>
-          <p:cNvPr id="8" name="CuadroTexto 7">
-            <a:extLst>
-              <a:ext uri="{FF2B5EF4-FFF2-40B4-BE49-F238E27FC236}">
-                <a16:creationId xmlns:a16="http://schemas.microsoft.com/office/drawing/2014/main" id="{0DA14DBA-172E-DA2C-0573-6A00BF18F4A5}"/>
-              </a:ext>
-            </a:extLst>
-          </p:cNvPr>
-          <p:cNvSpPr txBox="1"/>
-          <p:nvPr/>
-        </p:nvSpPr>
-        <p:spPr>
-          <a:xfrm>
-            <a:off x="2286000" y="2630415"/>
-            <a:ext cx="7718580" cy="923330"/>
-          </a:xfrm>
-          <a:prstGeom prst="rect">
-            <a:avLst/>
-          </a:prstGeom>
-          <a:noFill/>
-        </p:spPr>
-        <p:txBody>
-          <a:bodyPr wrap="square" rtlCol="0">
-            <a:spAutoFit/>
-          </a:bodyPr>
-          <a:lstStyle/>
-          <a:p>
-            <a:pPr algn="ctr"/>
-            <a:r>
-              <a:rPr lang="en-US" b="1" dirty="0"/>
-              <a:t>deep</a:t>
-            </a:r>
-            <a:r>
-              <a:rPr lang="en-US" dirty="0"/>
-              <a:t> waveguide</a:t>
-            </a:r>
-          </a:p>
-          <a:p>
-            <a:pPr algn="ctr"/>
-            <a:endParaRPr lang="en-US" dirty="0"/>
-          </a:p>
-          <a:p>
-            <a:pPr algn="ctr"/>
-            <a:r>
-              <a:rPr lang="en-US" dirty="0"/>
-              <a:t>Paste propagation plots and console results</a:t>
-            </a:r>
           </a:p>
         </p:txBody>
       </p:sp>
@@ -4665,37 +4548,19 @@
           </a:bodyPr>
           <a:lstStyle/>
           <a:p>
-            <a:pPr marL="12700">
-              <a:lnSpc>
-                <a:spcPct val="100000"/>
-              </a:lnSpc>
-              <a:spcBef>
-                <a:spcPts val="100"/>
-              </a:spcBef>
-            </a:pPr>
-            <a:r>
-              <a:rPr lang="en-US" sz="2500" dirty="0"/>
-              <a:t>Learning outcome #6.2 – 2x2 Multimode Interference Coupler - Optimization</a:t>
-            </a:r>
-            <a:br>
-              <a:rPr lang="en-US" sz="2500" dirty="0"/>
-            </a:br>
-            <a:r>
-              <a:rPr lang="en-US" b="0" dirty="0"/>
-              <a:t>Wavelength 1.55 µm, </a:t>
-            </a:r>
-            <a:r>
-              <a:rPr lang="en-US" b="0" dirty="0" err="1"/>
-              <a:t>wMMI</a:t>
-            </a:r>
-            <a:r>
-              <a:rPr lang="en-US" b="0" dirty="0"/>
-              <a:t> = 6.6 µm</a:t>
-            </a:r>
-            <a:endParaRPr lang="en-US" sz="2500" b="0" dirty="0">
-              <a:latin typeface="+mj-lt"/>
-              <a:cs typeface="Lucida Sans"/>
-            </a:endParaRPr>
+            <a:r>
+              <a:rPr sz="2100" b="1">
+                <a:latin typeface="Aptos"/>
+              </a:rPr>
+              <a:t>Learning outcome #6.2 - 2x2 Multimode Interference Coupler Optimization</a:t>
+            </a:r>
+            <a:br/>
+            <a:r>
+              <a:rPr sz="2100" b="1">
+                <a:latin typeface="Aptos"/>
+              </a:rPr>
+              <a:t>Wavelength 1.55 um, wMMI = 6.6 um</a:t>
+            </a:r>
           </a:p>
         </p:txBody>
       </p:sp>
@@ -4714,10 +4579,10 @@
           <p:nvPr/>
         </p:nvPicPr>
         <p:blipFill>
-          <a:blip r:embed="rId3">
+          <a:blip>
             <a:extLst>
               <a:ext uri="{96DAC541-7B7A-43D3-8B79-37D633B846F1}">
-                <asvg:svgBlip xmlns:asvg="http://schemas.microsoft.com/office/drawing/2016/SVG/main" r:embed="rId4"/>
+                <asvg:svgBlip xmlns:asvg="http://schemas.microsoft.com/office/drawing/2016/SVG/main" r:embed="rId3"/>
               </a:ext>
             </a:extLst>
           </a:blip>
@@ -4798,256 +4663,88 @@
           </a:p>
         </p:txBody>
       </p:sp>
-      <p:sp>
-        <p:nvSpPr>
-          <p:cNvPr id="2" name="CuadroTexto 1">
-            <a:extLst>
-              <a:ext uri="{FF2B5EF4-FFF2-40B4-BE49-F238E27FC236}">
-                <a16:creationId xmlns:a16="http://schemas.microsoft.com/office/drawing/2014/main" id="{43D7D9E5-DAC3-2BB8-7377-826863CBAD4E}"/>
-              </a:ext>
-            </a:extLst>
-          </p:cNvPr>
+      <p:pic>
+        <p:nvPicPr>
+          <p:cNvPr id="85" name="Picture 84" descr="image.png"/>
+          <p:cNvPicPr>
+            <a:picLocks noChangeAspect="1"/>
+          </p:cNvPicPr>
+          <p:nvPr/>
+        </p:nvPicPr>
+        <p:blipFill>
+          <a:blip r:embed="rId4"/>
+          <a:stretch>
+            <a:fillRect/>
+          </a:stretch>
+        </p:blipFill>
+        <p:spPr>
+          <a:xfrm>
+            <a:off x="2021731" y="1051560"/>
+            <a:ext cx="7843737" cy="3246120"/>
+          </a:xfrm>
+          <a:prstGeom prst="rect">
+            <a:avLst/>
+          </a:prstGeom>
+        </p:spPr>
+      </p:pic>
+      <p:sp>
+        <p:nvSpPr>
+          <p:cNvPr id="86" name="TextBox 85"/>
           <p:cNvSpPr txBox="1"/>
           <p:nvPr/>
         </p:nvSpPr>
         <p:spPr>
           <a:xfrm>
-            <a:off x="609441" y="4819471"/>
-            <a:ext cx="11199971" cy="1384995"/>
+            <a:off x="822960" y="4434840"/>
+            <a:ext cx="10332720" cy="1005840"/>
           </a:xfrm>
           <a:prstGeom prst="rect">
             <a:avLst/>
           </a:prstGeom>
           <a:solidFill>
-            <a:schemeClr val="bg1">
-              <a:lumMod val="95000"/>
-            </a:schemeClr>
+            <a:srgbClr val="FFFFFF"/>
           </a:solidFill>
-          <a:ln w="28575">
+          <a:ln>
             <a:solidFill>
-              <a:srgbClr val="E0700D"/>
+              <a:srgbClr val="D2D2D2"/>
             </a:solidFill>
           </a:ln>
         </p:spPr>
         <p:txBody>
-          <a:bodyPr wrap="square" rtlCol="0">
-            <a:spAutoFit/>
+          <a:bodyPr wrap="square">
+            <a:normAutofit/>
           </a:bodyPr>
           <a:lstStyle/>
           <a:p>
-            <a:pPr algn="just"/>
-            <a:r>
-              <a:rPr lang="en-US" sz="1200" dirty="0">
-                <a:latin typeface="Arial" panose="020B0604020202020204" pitchFamily="34" charset="0"/>
-                <a:cs typeface="Arial" panose="020B0604020202020204" pitchFamily="34" charset="0"/>
+            <a:pPr>
+              <a:spcAft>
+                <a:spcPts val="200"/>
+              </a:spcAft>
+            </a:pPr>
+            <a:r>
+              <a:rPr sz="1200">
+                <a:solidFill>
+                  <a:srgbClr val="191919"/>
+                </a:solidFill>
+                <a:latin typeface="Aptos"/>
               </a:rPr>
-              <a:t>Comment results</a:t>
-            </a:r>
-          </a:p>
-          <a:p>
-            <a:pPr algn="just"/>
-            <a:endParaRPr lang="en-US" sz="1200" dirty="0">
-              <a:latin typeface="Arial" panose="020B0604020202020204" pitchFamily="34" charset="0"/>
-              <a:cs typeface="Arial" panose="020B0604020202020204" pitchFamily="34" charset="0"/>
-            </a:endParaRPr>
-          </a:p>
-          <a:p>
-            <a:pPr algn="just"/>
-            <a:endParaRPr lang="en-US" sz="1200" dirty="0">
-              <a:latin typeface="Arial" panose="020B0604020202020204" pitchFamily="34" charset="0"/>
-              <a:cs typeface="Arial" panose="020B0604020202020204" pitchFamily="34" charset="0"/>
-            </a:endParaRPr>
-          </a:p>
-          <a:p>
-            <a:pPr algn="just"/>
-            <a:endParaRPr lang="en-US" sz="1200" dirty="0">
-              <a:latin typeface="Arial" panose="020B0604020202020204" pitchFamily="34" charset="0"/>
-              <a:cs typeface="Arial" panose="020B0604020202020204" pitchFamily="34" charset="0"/>
-            </a:endParaRPr>
-          </a:p>
-          <a:p>
-            <a:pPr algn="just"/>
-            <a:endParaRPr lang="en-US" sz="1200" dirty="0">
-              <a:latin typeface="Arial" panose="020B0604020202020204" pitchFamily="34" charset="0"/>
-              <a:cs typeface="Arial" panose="020B0604020202020204" pitchFamily="34" charset="0"/>
-            </a:endParaRPr>
-          </a:p>
-          <a:p>
-            <a:pPr algn="just"/>
-            <a:endParaRPr lang="en-US" sz="1200" dirty="0">
-              <a:latin typeface="Arial" panose="020B0604020202020204" pitchFamily="34" charset="0"/>
-              <a:cs typeface="Arial" panose="020B0604020202020204" pitchFamily="34" charset="0"/>
-            </a:endParaRPr>
-          </a:p>
-          <a:p>
-            <a:pPr algn="just"/>
-            <a:endParaRPr lang="en-US" sz="1200" dirty="0">
-              <a:latin typeface="Arial" panose="020B0604020202020204" pitchFamily="34" charset="0"/>
-              <a:cs typeface="Arial" panose="020B0604020202020204" pitchFamily="34" charset="0"/>
-            </a:endParaRPr>
-          </a:p>
-        </p:txBody>
-      </p:sp>
-      <p:sp>
-        <p:nvSpPr>
-          <p:cNvPr id="7" name="Rectángulo 6">
-            <a:extLst>
-              <a:ext uri="{FF2B5EF4-FFF2-40B4-BE49-F238E27FC236}">
-                <a16:creationId xmlns:a16="http://schemas.microsoft.com/office/drawing/2014/main" id="{9772491E-4FFB-FFC3-C855-72A4B15F3E73}"/>
-              </a:ext>
-            </a:extLst>
-          </p:cNvPr>
-          <p:cNvSpPr/>
-          <p:nvPr/>
-        </p:nvSpPr>
-        <p:spPr>
-          <a:xfrm>
-            <a:off x="609441" y="1377510"/>
-            <a:ext cx="11199971" cy="3306028"/>
-          </a:xfrm>
-          <a:prstGeom prst="rect">
-            <a:avLst/>
-          </a:prstGeom>
-          <a:noFill/>
-          <a:ln w="28575">
-            <a:solidFill>
-              <a:srgbClr val="E0700D"/>
-            </a:solidFill>
-          </a:ln>
-        </p:spPr>
-        <p:style>
-          <a:lnRef idx="2">
-            <a:schemeClr val="accent1">
-              <a:shade val="15000"/>
-            </a:schemeClr>
-          </a:lnRef>
-          <a:fillRef idx="1">
-            <a:schemeClr val="accent1"/>
-          </a:fillRef>
-          <a:effectRef idx="0">
-            <a:schemeClr val="accent1"/>
-          </a:effectRef>
-          <a:fontRef idx="minor">
-            <a:schemeClr val="lt1"/>
-          </a:fontRef>
-        </p:style>
-        <p:txBody>
-          <a:bodyPr rtlCol="0" anchor="ctr"/>
-          <a:lstStyle/>
-          <a:p>
-            <a:pPr algn="ctr"/>
-            <a:endParaRPr lang="en-US"/>
-          </a:p>
-        </p:txBody>
-      </p:sp>
-      <p:sp>
-        <p:nvSpPr>
-          <p:cNvPr id="8" name="CuadroTexto 7">
-            <a:extLst>
-              <a:ext uri="{FF2B5EF4-FFF2-40B4-BE49-F238E27FC236}">
-                <a16:creationId xmlns:a16="http://schemas.microsoft.com/office/drawing/2014/main" id="{643565A9-7DB6-D6EE-152F-2852C8BA7986}"/>
-              </a:ext>
-            </a:extLst>
-          </p:cNvPr>
-          <p:cNvSpPr txBox="1"/>
-          <p:nvPr/>
-        </p:nvSpPr>
-        <p:spPr>
-          <a:xfrm>
-            <a:off x="640245" y="1942909"/>
-            <a:ext cx="11199972" cy="2708434"/>
-          </a:xfrm>
-          <a:prstGeom prst="rect">
-            <a:avLst/>
-          </a:prstGeom>
-          <a:noFill/>
-        </p:spPr>
-        <p:txBody>
-          <a:bodyPr wrap="square" rtlCol="0">
-            <a:spAutoFit/>
-          </a:bodyPr>
-          <a:lstStyle/>
-          <a:p>
-            <a:pPr algn="ctr"/>
-            <a:r>
-              <a:rPr lang="en-US" b="1" dirty="0"/>
-              <a:t>deep</a:t>
-            </a:r>
-            <a:r>
-              <a:rPr lang="en-US" dirty="0"/>
-              <a:t> waveguide</a:t>
-            </a:r>
-          </a:p>
-          <a:p>
-            <a:pPr algn="ctr"/>
-            <a:endParaRPr lang="en-US" dirty="0"/>
-          </a:p>
-          <a:p>
-            <a:pPr algn="ctr"/>
-            <a:r>
-              <a:rPr lang="en-US" dirty="0"/>
-              <a:t>Paste propagation plot and console results</a:t>
-            </a:r>
-          </a:p>
-          <a:p>
-            <a:pPr algn="ctr"/>
-            <a:endParaRPr lang="en-US" dirty="0"/>
-          </a:p>
-          <a:p>
-            <a:pPr algn="ctr"/>
-            <a:endParaRPr lang="en-US" dirty="0"/>
-          </a:p>
-          <a:p>
-            <a:pPr algn="r"/>
-            <a:r>
-              <a:rPr lang="en-US" sz="1600" b="1" dirty="0"/>
-              <a:t>Target</a:t>
-            </a:r>
-            <a:r>
-              <a:rPr lang="en-US" sz="1600" dirty="0"/>
-              <a:t>: make equal ratio over outputs (even if not 0.5) and minimize excess loss (even if not 0.0 dB)</a:t>
-            </a:r>
-          </a:p>
-          <a:p>
-            <a:pPr algn="r"/>
-            <a:r>
-              <a:rPr lang="en-US" sz="1600" dirty="0"/>
-              <a:t>With same settings of previous LO, now adjust try to manually optimize the MMI by changing iteratively:</a:t>
-            </a:r>
-          </a:p>
-          <a:p>
-            <a:pPr algn="r"/>
-            <a:r>
-              <a:rPr lang="en-US" sz="1600" dirty="0"/>
-              <a:t>- Change </a:t>
-            </a:r>
-            <a:r>
-              <a:rPr lang="en-US" sz="1600" dirty="0" err="1"/>
-              <a:t>dL_MMI</a:t>
-            </a:r>
-            <a:endParaRPr lang="en-US" sz="1600" dirty="0"/>
-          </a:p>
-          <a:p>
-            <a:pPr algn="r"/>
-            <a:r>
-              <a:rPr lang="en-US" sz="1600" dirty="0"/>
-              <a:t>- Change I/O waveguide position +/- </a:t>
-            </a:r>
-            <a:r>
-              <a:rPr lang="en-US" sz="1600" dirty="0" err="1"/>
-              <a:t>dy</a:t>
-            </a:r>
-            <a:endParaRPr lang="en-US" sz="1600" dirty="0"/>
-          </a:p>
-          <a:p>
-            <a:pPr algn="r"/>
-            <a:r>
-              <a:rPr lang="en-US" sz="1600" b="1" dirty="0"/>
-              <a:t>Hints</a:t>
-            </a:r>
-            <a:r>
-              <a:rPr lang="en-US" sz="1600" dirty="0"/>
-              <a:t>: observe the 2D EME propagation results to guide you to the best settings of a) and b).</a:t>
+              <a:t>Manual optimization: dy = 0.07 um and dL = -0.8 um with 1.0 um I/O width. Total OUT power = 0.9076, EL = 0.4210 dB.</a:t>
+            </a:r>
+          </a:p>
+          <a:p>
+            <a:pPr>
+              <a:spcAft>
+                <a:spcPts val="200"/>
+              </a:spcAft>
+            </a:pPr>
+            <a:r>
+              <a:rPr sz="1200">
+                <a:solidFill>
+                  <a:srgbClr val="191919"/>
+                </a:solidFill>
+                <a:latin typeface="Aptos"/>
+              </a:rPr>
+              <a:t>Output ratio improves to 0.5003/0.4997; loss remains similar because mode overlap has not been improved.</a:t>
             </a:r>
           </a:p>
         </p:txBody>
@@ -5119,37 +4816,19 @@
           </a:bodyPr>
           <a:lstStyle/>
           <a:p>
-            <a:pPr marL="12700">
-              <a:lnSpc>
-                <a:spcPct val="100000"/>
-              </a:lnSpc>
-              <a:spcBef>
-                <a:spcPts val="100"/>
-              </a:spcBef>
-            </a:pPr>
-            <a:r>
-              <a:rPr lang="en-US" sz="2500" dirty="0"/>
-              <a:t>Learning outcome #6.3 – 2x2 Multimode Interference Coupler – Optimization (II)</a:t>
-            </a:r>
-            <a:br>
-              <a:rPr lang="en-US" sz="2500" dirty="0"/>
-            </a:br>
-            <a:r>
-              <a:rPr lang="en-US" b="0" dirty="0"/>
-              <a:t>Wavelength 1.55 µm, </a:t>
-            </a:r>
-            <a:r>
-              <a:rPr lang="en-US" b="0" dirty="0" err="1"/>
-              <a:t>wMMI</a:t>
-            </a:r>
-            <a:r>
-              <a:rPr lang="en-US" b="0" dirty="0"/>
-              <a:t> = 6.6 µm</a:t>
-            </a:r>
-            <a:endParaRPr lang="en-US" sz="2500" b="0" dirty="0">
-              <a:latin typeface="+mj-lt"/>
-              <a:cs typeface="Lucida Sans"/>
-            </a:endParaRPr>
+            <a:r>
+              <a:rPr sz="2100" b="1">
+                <a:latin typeface="Aptos"/>
+              </a:rPr>
+              <a:t>Learning outcome #6.3 - 2x2 MMI Optimization with wider I/O</a:t>
+            </a:r>
+            <a:br/>
+            <a:r>
+              <a:rPr sz="2100" b="1">
+                <a:latin typeface="Aptos"/>
+              </a:rPr>
+              <a:t>Wavelength 1.55 um, wMMI = 6.6 um</a:t>
+            </a:r>
           </a:p>
         </p:txBody>
       </p:sp>
@@ -5168,10 +4847,10 @@
           <p:nvPr/>
         </p:nvPicPr>
         <p:blipFill>
-          <a:blip r:embed="rId3">
+          <a:blip>
             <a:extLst>
               <a:ext uri="{96DAC541-7B7A-43D3-8B79-37D633B846F1}">
-                <asvg:svgBlip xmlns:asvg="http://schemas.microsoft.com/office/drawing/2016/SVG/main" r:embed="rId4"/>
+                <asvg:svgBlip xmlns:asvg="http://schemas.microsoft.com/office/drawing/2016/SVG/main" r:embed="rId3"/>
               </a:ext>
             </a:extLst>
           </a:blip>
@@ -5252,250 +4931,88 @@
           </a:p>
         </p:txBody>
       </p:sp>
-      <p:sp>
-        <p:nvSpPr>
-          <p:cNvPr id="2" name="CuadroTexto 1">
-            <a:extLst>
-              <a:ext uri="{FF2B5EF4-FFF2-40B4-BE49-F238E27FC236}">
-                <a16:creationId xmlns:a16="http://schemas.microsoft.com/office/drawing/2014/main" id="{EF5B7948-A25A-9043-7061-DD15A9023924}"/>
-              </a:ext>
-            </a:extLst>
-          </p:cNvPr>
+      <p:pic>
+        <p:nvPicPr>
+          <p:cNvPr id="85" name="Picture 84" descr="image.png"/>
+          <p:cNvPicPr>
+            <a:picLocks noChangeAspect="1"/>
+          </p:cNvPicPr>
+          <p:nvPr/>
+        </p:nvPicPr>
+        <p:blipFill>
+          <a:blip r:embed="rId4"/>
+          <a:stretch>
+            <a:fillRect/>
+          </a:stretch>
+        </p:blipFill>
+        <p:spPr>
+          <a:xfrm>
+            <a:off x="1967583" y="1051560"/>
+            <a:ext cx="7952033" cy="3246120"/>
+          </a:xfrm>
+          <a:prstGeom prst="rect">
+            <a:avLst/>
+          </a:prstGeom>
+        </p:spPr>
+      </p:pic>
+      <p:sp>
+        <p:nvSpPr>
+          <p:cNvPr id="86" name="TextBox 85"/>
           <p:cNvSpPr txBox="1"/>
           <p:nvPr/>
         </p:nvSpPr>
         <p:spPr>
           <a:xfrm>
-            <a:off x="609441" y="4819471"/>
-            <a:ext cx="11199971" cy="1384995"/>
+            <a:off x="822960" y="4434840"/>
+            <a:ext cx="10332720" cy="1005840"/>
           </a:xfrm>
           <a:prstGeom prst="rect">
             <a:avLst/>
           </a:prstGeom>
           <a:solidFill>
-            <a:schemeClr val="bg1">
-              <a:lumMod val="95000"/>
-            </a:schemeClr>
+            <a:srgbClr val="FFFFFF"/>
           </a:solidFill>
-          <a:ln w="28575">
+          <a:ln>
             <a:solidFill>
-              <a:srgbClr val="E0700D"/>
+              <a:srgbClr val="D2D2D2"/>
             </a:solidFill>
           </a:ln>
         </p:spPr>
         <p:txBody>
-          <a:bodyPr wrap="square" rtlCol="0">
-            <a:spAutoFit/>
+          <a:bodyPr wrap="square">
+            <a:normAutofit/>
           </a:bodyPr>
           <a:lstStyle/>
           <a:p>
-            <a:pPr algn="just"/>
-            <a:r>
-              <a:rPr lang="en-US" sz="1200" dirty="0">
-                <a:latin typeface="Arial" panose="020B0604020202020204" pitchFamily="34" charset="0"/>
-                <a:cs typeface="Arial" panose="020B0604020202020204" pitchFamily="34" charset="0"/>
+            <a:pPr>
+              <a:spcAft>
+                <a:spcPts val="200"/>
+              </a:spcAft>
+            </a:pPr>
+            <a:r>
+              <a:rPr sz="1200">
+                <a:solidFill>
+                  <a:srgbClr val="191919"/>
+                </a:solidFill>
+                <a:latin typeface="Aptos"/>
               </a:rPr>
-              <a:t>Comment results</a:t>
-            </a:r>
-          </a:p>
-          <a:p>
-            <a:pPr algn="just"/>
-            <a:endParaRPr lang="en-US" sz="1200" dirty="0">
-              <a:latin typeface="Arial" panose="020B0604020202020204" pitchFamily="34" charset="0"/>
-              <a:cs typeface="Arial" panose="020B0604020202020204" pitchFamily="34" charset="0"/>
-            </a:endParaRPr>
-          </a:p>
-          <a:p>
-            <a:pPr algn="just"/>
-            <a:endParaRPr lang="en-US" sz="1200" dirty="0">
-              <a:latin typeface="Arial" panose="020B0604020202020204" pitchFamily="34" charset="0"/>
-              <a:cs typeface="Arial" panose="020B0604020202020204" pitchFamily="34" charset="0"/>
-            </a:endParaRPr>
-          </a:p>
-          <a:p>
-            <a:pPr algn="just"/>
-            <a:endParaRPr lang="en-US" sz="1200" dirty="0">
-              <a:latin typeface="Arial" panose="020B0604020202020204" pitchFamily="34" charset="0"/>
-              <a:cs typeface="Arial" panose="020B0604020202020204" pitchFamily="34" charset="0"/>
-            </a:endParaRPr>
-          </a:p>
-          <a:p>
-            <a:pPr algn="just"/>
-            <a:endParaRPr lang="en-US" sz="1200" dirty="0">
-              <a:latin typeface="Arial" panose="020B0604020202020204" pitchFamily="34" charset="0"/>
-              <a:cs typeface="Arial" panose="020B0604020202020204" pitchFamily="34" charset="0"/>
-            </a:endParaRPr>
-          </a:p>
-          <a:p>
-            <a:pPr algn="just"/>
-            <a:endParaRPr lang="en-US" sz="1200" dirty="0">
-              <a:latin typeface="Arial" panose="020B0604020202020204" pitchFamily="34" charset="0"/>
-              <a:cs typeface="Arial" panose="020B0604020202020204" pitchFamily="34" charset="0"/>
-            </a:endParaRPr>
-          </a:p>
-          <a:p>
-            <a:pPr algn="just"/>
-            <a:endParaRPr lang="en-US" sz="1200" dirty="0">
-              <a:latin typeface="Arial" panose="020B0604020202020204" pitchFamily="34" charset="0"/>
-              <a:cs typeface="Arial" panose="020B0604020202020204" pitchFamily="34" charset="0"/>
-            </a:endParaRPr>
-          </a:p>
-        </p:txBody>
-      </p:sp>
-      <p:sp>
-        <p:nvSpPr>
-          <p:cNvPr id="7" name="Rectángulo 6">
-            <a:extLst>
-              <a:ext uri="{FF2B5EF4-FFF2-40B4-BE49-F238E27FC236}">
-                <a16:creationId xmlns:a16="http://schemas.microsoft.com/office/drawing/2014/main" id="{C8036B97-F577-1F3C-3CE2-BD45F7D1FFC2}"/>
-              </a:ext>
-            </a:extLst>
-          </p:cNvPr>
-          <p:cNvSpPr/>
-          <p:nvPr/>
-        </p:nvSpPr>
-        <p:spPr>
-          <a:xfrm>
-            <a:off x="609441" y="1377510"/>
-            <a:ext cx="11199971" cy="3306028"/>
-          </a:xfrm>
-          <a:prstGeom prst="rect">
-            <a:avLst/>
-          </a:prstGeom>
-          <a:noFill/>
-          <a:ln w="28575">
-            <a:solidFill>
-              <a:srgbClr val="E0700D"/>
-            </a:solidFill>
-          </a:ln>
-        </p:spPr>
-        <p:style>
-          <a:lnRef idx="2">
-            <a:schemeClr val="accent1">
-              <a:shade val="15000"/>
-            </a:schemeClr>
-          </a:lnRef>
-          <a:fillRef idx="1">
-            <a:schemeClr val="accent1"/>
-          </a:fillRef>
-          <a:effectRef idx="0">
-            <a:schemeClr val="accent1"/>
-          </a:effectRef>
-          <a:fontRef idx="minor">
-            <a:schemeClr val="lt1"/>
-          </a:fontRef>
-        </p:style>
-        <p:txBody>
-          <a:bodyPr rtlCol="0" anchor="ctr"/>
-          <a:lstStyle/>
-          <a:p>
-            <a:pPr algn="ctr"/>
-            <a:endParaRPr lang="en-US"/>
-          </a:p>
-        </p:txBody>
-      </p:sp>
-      <p:sp>
-        <p:nvSpPr>
-          <p:cNvPr id="8" name="CuadroTexto 7">
-            <a:extLst>
-              <a:ext uri="{FF2B5EF4-FFF2-40B4-BE49-F238E27FC236}">
-                <a16:creationId xmlns:a16="http://schemas.microsoft.com/office/drawing/2014/main" id="{B0CFB20A-64F3-A296-71E8-F4FA17D35314}"/>
-              </a:ext>
-            </a:extLst>
-          </p:cNvPr>
-          <p:cNvSpPr txBox="1"/>
-          <p:nvPr/>
-        </p:nvSpPr>
-        <p:spPr>
-          <a:xfrm>
-            <a:off x="640245" y="1942909"/>
-            <a:ext cx="11199972" cy="2708434"/>
-          </a:xfrm>
-          <a:prstGeom prst="rect">
-            <a:avLst/>
-          </a:prstGeom>
-          <a:noFill/>
-        </p:spPr>
-        <p:txBody>
-          <a:bodyPr wrap="square" rtlCol="0">
-            <a:spAutoFit/>
-          </a:bodyPr>
-          <a:lstStyle/>
-          <a:p>
-            <a:pPr algn="ctr"/>
-            <a:r>
-              <a:rPr lang="en-US" b="1" dirty="0"/>
-              <a:t>deep</a:t>
-            </a:r>
-            <a:r>
-              <a:rPr lang="en-US" dirty="0"/>
-              <a:t> waveguide</a:t>
-            </a:r>
-          </a:p>
-          <a:p>
-            <a:pPr algn="ctr"/>
-            <a:endParaRPr lang="en-US" dirty="0"/>
-          </a:p>
-          <a:p>
-            <a:pPr algn="ctr"/>
-            <a:r>
-              <a:rPr lang="en-US" dirty="0"/>
-              <a:t>Paste propagation plot and console results</a:t>
-            </a:r>
-          </a:p>
-          <a:p>
-            <a:pPr algn="ctr"/>
-            <a:endParaRPr lang="en-US" dirty="0"/>
-          </a:p>
-          <a:p>
-            <a:pPr algn="ctr"/>
-            <a:endParaRPr lang="en-US" dirty="0"/>
-          </a:p>
-          <a:p>
-            <a:pPr algn="r"/>
-            <a:r>
-              <a:rPr lang="en-US" sz="1600" b="1" dirty="0"/>
-              <a:t>Target</a:t>
-            </a:r>
-            <a:r>
-              <a:rPr lang="en-US" sz="1600" dirty="0"/>
-              <a:t>: make ratio over outputs 0.5 + excess loss &lt; 0.1 dB</a:t>
-            </a:r>
-          </a:p>
-          <a:p>
-            <a:pPr algn="r"/>
-            <a:r>
-              <a:rPr lang="en-US" sz="1600" dirty="0"/>
-              <a:t>With same settings of previous LO, now modify the notebook so I/O waveguides have a different width. </a:t>
-            </a:r>
-          </a:p>
-          <a:p>
-            <a:pPr algn="r"/>
-            <a:r>
-              <a:rPr lang="en-US" sz="1600" u="sng" dirty="0"/>
-              <a:t>- The nominal I/O waveguide width you have been using is 1.0 µm, increase it.</a:t>
-            </a:r>
-          </a:p>
-          <a:p>
-            <a:pPr algn="r"/>
-            <a:r>
-              <a:rPr lang="en-US" sz="1600" b="1" dirty="0"/>
-              <a:t>(Warning</a:t>
-            </a:r>
-            <a:r>
-              <a:rPr lang="en-US" sz="1600" dirty="0"/>
-              <a:t>! Every time you change the I/O waveguide width you have to re-run modes calculation)</a:t>
-            </a:r>
-          </a:p>
-          <a:p>
-            <a:pPr algn="r"/>
-            <a:r>
-              <a:rPr lang="en-US" sz="1600" b="1" dirty="0"/>
-              <a:t>Hints</a:t>
-            </a:r>
-            <a:r>
-              <a:rPr lang="en-US" sz="1600" dirty="0"/>
-              <a:t>: observe the 2D EME propagation results to guide you to the best settings of a) and b).</a:t>
+              <a:t>I/O total width = 2.0 um (wg_width_dw = 1.0 um), dy = 0.05 um and dL = +0.2 um.</a:t>
+            </a:r>
+          </a:p>
+          <a:p>
+            <a:pPr>
+              <a:spcAft>
+                <a:spcPts val="200"/>
+              </a:spcAft>
+            </a:pPr>
+            <a:r>
+              <a:rPr sz="1200">
+                <a:solidFill>
+                  <a:srgbClr val="191919"/>
+                </a:solidFill>
+                <a:latin typeface="Aptos"/>
+              </a:rPr>
+              <a:t>Total OUT power = 0.9924, EL = 0.0332 dB and ratio = 0.4996/0.5004. This meets the 50/50 and &lt;0.1 dB targets.</a:t>
             </a:r>
           </a:p>
         </p:txBody>
@@ -5567,37 +5084,19 @@
           </a:bodyPr>
           <a:lstStyle/>
           <a:p>
-            <a:pPr marL="12700">
-              <a:lnSpc>
-                <a:spcPct val="100000"/>
-              </a:lnSpc>
-              <a:spcBef>
-                <a:spcPts val="100"/>
-              </a:spcBef>
-            </a:pPr>
-            <a:r>
-              <a:rPr lang="en-US" sz="2500" dirty="0"/>
-              <a:t>Learning outcome #7 – 1x4 Multimode Interference Coupler </a:t>
-            </a:r>
-            <a:br>
-              <a:rPr lang="en-US" sz="2500" dirty="0"/>
-            </a:br>
-            <a:r>
-              <a:rPr lang="en-US" b="0" dirty="0"/>
-              <a:t>Wavelength 1.55 µm, </a:t>
-            </a:r>
-            <a:r>
-              <a:rPr lang="en-US" b="0" dirty="0" err="1"/>
-              <a:t>wMMI</a:t>
-            </a:r>
-            <a:r>
-              <a:rPr lang="en-US" b="0" dirty="0"/>
-              <a:t> = ? µm</a:t>
-            </a:r>
-            <a:endParaRPr lang="en-US" sz="2500" b="0" dirty="0">
-              <a:latin typeface="+mj-lt"/>
-              <a:cs typeface="Lucida Sans"/>
-            </a:endParaRPr>
+            <a:r>
+              <a:rPr sz="2100" b="1">
+                <a:latin typeface="Aptos"/>
+              </a:rPr>
+              <a:t>Learning outcome #7 - 1x4 Multimode Interference Coupler</a:t>
+            </a:r>
+            <a:br/>
+            <a:r>
+              <a:rPr sz="2100" b="1">
+                <a:latin typeface="Aptos"/>
+              </a:rPr>
+              <a:t>Wavelength 1.55 um, wMMI = 6.5 um</a:t>
+            </a:r>
           </a:p>
         </p:txBody>
       </p:sp>
@@ -5616,10 +5115,10 @@
           <p:nvPr/>
         </p:nvPicPr>
         <p:blipFill>
-          <a:blip r:embed="rId3">
+          <a:blip>
             <a:extLst>
               <a:ext uri="{96DAC541-7B7A-43D3-8B79-37D633B846F1}">
-                <asvg:svgBlip xmlns:asvg="http://schemas.microsoft.com/office/drawing/2016/SVG/main" r:embed="rId4"/>
+                <asvg:svgBlip xmlns:asvg="http://schemas.microsoft.com/office/drawing/2016/SVG/main" r:embed="rId3"/>
               </a:ext>
             </a:extLst>
           </a:blip>
@@ -5700,202 +5199,88 @@
           </a:p>
         </p:txBody>
       </p:sp>
-      <p:sp>
-        <p:nvSpPr>
-          <p:cNvPr id="2" name="CuadroTexto 1">
-            <a:extLst>
-              <a:ext uri="{FF2B5EF4-FFF2-40B4-BE49-F238E27FC236}">
-                <a16:creationId xmlns:a16="http://schemas.microsoft.com/office/drawing/2014/main" id="{42D73A2E-0E5A-8A39-6B70-F9E94D6DBB70}"/>
-              </a:ext>
-            </a:extLst>
-          </p:cNvPr>
+      <p:pic>
+        <p:nvPicPr>
+          <p:cNvPr id="85" name="Picture 84" descr="lo7_mmi_1x4_propagation.png"/>
+          <p:cNvPicPr>
+            <a:picLocks noChangeAspect="1"/>
+          </p:cNvPicPr>
+          <p:nvPr/>
+        </p:nvPicPr>
+        <p:blipFill>
+          <a:blip r:embed="rId4"/>
+          <a:stretch>
+            <a:fillRect/>
+          </a:stretch>
+        </p:blipFill>
+        <p:spPr>
+          <a:xfrm>
+            <a:off x="3436336" y="1051560"/>
+            <a:ext cx="5014528" cy="3246120"/>
+          </a:xfrm>
+          <a:prstGeom prst="rect">
+            <a:avLst/>
+          </a:prstGeom>
+        </p:spPr>
+      </p:pic>
+      <p:sp>
+        <p:nvSpPr>
+          <p:cNvPr id="86" name="TextBox 85"/>
           <p:cNvSpPr txBox="1"/>
           <p:nvPr/>
         </p:nvSpPr>
         <p:spPr>
           <a:xfrm>
-            <a:off x="609441" y="4819471"/>
-            <a:ext cx="11199971" cy="1200329"/>
+            <a:off x="822960" y="4434840"/>
+            <a:ext cx="10332720" cy="1051560"/>
           </a:xfrm>
           <a:prstGeom prst="rect">
             <a:avLst/>
           </a:prstGeom>
           <a:solidFill>
-            <a:schemeClr val="bg1">
-              <a:lumMod val="95000"/>
-            </a:schemeClr>
+            <a:srgbClr val="FFFFFF"/>
           </a:solidFill>
-          <a:ln w="28575">
+          <a:ln>
             <a:solidFill>
-              <a:srgbClr val="E0700D"/>
+              <a:srgbClr val="D2D2D2"/>
             </a:solidFill>
           </a:ln>
         </p:spPr>
         <p:txBody>
-          <a:bodyPr wrap="square" rtlCol="0">
-            <a:spAutoFit/>
+          <a:bodyPr wrap="square">
+            <a:normAutofit/>
           </a:bodyPr>
           <a:lstStyle/>
           <a:p>
-            <a:pPr algn="just"/>
-            <a:r>
-              <a:rPr lang="en-US" sz="1200" dirty="0">
-                <a:latin typeface="Arial" panose="020B0604020202020204" pitchFamily="34" charset="0"/>
-                <a:cs typeface="Arial" panose="020B0604020202020204" pitchFamily="34" charset="0"/>
+            <a:pPr>
+              <a:spcAft>
+                <a:spcPts val="200"/>
+              </a:spcAft>
+            </a:pPr>
+            <a:r>
+              <a:rPr sz="1100">
+                <a:solidFill>
+                  <a:srgbClr val="191919"/>
+                </a:solidFill>
+                <a:latin typeface="Aptos"/>
               </a:rPr>
-              <a:t>Repeat all the design </a:t>
-            </a:r>
-            <a:r>
-              <a:rPr lang="en-US" sz="1200">
-                <a:latin typeface="Arial" panose="020B0604020202020204" pitchFamily="34" charset="0"/>
-                <a:cs typeface="Arial" panose="020B0604020202020204" pitchFamily="34" charset="0"/>
+              <a:t>Mini-sweep selected W = 6.5 um, scale = 1.04, dL = +0.6 um. Lpi = 67.05 um and total length = 13.17 um.</a:t>
+            </a:r>
+          </a:p>
+          <a:p>
+            <a:pPr>
+              <a:spcAft>
+                <a:spcPts val="200"/>
+              </a:spcAft>
+            </a:pPr>
+            <a:r>
+              <a:rPr sz="1100">
+                <a:solidFill>
+                  <a:srgbClr val="191919"/>
+                </a:solidFill>
+                <a:latin typeface="Aptos"/>
               </a:rPr>
-              <a:t>process for a </a:t>
-            </a:r>
-            <a:r>
-              <a:rPr lang="en-US" sz="1200" dirty="0">
-                <a:latin typeface="Arial" panose="020B0604020202020204" pitchFamily="34" charset="0"/>
-                <a:cs typeface="Arial" panose="020B0604020202020204" pitchFamily="34" charset="0"/>
-              </a:rPr>
-              <a:t>1x4 MMI Coupler.  </a:t>
-            </a:r>
-          </a:p>
-          <a:p>
-            <a:pPr algn="just"/>
-            <a:endParaRPr lang="en-US" sz="1200" dirty="0">
-              <a:latin typeface="Arial" panose="020B0604020202020204" pitchFamily="34" charset="0"/>
-              <a:cs typeface="Arial" panose="020B0604020202020204" pitchFamily="34" charset="0"/>
-            </a:endParaRPr>
-          </a:p>
-          <a:p>
-            <a:pPr algn="just"/>
-            <a:endParaRPr lang="en-US" sz="1200" dirty="0">
-              <a:latin typeface="Arial" panose="020B0604020202020204" pitchFamily="34" charset="0"/>
-              <a:cs typeface="Arial" panose="020B0604020202020204" pitchFamily="34" charset="0"/>
-            </a:endParaRPr>
-          </a:p>
-          <a:p>
-            <a:pPr algn="just"/>
-            <a:endParaRPr lang="en-US" sz="1200" dirty="0">
-              <a:latin typeface="Arial" panose="020B0604020202020204" pitchFamily="34" charset="0"/>
-              <a:cs typeface="Arial" panose="020B0604020202020204" pitchFamily="34" charset="0"/>
-            </a:endParaRPr>
-          </a:p>
-          <a:p>
-            <a:pPr algn="just"/>
-            <a:endParaRPr lang="en-US" sz="1200" dirty="0">
-              <a:latin typeface="Arial" panose="020B0604020202020204" pitchFamily="34" charset="0"/>
-              <a:cs typeface="Arial" panose="020B0604020202020204" pitchFamily="34" charset="0"/>
-            </a:endParaRPr>
-          </a:p>
-          <a:p>
-            <a:pPr algn="just"/>
-            <a:endParaRPr lang="en-US" sz="1200" dirty="0">
-              <a:latin typeface="Arial" panose="020B0604020202020204" pitchFamily="34" charset="0"/>
-              <a:cs typeface="Arial" panose="020B0604020202020204" pitchFamily="34" charset="0"/>
-            </a:endParaRPr>
-          </a:p>
-        </p:txBody>
-      </p:sp>
-      <p:sp>
-        <p:nvSpPr>
-          <p:cNvPr id="7" name="Rectángulo 6">
-            <a:extLst>
-              <a:ext uri="{FF2B5EF4-FFF2-40B4-BE49-F238E27FC236}">
-                <a16:creationId xmlns:a16="http://schemas.microsoft.com/office/drawing/2014/main" id="{AFB86587-21D4-5A33-7D00-DDF170C919BA}"/>
-              </a:ext>
-            </a:extLst>
-          </p:cNvPr>
-          <p:cNvSpPr/>
-          <p:nvPr/>
-        </p:nvSpPr>
-        <p:spPr>
-          <a:xfrm>
-            <a:off x="609441" y="1377510"/>
-            <a:ext cx="11199971" cy="3306028"/>
-          </a:xfrm>
-          <a:prstGeom prst="rect">
-            <a:avLst/>
-          </a:prstGeom>
-          <a:noFill/>
-          <a:ln w="28575">
-            <a:solidFill>
-              <a:srgbClr val="E0700D"/>
-            </a:solidFill>
-          </a:ln>
-        </p:spPr>
-        <p:style>
-          <a:lnRef idx="2">
-            <a:schemeClr val="accent1">
-              <a:shade val="15000"/>
-            </a:schemeClr>
-          </a:lnRef>
-          <a:fillRef idx="1">
-            <a:schemeClr val="accent1"/>
-          </a:fillRef>
-          <a:effectRef idx="0">
-            <a:schemeClr val="accent1"/>
-          </a:effectRef>
-          <a:fontRef idx="minor">
-            <a:schemeClr val="lt1"/>
-          </a:fontRef>
-        </p:style>
-        <p:txBody>
-          <a:bodyPr rtlCol="0" anchor="ctr"/>
-          <a:lstStyle/>
-          <a:p>
-            <a:pPr algn="ctr"/>
-            <a:endParaRPr lang="en-US"/>
-          </a:p>
-        </p:txBody>
-      </p:sp>
-      <p:sp>
-        <p:nvSpPr>
-          <p:cNvPr id="8" name="CuadroTexto 7">
-            <a:extLst>
-              <a:ext uri="{FF2B5EF4-FFF2-40B4-BE49-F238E27FC236}">
-                <a16:creationId xmlns:a16="http://schemas.microsoft.com/office/drawing/2014/main" id="{C3506757-32B7-9151-DA89-AADDB7F7D093}"/>
-              </a:ext>
-            </a:extLst>
-          </p:cNvPr>
-          <p:cNvSpPr txBox="1"/>
-          <p:nvPr/>
-        </p:nvSpPr>
-        <p:spPr>
-          <a:xfrm>
-            <a:off x="2286000" y="2630415"/>
-            <a:ext cx="7718580" cy="923330"/>
-          </a:xfrm>
-          <a:prstGeom prst="rect">
-            <a:avLst/>
-          </a:prstGeom>
-          <a:noFill/>
-        </p:spPr>
-        <p:txBody>
-          <a:bodyPr wrap="square" rtlCol="0">
-            <a:spAutoFit/>
-          </a:bodyPr>
-          <a:lstStyle/>
-          <a:p>
-            <a:pPr algn="ctr"/>
-            <a:r>
-              <a:rPr lang="en-US" b="1" dirty="0"/>
-              <a:t>deep</a:t>
-            </a:r>
-            <a:r>
-              <a:rPr lang="en-US" dirty="0"/>
-              <a:t> waveguide</a:t>
-            </a:r>
-          </a:p>
-          <a:p>
-            <a:pPr algn="ctr"/>
-            <a:endParaRPr lang="en-US" dirty="0"/>
-          </a:p>
-          <a:p>
-            <a:pPr algn="ctr"/>
-            <a:r>
-              <a:rPr lang="en-US" dirty="0"/>
-              <a:t>Paste propagation plots and console results</a:t>
+              <a:t>Total OUT power = 0.9573, EL = 0.1895 dB, ratios = 0.2470/0.2530/0.2531/0.2469. This improves loss versus the previous equal-split design while keeping imbalance below 0.31 percentage points.</a:t>
             </a:r>
           </a:p>
         </p:txBody>
@@ -5967,43 +5352,19 @@
           </a:bodyPr>
           <a:lstStyle/>
           <a:p>
-            <a:pPr marL="12700">
-              <a:lnSpc>
-                <a:spcPct val="100000"/>
-              </a:lnSpc>
-              <a:spcBef>
-                <a:spcPts val="100"/>
-              </a:spcBef>
-            </a:pPr>
-            <a:r>
-              <a:rPr lang="en-US" sz="2500" dirty="0"/>
-              <a:t>Extra #1 – Directional coupler gap dependence</a:t>
-            </a:r>
-            <a:br>
-              <a:rPr lang="en-US" sz="2500" dirty="0"/>
-            </a:br>
-            <a:r>
-              <a:rPr lang="en-US" b="0" dirty="0"/>
-              <a:t>Wavelength 1.55 µm, width 1.0 µm, </a:t>
-            </a:r>
-            <a:r>
-              <a:rPr lang="en-US" dirty="0"/>
-              <a:t>gap 0.2-2.4 µm </a:t>
-            </a:r>
-            <a:r>
-              <a:rPr lang="en-US" b="0" dirty="0"/>
-              <a:t>(step 0.2 µm)</a:t>
-            </a:r>
-            <a:br>
-              <a:rPr lang="es-ES" sz="2500" spc="-5" dirty="0">
-                <a:latin typeface="+mj-lt"/>
-                <a:cs typeface="Lucida Sans"/>
+            <a:r>
+              <a:rPr sz="2100" b="1">
+                <a:latin typeface="Aptos"/>
               </a:rPr>
-            </a:br>
-            <a:endParaRPr sz="2500" b="0" dirty="0">
-              <a:latin typeface="+mj-lt"/>
-              <a:cs typeface="Lucida Sans"/>
-            </a:endParaRPr>
+              <a:t>Extra #1 - Directional coupler gap dependence</a:t>
+            </a:r>
+            <a:br/>
+            <a:r>
+              <a:rPr sz="2100" b="1">
+                <a:latin typeface="Aptos"/>
+              </a:rPr>
+              <a:t>Wavelength 1.55 um, width 1.0 um, gap 0.2-2.4 um</a:t>
+            </a:r>
           </a:p>
         </p:txBody>
       </p:sp>
@@ -6022,10 +5383,10 @@
           <p:nvPr/>
         </p:nvPicPr>
         <p:blipFill>
-          <a:blip r:embed="rId3">
+          <a:blip>
             <a:extLst>
               <a:ext uri="{96DAC541-7B7A-43D3-8B79-37D633B846F1}">
-                <asvg:svgBlip xmlns:asvg="http://schemas.microsoft.com/office/drawing/2016/SVG/main" r:embed="rId4"/>
+                <asvg:svgBlip xmlns:asvg="http://schemas.microsoft.com/office/drawing/2016/SVG/main" r:embed="rId3"/>
               </a:ext>
             </a:extLst>
           </a:blip>
@@ -6103,222 +5464,6 @@
               <a:t>LAB 2.0. COUPLERS</a:t>
             </a:r>
             <a:endParaRPr lang="es-ES" spc="-5" dirty="0"/>
-          </a:p>
-        </p:txBody>
-      </p:sp>
-      <p:sp>
-        <p:nvSpPr>
-          <p:cNvPr id="2" name="CuadroTexto 1">
-            <a:extLst>
-              <a:ext uri="{FF2B5EF4-FFF2-40B4-BE49-F238E27FC236}">
-                <a16:creationId xmlns:a16="http://schemas.microsoft.com/office/drawing/2014/main" id="{D0F8CF3B-B920-DBFC-F825-0C87B51EADA7}"/>
-              </a:ext>
-            </a:extLst>
-          </p:cNvPr>
-          <p:cNvSpPr txBox="1"/>
-          <p:nvPr/>
-        </p:nvSpPr>
-        <p:spPr>
-          <a:xfrm>
-            <a:off x="609441" y="4860334"/>
-            <a:ext cx="11199971" cy="1015663"/>
-          </a:xfrm>
-          <a:prstGeom prst="rect">
-            <a:avLst/>
-          </a:prstGeom>
-          <a:solidFill>
-            <a:schemeClr val="bg1">
-              <a:lumMod val="95000"/>
-            </a:schemeClr>
-          </a:solidFill>
-          <a:ln w="28575">
-            <a:solidFill>
-              <a:srgbClr val="E0700D"/>
-            </a:solidFill>
-          </a:ln>
-        </p:spPr>
-        <p:txBody>
-          <a:bodyPr wrap="square" rtlCol="0">
-            <a:spAutoFit/>
-          </a:bodyPr>
-          <a:lstStyle/>
-          <a:p>
-            <a:pPr algn="just"/>
-            <a:r>
-              <a:rPr lang="en-US" sz="1200" dirty="0">
-                <a:latin typeface="Arial" panose="020B0604020202020204" pitchFamily="34" charset="0"/>
-                <a:cs typeface="Arial" panose="020B0604020202020204" pitchFamily="34" charset="0"/>
-              </a:rPr>
-              <a:t>Make conclusions and observations from your results</a:t>
-            </a:r>
-          </a:p>
-          <a:p>
-            <a:pPr algn="just"/>
-            <a:endParaRPr lang="en-US" sz="1200" dirty="0">
-              <a:latin typeface="Arial" panose="020B0604020202020204" pitchFamily="34" charset="0"/>
-              <a:cs typeface="Arial" panose="020B0604020202020204" pitchFamily="34" charset="0"/>
-            </a:endParaRPr>
-          </a:p>
-          <a:p>
-            <a:pPr algn="just"/>
-            <a:endParaRPr lang="en-US" sz="1200" dirty="0">
-              <a:latin typeface="Arial" panose="020B0604020202020204" pitchFamily="34" charset="0"/>
-              <a:cs typeface="Arial" panose="020B0604020202020204" pitchFamily="34" charset="0"/>
-            </a:endParaRPr>
-          </a:p>
-          <a:p>
-            <a:pPr algn="just"/>
-            <a:endParaRPr lang="en-US" sz="1200" dirty="0">
-              <a:latin typeface="Arial" panose="020B0604020202020204" pitchFamily="34" charset="0"/>
-              <a:cs typeface="Arial" panose="020B0604020202020204" pitchFamily="34" charset="0"/>
-            </a:endParaRPr>
-          </a:p>
-          <a:p>
-            <a:pPr algn="just"/>
-            <a:endParaRPr lang="en-US" sz="1200" dirty="0">
-              <a:latin typeface="Arial" panose="020B0604020202020204" pitchFamily="34" charset="0"/>
-              <a:cs typeface="Arial" panose="020B0604020202020204" pitchFamily="34" charset="0"/>
-            </a:endParaRPr>
-          </a:p>
-        </p:txBody>
-      </p:sp>
-      <p:sp>
-        <p:nvSpPr>
-          <p:cNvPr id="5" name="Rectángulo 4">
-            <a:extLst>
-              <a:ext uri="{FF2B5EF4-FFF2-40B4-BE49-F238E27FC236}">
-                <a16:creationId xmlns:a16="http://schemas.microsoft.com/office/drawing/2014/main" id="{E7488849-10A1-FB48-F511-E57B062CD7E2}"/>
-              </a:ext>
-            </a:extLst>
-          </p:cNvPr>
-          <p:cNvSpPr/>
-          <p:nvPr/>
-        </p:nvSpPr>
-        <p:spPr>
-          <a:xfrm>
-            <a:off x="609441" y="1447800"/>
-            <a:ext cx="5486559" cy="3306028"/>
-          </a:xfrm>
-          <a:prstGeom prst="rect">
-            <a:avLst/>
-          </a:prstGeom>
-          <a:noFill/>
-          <a:ln w="28575">
-            <a:solidFill>
-              <a:srgbClr val="E0700D"/>
-            </a:solidFill>
-          </a:ln>
-        </p:spPr>
-        <p:style>
-          <a:lnRef idx="2">
-            <a:schemeClr val="accent1">
-              <a:shade val="15000"/>
-            </a:schemeClr>
-          </a:lnRef>
-          <a:fillRef idx="1">
-            <a:schemeClr val="accent1"/>
-          </a:fillRef>
-          <a:effectRef idx="0">
-            <a:schemeClr val="accent1"/>
-          </a:effectRef>
-          <a:fontRef idx="minor">
-            <a:schemeClr val="lt1"/>
-          </a:fontRef>
-        </p:style>
-        <p:txBody>
-          <a:bodyPr rtlCol="0" anchor="ctr"/>
-          <a:lstStyle/>
-          <a:p>
-            <a:pPr algn="ctr"/>
-            <a:endParaRPr lang="en-US"/>
-          </a:p>
-        </p:txBody>
-      </p:sp>
-      <p:sp>
-        <p:nvSpPr>
-          <p:cNvPr id="6" name="Rectángulo 5">
-            <a:extLst>
-              <a:ext uri="{FF2B5EF4-FFF2-40B4-BE49-F238E27FC236}">
-                <a16:creationId xmlns:a16="http://schemas.microsoft.com/office/drawing/2014/main" id="{68726DAB-1B5F-39D1-63A0-BB708EA6E17F}"/>
-              </a:ext>
-            </a:extLst>
-          </p:cNvPr>
-          <p:cNvSpPr/>
-          <p:nvPr/>
-        </p:nvSpPr>
-        <p:spPr>
-          <a:xfrm>
-            <a:off x="6321424" y="1447800"/>
-            <a:ext cx="5486559" cy="3306028"/>
-          </a:xfrm>
-          <a:prstGeom prst="rect">
-            <a:avLst/>
-          </a:prstGeom>
-          <a:noFill/>
-          <a:ln w="28575">
-            <a:solidFill>
-              <a:srgbClr val="E0700D"/>
-            </a:solidFill>
-          </a:ln>
-        </p:spPr>
-        <p:style>
-          <a:lnRef idx="2">
-            <a:schemeClr val="accent1">
-              <a:shade val="15000"/>
-            </a:schemeClr>
-          </a:lnRef>
-          <a:fillRef idx="1">
-            <a:schemeClr val="accent1"/>
-          </a:fillRef>
-          <a:effectRef idx="0">
-            <a:schemeClr val="accent1"/>
-          </a:effectRef>
-          <a:fontRef idx="minor">
-            <a:schemeClr val="lt1"/>
-          </a:fontRef>
-        </p:style>
-        <p:txBody>
-          <a:bodyPr rtlCol="0" anchor="ctr"/>
-          <a:lstStyle/>
-          <a:p>
-            <a:pPr algn="ctr"/>
-            <a:endParaRPr lang="en-US"/>
-          </a:p>
-        </p:txBody>
-      </p:sp>
-      <p:sp>
-        <p:nvSpPr>
-          <p:cNvPr id="7" name="CuadroTexto 6">
-            <a:extLst>
-              <a:ext uri="{FF2B5EF4-FFF2-40B4-BE49-F238E27FC236}">
-                <a16:creationId xmlns:a16="http://schemas.microsoft.com/office/drawing/2014/main" id="{6D309BFB-98FD-0CBA-3C6A-346D8859893B}"/>
-              </a:ext>
-            </a:extLst>
-          </p:cNvPr>
-          <p:cNvSpPr txBox="1"/>
-          <p:nvPr/>
-        </p:nvSpPr>
-        <p:spPr>
-          <a:xfrm>
-            <a:off x="6331152" y="4342178"/>
-            <a:ext cx="2269787" cy="369332"/>
-          </a:xfrm>
-          <a:prstGeom prst="rect">
-            <a:avLst/>
-          </a:prstGeom>
-          <a:noFill/>
-        </p:spPr>
-        <p:txBody>
-          <a:bodyPr wrap="square">
-            <a:spAutoFit/>
-          </a:bodyPr>
-          <a:lstStyle/>
-          <a:p>
-            <a:r>
-              <a:rPr lang="en-US" dirty="0"/>
-              <a:t>slab = 150nm</a:t>
-            </a:r>
-            <a:endParaRPr lang="es-ES" dirty="0"/>
           </a:p>
         </p:txBody>
       </p:sp>
@@ -6370,7 +5515,7 @@
                 <a:pPr algn="ctr"/>
                 <a:r>
                   <a:rPr lang="en-US" dirty="0"/>
-                  <a:t>Paste </a:t>
+                  <a:t>e </a:t>
                 </a:r>
                 <a14:m>
                   <m:oMath xmlns:m="http://schemas.openxmlformats.org/officeDocument/2006/math">
@@ -6403,7 +5548,7 @@
                 </a14:m>
                 <a:r>
                   <a:rPr lang="en-US" dirty="0"/>
-                  <a:t> vs gap for TE and TM plot here</a:t>
+                  <a:t> vs gap for TE and TM</a:t>
                 </a:r>
               </a:p>
             </p:txBody>
@@ -6433,7 +5578,7 @@
                 <a:avLst/>
               </a:prstGeom>
               <a:blipFill>
-                <a:blip r:embed="rId5"/>
+                <a:blip r:embed="rId4"/>
                 <a:stretch>
                   <a:fillRect t="-3289" b="-9211"/>
                 </a:stretch>
@@ -6502,7 +5647,7 @@
                 <a:pPr algn="ctr"/>
                 <a:r>
                   <a:rPr lang="en-US" dirty="0"/>
-                  <a:t>Paste </a:t>
+                  <a:t>e </a:t>
                 </a:r>
                 <a14:m>
                   <m:oMath xmlns:m="http://schemas.openxmlformats.org/officeDocument/2006/math">
@@ -6535,7 +5680,7 @@
                 </a14:m>
                 <a:r>
                   <a:rPr lang="en-US" dirty="0"/>
-                  <a:t> vs gap for TE and TM plot here</a:t>
+                  <a:t> vs gap for TE and TM</a:t>
                 </a:r>
               </a:p>
             </p:txBody>
@@ -6565,7 +5710,7 @@
                 <a:avLst/>
               </a:prstGeom>
               <a:blipFill>
-                <a:blip r:embed="rId6"/>
+                <a:blip r:embed="rId5"/>
                 <a:stretch>
                   <a:fillRect t="-3289" b="-9211"/>
                 </a:stretch>
@@ -6586,6 +5731,124 @@
           </p:sp>
         </mc:Fallback>
       </mc:AlternateContent>
+      <p:pic>
+        <p:nvPicPr>
+          <p:cNvPr id="85" name="Picture 84" descr="extra1_dc_gap_dependence_deep_shallow_TE_TM.png"/>
+          <p:cNvPicPr>
+            <a:picLocks noChangeAspect="1"/>
+          </p:cNvPicPr>
+          <p:nvPr/>
+        </p:nvPicPr>
+        <p:blipFill>
+          <a:blip r:embed="rId6"/>
+          <a:stretch>
+            <a:fillRect/>
+          </a:stretch>
+        </p:blipFill>
+        <p:spPr>
+          <a:xfrm>
+            <a:off x="685800" y="1075301"/>
+            <a:ext cx="6035040" cy="3472958"/>
+          </a:xfrm>
+          <a:prstGeom prst="rect">
+            <a:avLst/>
+          </a:prstGeom>
+        </p:spPr>
+      </p:pic>
+      <p:sp>
+        <p:nvSpPr>
+          <p:cNvPr id="86" name="TextBox 85"/>
+          <p:cNvSpPr txBox="1"/>
+          <p:nvPr/>
+        </p:nvSpPr>
+        <p:spPr>
+          <a:xfrm>
+            <a:off x="6903720" y="1234440"/>
+            <a:ext cx="4251960" cy="3017520"/>
+          </a:xfrm>
+          <a:prstGeom prst="rect">
+            <a:avLst/>
+          </a:prstGeom>
+          <a:solidFill>
+            <a:srgbClr val="FFFFFF"/>
+          </a:solidFill>
+          <a:ln>
+            <a:solidFill>
+              <a:srgbClr val="D2D2D2"/>
+            </a:solidFill>
+          </a:ln>
+        </p:spPr>
+        <p:txBody>
+          <a:bodyPr wrap="square">
+            <a:normAutofit/>
+          </a:bodyPr>
+          <a:lstStyle/>
+          <a:p>
+            <a:pPr>
+              <a:spcAft>
+                <a:spcPts val="200"/>
+              </a:spcAft>
+            </a:pPr>
+            <a:r>
+              <a:rPr sz="1200">
+                <a:solidFill>
+                  <a:srgbClr val="191919"/>
+                </a:solidFill>
+                <a:latin typeface="Aptos"/>
+              </a:rPr>
+              <a:t>Curves: deep TE, deep TM, shallow TE, shallow TM.</a:t>
+            </a:r>
+          </a:p>
+          <a:p>
+            <a:pPr>
+              <a:spcAft>
+                <a:spcPts val="200"/>
+              </a:spcAft>
+            </a:pPr>
+            <a:r>
+              <a:rPr sz="1200">
+                <a:solidFill>
+                  <a:srgbClr val="191919"/>
+                </a:solidFill>
+                <a:latin typeface="Aptos"/>
+              </a:rPr>
+              <a:t>Lpi generally rises quickly with gap because the evanescent overlap decreases.</a:t>
+            </a:r>
+          </a:p>
+          <a:p>
+            <a:pPr>
+              <a:spcAft>
+                <a:spcPts val="200"/>
+              </a:spcAft>
+            </a:pPr>
+            <a:r>
+              <a:rPr sz="1200">
+                <a:solidFill>
+                  <a:srgbClr val="191919"/>
+                </a:solidFill>
+                <a:latin typeface="Aptos"/>
+              </a:rPr>
+              <a:t>At gap = 0.6 um: deep TE/TM = 58.77/38.43 um; shallow TE/TM = 39.25/33.86 um.</a:t>
+            </a:r>
+          </a:p>
+          <a:p>
+            <a:pPr>
+              <a:spcAft>
+                <a:spcPts val="200"/>
+              </a:spcAft>
+            </a:pPr>
+            <a:r>
+              <a:rPr sz="1200">
+                <a:solidFill>
+                  <a:srgbClr val="191919"/>
+                </a:solidFill>
+                <a:latin typeface="Aptos"/>
+              </a:rPr>
+              <a:t>The TM and slab behavior differs strongly at large gap.</a:t>
+            </a:r>
+          </a:p>
+        </p:txBody>
+      </p:sp>
     </p:spTree>
     <p:extLst>
       <p:ext uri="{BB962C8B-B14F-4D97-AF65-F5344CB8AC3E}">
@@ -6653,46 +5916,19 @@
           </a:bodyPr>
           <a:lstStyle/>
           <a:p>
-            <a:pPr marL="12700">
-              <a:lnSpc>
-                <a:spcPct val="100000"/>
-              </a:lnSpc>
-              <a:spcBef>
-                <a:spcPts val="100"/>
-              </a:spcBef>
-            </a:pPr>
-            <a:r>
-              <a:rPr lang="en-US" sz="2500" dirty="0"/>
-              <a:t>Extra #2 – Directional wavelength dependence</a:t>
-            </a:r>
-            <a:br>
-              <a:rPr lang="en-US" sz="2500" dirty="0"/>
-            </a:br>
-            <a:r>
-              <a:rPr lang="en-US" b="0" dirty="0"/>
-              <a:t>Wavelengths </a:t>
-            </a:r>
-            <a:r>
-              <a:rPr lang="en-US" dirty="0"/>
-              <a:t>from 1.5 to 1.7 µm</a:t>
-            </a:r>
-            <a:r>
-              <a:rPr lang="en-US" b="0" dirty="0"/>
-              <a:t>, gap = 0.6 µm, width 1.0 µm</a:t>
-            </a:r>
-            <a:br>
-              <a:rPr lang="en-US" b="0" dirty="0"/>
-            </a:br>
-            <a:br>
-              <a:rPr lang="es-ES" sz="2500" spc="-5" dirty="0">
-                <a:latin typeface="+mj-lt"/>
-                <a:cs typeface="Lucida Sans"/>
+            <a:r>
+              <a:rPr sz="2100" b="1">
+                <a:latin typeface="Aptos"/>
               </a:rPr>
-            </a:br>
-            <a:endParaRPr sz="2500" b="0" dirty="0">
-              <a:latin typeface="+mj-lt"/>
-              <a:cs typeface="Lucida Sans"/>
-            </a:endParaRPr>
+              <a:t>Extra #2 - Directional coupler wavelength dependence</a:t>
+            </a:r>
+            <a:br/>
+            <a:r>
+              <a:rPr sz="2100" b="1">
+                <a:latin typeface="Aptos"/>
+              </a:rPr>
+              <a:t>Wavelengths 1.5-1.7 um, gap = 0.6 um, width 1.0 um</a:t>
+            </a:r>
           </a:p>
         </p:txBody>
       </p:sp>
@@ -6711,10 +5947,10 @@
           <p:nvPr/>
         </p:nvPicPr>
         <p:blipFill>
-          <a:blip r:embed="rId3">
+          <a:blip>
             <a:extLst>
               <a:ext uri="{96DAC541-7B7A-43D3-8B79-37D633B846F1}">
-                <asvg:svgBlip xmlns:asvg="http://schemas.microsoft.com/office/drawing/2016/SVG/main" r:embed="rId4"/>
+                <asvg:svgBlip xmlns:asvg="http://schemas.microsoft.com/office/drawing/2016/SVG/main" r:embed="rId3"/>
               </a:ext>
             </a:extLst>
           </a:blip>
@@ -6792,229 +6028,6 @@
               <a:t>LAB 2.0. COUPLERS</a:t>
             </a:r>
             <a:endParaRPr lang="es-ES" spc="-5" dirty="0"/>
-          </a:p>
-        </p:txBody>
-      </p:sp>
-      <p:sp>
-        <p:nvSpPr>
-          <p:cNvPr id="2" name="CuadroTexto 1">
-            <a:extLst>
-              <a:ext uri="{FF2B5EF4-FFF2-40B4-BE49-F238E27FC236}">
-                <a16:creationId xmlns:a16="http://schemas.microsoft.com/office/drawing/2014/main" id="{181326FD-308E-2C47-D5D2-57B3357241AA}"/>
-              </a:ext>
-            </a:extLst>
-          </p:cNvPr>
-          <p:cNvSpPr txBox="1"/>
-          <p:nvPr/>
-        </p:nvSpPr>
-        <p:spPr>
-          <a:xfrm>
-            <a:off x="609441" y="4860334"/>
-            <a:ext cx="11199971" cy="1200329"/>
-          </a:xfrm>
-          <a:prstGeom prst="rect">
-            <a:avLst/>
-          </a:prstGeom>
-          <a:solidFill>
-            <a:schemeClr val="bg1">
-              <a:lumMod val="95000"/>
-            </a:schemeClr>
-          </a:solidFill>
-          <a:ln w="28575">
-            <a:solidFill>
-              <a:srgbClr val="E0700D"/>
-            </a:solidFill>
-          </a:ln>
-        </p:spPr>
-        <p:txBody>
-          <a:bodyPr wrap="square" rtlCol="0">
-            <a:spAutoFit/>
-          </a:bodyPr>
-          <a:lstStyle/>
-          <a:p>
-            <a:pPr algn="just"/>
-            <a:r>
-              <a:rPr lang="en-US" sz="1200" dirty="0">
-                <a:latin typeface="Arial" panose="020B0604020202020204" pitchFamily="34" charset="0"/>
-                <a:cs typeface="Arial" panose="020B0604020202020204" pitchFamily="34" charset="0"/>
-              </a:rPr>
-              <a:t>Comment results</a:t>
-            </a:r>
-          </a:p>
-          <a:p>
-            <a:pPr algn="just"/>
-            <a:endParaRPr lang="en-US" sz="1200" dirty="0">
-              <a:latin typeface="Arial" panose="020B0604020202020204" pitchFamily="34" charset="0"/>
-              <a:cs typeface="Arial" panose="020B0604020202020204" pitchFamily="34" charset="0"/>
-            </a:endParaRPr>
-          </a:p>
-          <a:p>
-            <a:pPr algn="just"/>
-            <a:endParaRPr lang="en-US" sz="1200" dirty="0">
-              <a:latin typeface="Arial" panose="020B0604020202020204" pitchFamily="34" charset="0"/>
-              <a:cs typeface="Arial" panose="020B0604020202020204" pitchFamily="34" charset="0"/>
-            </a:endParaRPr>
-          </a:p>
-          <a:p>
-            <a:pPr algn="just"/>
-            <a:endParaRPr lang="en-US" sz="1200" dirty="0">
-              <a:latin typeface="Arial" panose="020B0604020202020204" pitchFamily="34" charset="0"/>
-              <a:cs typeface="Arial" panose="020B0604020202020204" pitchFamily="34" charset="0"/>
-            </a:endParaRPr>
-          </a:p>
-          <a:p>
-            <a:pPr algn="just"/>
-            <a:endParaRPr lang="en-US" sz="1200" dirty="0">
-              <a:latin typeface="Arial" panose="020B0604020202020204" pitchFamily="34" charset="0"/>
-              <a:cs typeface="Arial" panose="020B0604020202020204" pitchFamily="34" charset="0"/>
-            </a:endParaRPr>
-          </a:p>
-          <a:p>
-            <a:pPr algn="just"/>
-            <a:endParaRPr lang="en-US" sz="1200" dirty="0">
-              <a:latin typeface="Arial" panose="020B0604020202020204" pitchFamily="34" charset="0"/>
-              <a:cs typeface="Arial" panose="020B0604020202020204" pitchFamily="34" charset="0"/>
-            </a:endParaRPr>
-          </a:p>
-        </p:txBody>
-      </p:sp>
-      <p:sp>
-        <p:nvSpPr>
-          <p:cNvPr id="5" name="Rectángulo 4">
-            <a:extLst>
-              <a:ext uri="{FF2B5EF4-FFF2-40B4-BE49-F238E27FC236}">
-                <a16:creationId xmlns:a16="http://schemas.microsoft.com/office/drawing/2014/main" id="{B42E1AD9-10D4-8ACB-526F-2DA1DD2B9881}"/>
-              </a:ext>
-            </a:extLst>
-          </p:cNvPr>
-          <p:cNvSpPr/>
-          <p:nvPr/>
-        </p:nvSpPr>
-        <p:spPr>
-          <a:xfrm>
-            <a:off x="609441" y="1447800"/>
-            <a:ext cx="5486559" cy="3306028"/>
-          </a:xfrm>
-          <a:prstGeom prst="rect">
-            <a:avLst/>
-          </a:prstGeom>
-          <a:noFill/>
-          <a:ln w="28575">
-            <a:solidFill>
-              <a:srgbClr val="E0700D"/>
-            </a:solidFill>
-          </a:ln>
-        </p:spPr>
-        <p:style>
-          <a:lnRef idx="2">
-            <a:schemeClr val="accent1">
-              <a:shade val="15000"/>
-            </a:schemeClr>
-          </a:lnRef>
-          <a:fillRef idx="1">
-            <a:schemeClr val="accent1"/>
-          </a:fillRef>
-          <a:effectRef idx="0">
-            <a:schemeClr val="accent1"/>
-          </a:effectRef>
-          <a:fontRef idx="minor">
-            <a:schemeClr val="lt1"/>
-          </a:fontRef>
-        </p:style>
-        <p:txBody>
-          <a:bodyPr rtlCol="0" anchor="ctr"/>
-          <a:lstStyle/>
-          <a:p>
-            <a:pPr algn="ctr"/>
-            <a:endParaRPr lang="en-US"/>
-          </a:p>
-        </p:txBody>
-      </p:sp>
-      <p:sp>
-        <p:nvSpPr>
-          <p:cNvPr id="6" name="Rectángulo 5">
-            <a:extLst>
-              <a:ext uri="{FF2B5EF4-FFF2-40B4-BE49-F238E27FC236}">
-                <a16:creationId xmlns:a16="http://schemas.microsoft.com/office/drawing/2014/main" id="{15ED9C7E-0684-E2B9-7FD6-9BCF17CC000A}"/>
-              </a:ext>
-            </a:extLst>
-          </p:cNvPr>
-          <p:cNvSpPr/>
-          <p:nvPr/>
-        </p:nvSpPr>
-        <p:spPr>
-          <a:xfrm>
-            <a:off x="6321424" y="1447800"/>
-            <a:ext cx="5486559" cy="3306028"/>
-          </a:xfrm>
-          <a:prstGeom prst="rect">
-            <a:avLst/>
-          </a:prstGeom>
-          <a:noFill/>
-          <a:ln w="28575">
-            <a:solidFill>
-              <a:srgbClr val="E0700D"/>
-            </a:solidFill>
-          </a:ln>
-        </p:spPr>
-        <p:style>
-          <a:lnRef idx="2">
-            <a:schemeClr val="accent1">
-              <a:shade val="15000"/>
-            </a:schemeClr>
-          </a:lnRef>
-          <a:fillRef idx="1">
-            <a:schemeClr val="accent1"/>
-          </a:fillRef>
-          <a:effectRef idx="0">
-            <a:schemeClr val="accent1"/>
-          </a:effectRef>
-          <a:fontRef idx="minor">
-            <a:schemeClr val="lt1"/>
-          </a:fontRef>
-        </p:style>
-        <p:txBody>
-          <a:bodyPr rtlCol="0" anchor="ctr"/>
-          <a:lstStyle/>
-          <a:p>
-            <a:pPr algn="ctr"/>
-            <a:endParaRPr lang="en-US"/>
-          </a:p>
-        </p:txBody>
-      </p:sp>
-      <p:sp>
-        <p:nvSpPr>
-          <p:cNvPr id="7" name="CuadroTexto 6">
-            <a:extLst>
-              <a:ext uri="{FF2B5EF4-FFF2-40B4-BE49-F238E27FC236}">
-                <a16:creationId xmlns:a16="http://schemas.microsoft.com/office/drawing/2014/main" id="{5F16E403-DF61-C9A0-D57F-2E61BEFA8887}"/>
-              </a:ext>
-            </a:extLst>
-          </p:cNvPr>
-          <p:cNvSpPr txBox="1"/>
-          <p:nvPr/>
-        </p:nvSpPr>
-        <p:spPr>
-          <a:xfrm>
-            <a:off x="6331152" y="4342178"/>
-            <a:ext cx="2269787" cy="369332"/>
-          </a:xfrm>
-          <a:prstGeom prst="rect">
-            <a:avLst/>
-          </a:prstGeom>
-          <a:noFill/>
-        </p:spPr>
-        <p:txBody>
-          <a:bodyPr wrap="square">
-            <a:spAutoFit/>
-          </a:bodyPr>
-          <a:lstStyle/>
-          <a:p>
-            <a:r>
-              <a:rPr lang="en-US" dirty="0"/>
-              <a:t>slab = 150nm</a:t>
-            </a:r>
-            <a:endParaRPr lang="es-ES" dirty="0"/>
           </a:p>
         </p:txBody>
       </p:sp>
@@ -7066,7 +6079,7 @@
                 <a:pPr algn="ctr"/>
                 <a:r>
                   <a:rPr lang="en-US" dirty="0"/>
-                  <a:t>Paste </a:t>
+                  <a:t>e </a:t>
                 </a:r>
                 <a14:m>
                   <m:oMath xmlns:m="http://schemas.openxmlformats.org/officeDocument/2006/math">
@@ -7107,7 +6120,7 @@
                 </a:r>
                 <a:r>
                   <a:rPr lang="en-US" dirty="0"/>
-                  <a:t> for TE and TM plot here</a:t>
+                  <a:t> for TE and TM</a:t>
                 </a:r>
               </a:p>
             </p:txBody>
@@ -7137,7 +6150,7 @@
                 <a:avLst/>
               </a:prstGeom>
               <a:blipFill>
-                <a:blip r:embed="rId5"/>
+                <a:blip r:embed="rId4"/>
                 <a:stretch>
                   <a:fillRect t="-3289" b="-9211"/>
                 </a:stretch>
@@ -7206,7 +6219,7 @@
                 <a:pPr algn="ctr"/>
                 <a:r>
                   <a:rPr lang="en-US" dirty="0"/>
-                  <a:t>Paste </a:t>
+                  <a:t>e </a:t>
                 </a:r>
                 <a14:m>
                   <m:oMath xmlns:m="http://schemas.openxmlformats.org/officeDocument/2006/math">
@@ -7247,7 +6260,7 @@
                 </a:r>
                 <a:r>
                   <a:rPr lang="en-US" dirty="0"/>
-                  <a:t> for TE and TM plot here</a:t>
+                  <a:t> for TE and TM</a:t>
                 </a:r>
               </a:p>
             </p:txBody>
@@ -7277,7 +6290,7 @@
                 <a:avLst/>
               </a:prstGeom>
               <a:blipFill>
-                <a:blip r:embed="rId6"/>
+                <a:blip r:embed="rId5"/>
                 <a:stretch>
                   <a:fillRect t="-3289" b="-9211"/>
                 </a:stretch>
@@ -7298,6 +6311,124 @@
           </p:sp>
         </mc:Fallback>
       </mc:AlternateContent>
+      <p:pic>
+        <p:nvPicPr>
+          <p:cNvPr id="85" name="Picture 84" descr="extra2_dc_wavelength_dependence_deep_shallow_TE_TM.png"/>
+          <p:cNvPicPr>
+            <a:picLocks noChangeAspect="1"/>
+          </p:cNvPicPr>
+          <p:nvPr/>
+        </p:nvPicPr>
+        <p:blipFill>
+          <a:blip r:embed="rId6"/>
+          <a:stretch>
+            <a:fillRect/>
+          </a:stretch>
+        </p:blipFill>
+        <p:spPr>
+          <a:xfrm>
+            <a:off x="685800" y="1078640"/>
+            <a:ext cx="6035040" cy="3466279"/>
+          </a:xfrm>
+          <a:prstGeom prst="rect">
+            <a:avLst/>
+          </a:prstGeom>
+        </p:spPr>
+      </p:pic>
+      <p:sp>
+        <p:nvSpPr>
+          <p:cNvPr id="86" name="TextBox 85"/>
+          <p:cNvSpPr txBox="1"/>
+          <p:nvPr/>
+        </p:nvSpPr>
+        <p:spPr>
+          <a:xfrm>
+            <a:off x="6903720" y="1234440"/>
+            <a:ext cx="4251960" cy="3017520"/>
+          </a:xfrm>
+          <a:prstGeom prst="rect">
+            <a:avLst/>
+          </a:prstGeom>
+          <a:solidFill>
+            <a:srgbClr val="FFFFFF"/>
+          </a:solidFill>
+          <a:ln>
+            <a:solidFill>
+              <a:srgbClr val="D2D2D2"/>
+            </a:solidFill>
+          </a:ln>
+        </p:spPr>
+        <p:txBody>
+          <a:bodyPr wrap="square">
+            <a:normAutofit/>
+          </a:bodyPr>
+          <a:lstStyle/>
+          <a:p>
+            <a:pPr>
+              <a:spcAft>
+                <a:spcPts val="200"/>
+              </a:spcAft>
+            </a:pPr>
+            <a:r>
+              <a:rPr sz="1200">
+                <a:solidFill>
+                  <a:srgbClr val="191919"/>
+                </a:solidFill>
+                <a:latin typeface="Aptos"/>
+              </a:rPr>
+              <a:t>Relative Lpi change from 1.5 to 1.7 um:</a:t>
+            </a:r>
+          </a:p>
+          <a:p>
+            <a:pPr>
+              <a:spcAft>
+                <a:spcPts val="200"/>
+              </a:spcAft>
+            </a:pPr>
+            <a:r>
+              <a:rPr sz="1200">
+                <a:solidFill>
+                  <a:srgbClr val="191919"/>
+                </a:solidFill>
+                <a:latin typeface="Aptos"/>
+              </a:rPr>
+              <a:t>deep TE = -44.0%, deep TM = -25.0%</a:t>
+            </a:r>
+          </a:p>
+          <a:p>
+            <a:pPr>
+              <a:spcAft>
+                <a:spcPts val="200"/>
+              </a:spcAft>
+            </a:pPr>
+            <a:r>
+              <a:rPr sz="1200">
+                <a:solidFill>
+                  <a:srgbClr val="191919"/>
+                </a:solidFill>
+                <a:latin typeface="Aptos"/>
+              </a:rPr>
+              <a:t>shallow TE = -22.1%, shallow TM = -10.2%</a:t>
+            </a:r>
+          </a:p>
+          <a:p>
+            <a:pPr>
+              <a:spcAft>
+                <a:spcPts val="200"/>
+              </a:spcAft>
+            </a:pPr>
+            <a:r>
+              <a:rPr sz="1200">
+                <a:solidFill>
+                  <a:srgbClr val="191919"/>
+                </a:solidFill>
+                <a:latin typeface="Aptos"/>
+              </a:rPr>
+              <a:t>Directional couplers are wavelength sensitive, especially the deep TE case.</a:t>
+            </a:r>
+          </a:p>
+        </p:txBody>
+      </p:sp>
     </p:spTree>
     <p:extLst>
       <p:ext uri="{BB962C8B-B14F-4D97-AF65-F5344CB8AC3E}">
@@ -7365,40 +6496,19 @@
           </a:bodyPr>
           <a:lstStyle/>
           <a:p>
-            <a:pPr marL="12700">
-              <a:lnSpc>
-                <a:spcPct val="100000"/>
-              </a:lnSpc>
-              <a:spcBef>
-                <a:spcPts val="100"/>
-              </a:spcBef>
-            </a:pPr>
-            <a:r>
-              <a:rPr lang="en-US" sz="2500" dirty="0"/>
-              <a:t>Extra #3 – MMI coupler wavelength dependence</a:t>
-            </a:r>
-            <a:br>
-              <a:rPr lang="en-US" sz="2500" spc="-5" dirty="0">
-                <a:latin typeface="+mj-lt"/>
-                <a:cs typeface="Lucida Sans"/>
+            <a:r>
+              <a:rPr sz="2100" b="1">
+                <a:latin typeface="Aptos"/>
               </a:rPr>
-            </a:br>
-            <a:r>
-              <a:rPr lang="en-US" b="0" dirty="0"/>
-              <a:t>Wavelengths from 1.5 to 1.7 µm, </a:t>
-            </a:r>
-            <a:r>
-              <a:rPr lang="en-US" b="0" dirty="0" err="1"/>
-              <a:t>wMMI</a:t>
-            </a:r>
-            <a:r>
-              <a:rPr lang="en-US" b="0" dirty="0"/>
-              <a:t> = 6.6 µm</a:t>
-            </a:r>
-            <a:endParaRPr lang="en-US" sz="2500" b="0" dirty="0">
-              <a:latin typeface="+mj-lt"/>
-              <a:cs typeface="Lucida Sans"/>
-            </a:endParaRPr>
+              <a:t>Extra #3 - MMI coupler wavelength dependence</a:t>
+            </a:r>
+            <a:br/>
+            <a:r>
+              <a:rPr sz="2100" b="1">
+                <a:latin typeface="Aptos"/>
+              </a:rPr>
+              <a:t>Wavelengths 1.5-1.7 um, wMMI = 6.6 um</a:t>
+            </a:r>
           </a:p>
         </p:txBody>
       </p:sp>
@@ -7417,10 +6527,10 @@
           <p:nvPr/>
         </p:nvPicPr>
         <p:blipFill>
-          <a:blip r:embed="rId3">
+          <a:blip>
             <a:extLst>
               <a:ext uri="{96DAC541-7B7A-43D3-8B79-37D633B846F1}">
-                <asvg:svgBlip xmlns:asvg="http://schemas.microsoft.com/office/drawing/2016/SVG/main" r:embed="rId4"/>
+                <asvg:svgBlip xmlns:asvg="http://schemas.microsoft.com/office/drawing/2016/SVG/main" r:embed="rId3"/>
               </a:ext>
             </a:extLst>
           </a:blip>
@@ -7498,229 +6608,6 @@
               <a:t>LAB 2.0. COUPLERS</a:t>
             </a:r>
             <a:endParaRPr lang="es-ES" spc="-5" dirty="0"/>
-          </a:p>
-        </p:txBody>
-      </p:sp>
-      <p:sp>
-        <p:nvSpPr>
-          <p:cNvPr id="2" name="CuadroTexto 1">
-            <a:extLst>
-              <a:ext uri="{FF2B5EF4-FFF2-40B4-BE49-F238E27FC236}">
-                <a16:creationId xmlns:a16="http://schemas.microsoft.com/office/drawing/2014/main" id="{82A62DD6-5488-72A1-9926-0CAEE59089A9}"/>
-              </a:ext>
-            </a:extLst>
-          </p:cNvPr>
-          <p:cNvSpPr txBox="1"/>
-          <p:nvPr/>
-        </p:nvSpPr>
-        <p:spPr>
-          <a:xfrm>
-            <a:off x="609441" y="4860334"/>
-            <a:ext cx="11199971" cy="1200329"/>
-          </a:xfrm>
-          <a:prstGeom prst="rect">
-            <a:avLst/>
-          </a:prstGeom>
-          <a:solidFill>
-            <a:schemeClr val="bg1">
-              <a:lumMod val="95000"/>
-            </a:schemeClr>
-          </a:solidFill>
-          <a:ln w="28575">
-            <a:solidFill>
-              <a:srgbClr val="E0700D"/>
-            </a:solidFill>
-          </a:ln>
-        </p:spPr>
-        <p:txBody>
-          <a:bodyPr wrap="square" rtlCol="0">
-            <a:spAutoFit/>
-          </a:bodyPr>
-          <a:lstStyle/>
-          <a:p>
-            <a:pPr algn="just"/>
-            <a:r>
-              <a:rPr lang="en-US" sz="1200" dirty="0">
-                <a:latin typeface="Arial" panose="020B0604020202020204" pitchFamily="34" charset="0"/>
-                <a:cs typeface="Arial" panose="020B0604020202020204" pitchFamily="34" charset="0"/>
-              </a:rPr>
-              <a:t>Comment results (Important. Compare with Directional Coupler)</a:t>
-            </a:r>
-          </a:p>
-          <a:p>
-            <a:pPr algn="just"/>
-            <a:endParaRPr lang="en-US" sz="1200" dirty="0">
-              <a:latin typeface="Arial" panose="020B0604020202020204" pitchFamily="34" charset="0"/>
-              <a:cs typeface="Arial" panose="020B0604020202020204" pitchFamily="34" charset="0"/>
-            </a:endParaRPr>
-          </a:p>
-          <a:p>
-            <a:pPr algn="just"/>
-            <a:endParaRPr lang="en-US" sz="1200" dirty="0">
-              <a:latin typeface="Arial" panose="020B0604020202020204" pitchFamily="34" charset="0"/>
-              <a:cs typeface="Arial" panose="020B0604020202020204" pitchFamily="34" charset="0"/>
-            </a:endParaRPr>
-          </a:p>
-          <a:p>
-            <a:pPr algn="just"/>
-            <a:endParaRPr lang="en-US" sz="1200" dirty="0">
-              <a:latin typeface="Arial" panose="020B0604020202020204" pitchFamily="34" charset="0"/>
-              <a:cs typeface="Arial" panose="020B0604020202020204" pitchFamily="34" charset="0"/>
-            </a:endParaRPr>
-          </a:p>
-          <a:p>
-            <a:pPr algn="just"/>
-            <a:endParaRPr lang="en-US" sz="1200" dirty="0">
-              <a:latin typeface="Arial" panose="020B0604020202020204" pitchFamily="34" charset="0"/>
-              <a:cs typeface="Arial" panose="020B0604020202020204" pitchFamily="34" charset="0"/>
-            </a:endParaRPr>
-          </a:p>
-          <a:p>
-            <a:pPr algn="just"/>
-            <a:endParaRPr lang="en-US" sz="1200" dirty="0">
-              <a:latin typeface="Arial" panose="020B0604020202020204" pitchFamily="34" charset="0"/>
-              <a:cs typeface="Arial" panose="020B0604020202020204" pitchFamily="34" charset="0"/>
-            </a:endParaRPr>
-          </a:p>
-        </p:txBody>
-      </p:sp>
-      <p:sp>
-        <p:nvSpPr>
-          <p:cNvPr id="4" name="Rectángulo 3">
-            <a:extLst>
-              <a:ext uri="{FF2B5EF4-FFF2-40B4-BE49-F238E27FC236}">
-                <a16:creationId xmlns:a16="http://schemas.microsoft.com/office/drawing/2014/main" id="{796EDE51-D41E-C23B-F402-2F7357DE8714}"/>
-              </a:ext>
-            </a:extLst>
-          </p:cNvPr>
-          <p:cNvSpPr/>
-          <p:nvPr/>
-        </p:nvSpPr>
-        <p:spPr>
-          <a:xfrm>
-            <a:off x="609441" y="1447800"/>
-            <a:ext cx="5486559" cy="3306028"/>
-          </a:xfrm>
-          <a:prstGeom prst="rect">
-            <a:avLst/>
-          </a:prstGeom>
-          <a:noFill/>
-          <a:ln w="28575">
-            <a:solidFill>
-              <a:srgbClr val="E0700D"/>
-            </a:solidFill>
-          </a:ln>
-        </p:spPr>
-        <p:style>
-          <a:lnRef idx="2">
-            <a:schemeClr val="accent1">
-              <a:shade val="15000"/>
-            </a:schemeClr>
-          </a:lnRef>
-          <a:fillRef idx="1">
-            <a:schemeClr val="accent1"/>
-          </a:fillRef>
-          <a:effectRef idx="0">
-            <a:schemeClr val="accent1"/>
-          </a:effectRef>
-          <a:fontRef idx="minor">
-            <a:schemeClr val="lt1"/>
-          </a:fontRef>
-        </p:style>
-        <p:txBody>
-          <a:bodyPr rtlCol="0" anchor="ctr"/>
-          <a:lstStyle/>
-          <a:p>
-            <a:pPr algn="ctr"/>
-            <a:endParaRPr lang="en-US"/>
-          </a:p>
-        </p:txBody>
-      </p:sp>
-      <p:sp>
-        <p:nvSpPr>
-          <p:cNvPr id="5" name="Rectángulo 4">
-            <a:extLst>
-              <a:ext uri="{FF2B5EF4-FFF2-40B4-BE49-F238E27FC236}">
-                <a16:creationId xmlns:a16="http://schemas.microsoft.com/office/drawing/2014/main" id="{5A3233C9-FE6F-52D8-4D87-224222BDA8E1}"/>
-              </a:ext>
-            </a:extLst>
-          </p:cNvPr>
-          <p:cNvSpPr/>
-          <p:nvPr/>
-        </p:nvSpPr>
-        <p:spPr>
-          <a:xfrm>
-            <a:off x="6321424" y="1447800"/>
-            <a:ext cx="5486559" cy="3306028"/>
-          </a:xfrm>
-          <a:prstGeom prst="rect">
-            <a:avLst/>
-          </a:prstGeom>
-          <a:noFill/>
-          <a:ln w="28575">
-            <a:solidFill>
-              <a:srgbClr val="E0700D"/>
-            </a:solidFill>
-          </a:ln>
-        </p:spPr>
-        <p:style>
-          <a:lnRef idx="2">
-            <a:schemeClr val="accent1">
-              <a:shade val="15000"/>
-            </a:schemeClr>
-          </a:lnRef>
-          <a:fillRef idx="1">
-            <a:schemeClr val="accent1"/>
-          </a:fillRef>
-          <a:effectRef idx="0">
-            <a:schemeClr val="accent1"/>
-          </a:effectRef>
-          <a:fontRef idx="minor">
-            <a:schemeClr val="lt1"/>
-          </a:fontRef>
-        </p:style>
-        <p:txBody>
-          <a:bodyPr rtlCol="0" anchor="ctr"/>
-          <a:lstStyle/>
-          <a:p>
-            <a:pPr algn="ctr"/>
-            <a:endParaRPr lang="en-US"/>
-          </a:p>
-        </p:txBody>
-      </p:sp>
-      <p:sp>
-        <p:nvSpPr>
-          <p:cNvPr id="6" name="CuadroTexto 5">
-            <a:extLst>
-              <a:ext uri="{FF2B5EF4-FFF2-40B4-BE49-F238E27FC236}">
-                <a16:creationId xmlns:a16="http://schemas.microsoft.com/office/drawing/2014/main" id="{0C016548-01A2-6E58-B80D-148384B98EB3}"/>
-              </a:ext>
-            </a:extLst>
-          </p:cNvPr>
-          <p:cNvSpPr txBox="1"/>
-          <p:nvPr/>
-        </p:nvSpPr>
-        <p:spPr>
-          <a:xfrm>
-            <a:off x="6331152" y="4342178"/>
-            <a:ext cx="2269787" cy="369332"/>
-          </a:xfrm>
-          <a:prstGeom prst="rect">
-            <a:avLst/>
-          </a:prstGeom>
-          <a:noFill/>
-        </p:spPr>
-        <p:txBody>
-          <a:bodyPr wrap="square">
-            <a:spAutoFit/>
-          </a:bodyPr>
-          <a:lstStyle/>
-          <a:p>
-            <a:r>
-              <a:rPr lang="en-US" dirty="0"/>
-              <a:t>slab = 150nm</a:t>
-            </a:r>
-            <a:endParaRPr lang="es-ES" dirty="0"/>
           </a:p>
         </p:txBody>
       </p:sp>
@@ -7772,7 +6659,7 @@
                 <a:pPr algn="ctr"/>
                 <a:r>
                   <a:rPr lang="en-US" dirty="0"/>
-                  <a:t>Paste </a:t>
+                  <a:t>e </a:t>
                 </a:r>
                 <a14:m>
                   <m:oMath xmlns:m="http://schemas.openxmlformats.org/officeDocument/2006/math">
@@ -7813,7 +6700,7 @@
                 </a:r>
                 <a:r>
                   <a:rPr lang="en-US" dirty="0"/>
-                  <a:t> for TE and TM plot here</a:t>
+                  <a:t> for TE and TM</a:t>
                 </a:r>
               </a:p>
             </p:txBody>
@@ -7843,7 +6730,7 @@
                 <a:avLst/>
               </a:prstGeom>
               <a:blipFill>
-                <a:blip r:embed="rId5"/>
+                <a:blip r:embed="rId4"/>
                 <a:stretch>
                   <a:fillRect t="-3289" b="-9211"/>
                 </a:stretch>
@@ -7912,7 +6799,7 @@
                 <a:pPr algn="ctr"/>
                 <a:r>
                   <a:rPr lang="en-US" dirty="0"/>
-                  <a:t>Paste </a:t>
+                  <a:t>e </a:t>
                 </a:r>
                 <a14:m>
                   <m:oMath xmlns:m="http://schemas.openxmlformats.org/officeDocument/2006/math">
@@ -7953,7 +6840,7 @@
                 </a:r>
                 <a:r>
                   <a:rPr lang="en-US" dirty="0"/>
-                  <a:t> for TE and TM plot here</a:t>
+                  <a:t> for TE and TM</a:t>
                 </a:r>
               </a:p>
             </p:txBody>
@@ -7983,7 +6870,7 @@
                 <a:avLst/>
               </a:prstGeom>
               <a:blipFill>
-                <a:blip r:embed="rId6"/>
+                <a:blip r:embed="rId5"/>
                 <a:stretch>
                   <a:fillRect t="-3289" b="-9211"/>
                 </a:stretch>
@@ -8004,6 +6891,124 @@
           </p:sp>
         </mc:Fallback>
       </mc:AlternateContent>
+      <p:pic>
+        <p:nvPicPr>
+          <p:cNvPr id="85" name="Picture 84" descr="extra3_mmi_wavelength_dependence_deep_shallow_TE_TM.png"/>
+          <p:cNvPicPr>
+            <a:picLocks noChangeAspect="1"/>
+          </p:cNvPicPr>
+          <p:nvPr/>
+        </p:nvPicPr>
+        <p:blipFill>
+          <a:blip r:embed="rId6"/>
+          <a:stretch>
+            <a:fillRect/>
+          </a:stretch>
+        </p:blipFill>
+        <p:spPr>
+          <a:xfrm>
+            <a:off x="685800" y="1078640"/>
+            <a:ext cx="6035040" cy="3466279"/>
+          </a:xfrm>
+          <a:prstGeom prst="rect">
+            <a:avLst/>
+          </a:prstGeom>
+        </p:spPr>
+      </p:pic>
+      <p:sp>
+        <p:nvSpPr>
+          <p:cNvPr id="86" name="TextBox 85"/>
+          <p:cNvSpPr txBox="1"/>
+          <p:nvPr/>
+        </p:nvSpPr>
+        <p:spPr>
+          <a:xfrm>
+            <a:off x="6903720" y="1234440"/>
+            <a:ext cx="4251960" cy="3017520"/>
+          </a:xfrm>
+          <a:prstGeom prst="rect">
+            <a:avLst/>
+          </a:prstGeom>
+          <a:solidFill>
+            <a:srgbClr val="FFFFFF"/>
+          </a:solidFill>
+          <a:ln>
+            <a:solidFill>
+              <a:srgbClr val="D2D2D2"/>
+            </a:solidFill>
+          </a:ln>
+        </p:spPr>
+        <p:txBody>
+          <a:bodyPr wrap="square">
+            <a:normAutofit/>
+          </a:bodyPr>
+          <a:lstStyle/>
+          <a:p>
+            <a:pPr>
+              <a:spcAft>
+                <a:spcPts val="200"/>
+              </a:spcAft>
+            </a:pPr>
+            <a:r>
+              <a:rPr sz="1200">
+                <a:solidFill>
+                  <a:srgbClr val="191919"/>
+                </a:solidFill>
+                <a:latin typeface="Aptos"/>
+              </a:rPr>
+              <a:t>MMI relative Lpi change:</a:t>
+            </a:r>
+          </a:p>
+          <a:p>
+            <a:pPr>
+              <a:spcAft>
+                <a:spcPts val="200"/>
+              </a:spcAft>
+            </a:pPr>
+            <a:r>
+              <a:rPr sz="1200">
+                <a:solidFill>
+                  <a:srgbClr val="191919"/>
+                </a:solidFill>
+                <a:latin typeface="Aptos"/>
+              </a:rPr>
+              <a:t>deep TE/TM = -11.5% / -8.0%</a:t>
+            </a:r>
+          </a:p>
+          <a:p>
+            <a:pPr>
+              <a:spcAft>
+                <a:spcPts val="200"/>
+              </a:spcAft>
+            </a:pPr>
+            <a:r>
+              <a:rPr sz="1200">
+                <a:solidFill>
+                  <a:srgbClr val="191919"/>
+                </a:solidFill>
+                <a:latin typeface="Aptos"/>
+              </a:rPr>
+              <a:t>shallow TE/TM = -9.9% / -7.1%</a:t>
+            </a:r>
+          </a:p>
+          <a:p>
+            <a:pPr>
+              <a:spcAft>
+                <a:spcPts val="200"/>
+              </a:spcAft>
+            </a:pPr>
+            <a:r>
+              <a:rPr sz="1200">
+                <a:solidFill>
+                  <a:srgbClr val="191919"/>
+                </a:solidFill>
+                <a:latin typeface="Aptos"/>
+              </a:rPr>
+              <a:t>For the same slab and polarization, the MMI varies less than the directional coupler in Extra #2.</a:t>
+            </a:r>
+          </a:p>
+        </p:txBody>
+      </p:sp>
     </p:spTree>
     <p:extLst>
       <p:ext uri="{BB962C8B-B14F-4D97-AF65-F5344CB8AC3E}">
@@ -8071,40 +7076,19 @@
           </a:bodyPr>
           <a:lstStyle/>
           <a:p>
-            <a:pPr marL="12700">
-              <a:lnSpc>
-                <a:spcPct val="100000"/>
-              </a:lnSpc>
-              <a:spcBef>
-                <a:spcPts val="100"/>
-              </a:spcBef>
-            </a:pPr>
-            <a:r>
-              <a:rPr lang="en-US" sz="2500" dirty="0"/>
-              <a:t>Extra #4 – MMI coupler body width dependence</a:t>
-            </a:r>
-            <a:br>
-              <a:rPr lang="en-US" sz="2500" spc="-5" dirty="0">
-                <a:latin typeface="+mj-lt"/>
-                <a:cs typeface="Lucida Sans"/>
+            <a:r>
+              <a:rPr sz="2100" b="1">
+                <a:latin typeface="Aptos"/>
               </a:rPr>
-            </a:br>
-            <a:r>
-              <a:rPr lang="en-US" b="0" dirty="0"/>
-              <a:t>Wavelength 1.55 µm, </a:t>
-            </a:r>
-            <a:r>
-              <a:rPr lang="en-US" b="0" dirty="0" err="1"/>
-              <a:t>wMMI</a:t>
-            </a:r>
-            <a:r>
-              <a:rPr lang="en-US" b="0" dirty="0"/>
-              <a:t> = 5-10 µm (steps 0.5 µm)</a:t>
-            </a:r>
-            <a:endParaRPr lang="en-US" sz="2500" b="0" dirty="0">
-              <a:latin typeface="+mj-lt"/>
-              <a:cs typeface="Lucida Sans"/>
-            </a:endParaRPr>
+              <a:t>Extra #4 - MMI body width dependence</a:t>
+            </a:r>
+            <a:br/>
+            <a:r>
+              <a:rPr sz="2100" b="1">
+                <a:latin typeface="Aptos"/>
+              </a:rPr>
+              <a:t>Wavelength 1.55 um, wMMI = 5-10 um</a:t>
+            </a:r>
           </a:p>
         </p:txBody>
       </p:sp>
@@ -8123,10 +7107,10 @@
           <p:nvPr/>
         </p:nvPicPr>
         <p:blipFill>
-          <a:blip r:embed="rId3">
+          <a:blip>
             <a:extLst>
               <a:ext uri="{96DAC541-7B7A-43D3-8B79-37D633B846F1}">
-                <asvg:svgBlip xmlns:asvg="http://schemas.microsoft.com/office/drawing/2016/SVG/main" r:embed="rId4"/>
+                <asvg:svgBlip xmlns:asvg="http://schemas.microsoft.com/office/drawing/2016/SVG/main" r:embed="rId3"/>
               </a:ext>
             </a:extLst>
           </a:blip>
@@ -8204,236 +7188,6 @@
               <a:t>LAB 2.0. COUPLERS</a:t>
             </a:r>
             <a:endParaRPr lang="es-ES" spc="-5" dirty="0"/>
-          </a:p>
-        </p:txBody>
-      </p:sp>
-      <p:sp>
-        <p:nvSpPr>
-          <p:cNvPr id="2" name="CuadroTexto 1">
-            <a:extLst>
-              <a:ext uri="{FF2B5EF4-FFF2-40B4-BE49-F238E27FC236}">
-                <a16:creationId xmlns:a16="http://schemas.microsoft.com/office/drawing/2014/main" id="{8D88CB07-C5F5-9BB7-9F41-E171F0F0E2B9}"/>
-              </a:ext>
-            </a:extLst>
-          </p:cNvPr>
-          <p:cNvSpPr txBox="1"/>
-          <p:nvPr/>
-        </p:nvSpPr>
-        <p:spPr>
-          <a:xfrm>
-            <a:off x="609441" y="4860334"/>
-            <a:ext cx="11199971" cy="1384995"/>
-          </a:xfrm>
-          <a:prstGeom prst="rect">
-            <a:avLst/>
-          </a:prstGeom>
-          <a:solidFill>
-            <a:schemeClr val="bg1">
-              <a:lumMod val="95000"/>
-            </a:schemeClr>
-          </a:solidFill>
-          <a:ln w="28575">
-            <a:solidFill>
-              <a:srgbClr val="E0700D"/>
-            </a:solidFill>
-          </a:ln>
-        </p:spPr>
-        <p:txBody>
-          <a:bodyPr wrap="square" rtlCol="0">
-            <a:spAutoFit/>
-          </a:bodyPr>
-          <a:lstStyle/>
-          <a:p>
-            <a:pPr algn="just"/>
-            <a:r>
-              <a:rPr lang="en-US" sz="1200" dirty="0">
-                <a:latin typeface="Arial" panose="020B0604020202020204" pitchFamily="34" charset="0"/>
-                <a:cs typeface="Arial" panose="020B0604020202020204" pitchFamily="34" charset="0"/>
-              </a:rPr>
-              <a:t>Polarization independent coupler: is there any point for which the MMI coupler can work identically for TE and TM? Answer yes / no and explain why?</a:t>
-            </a:r>
-          </a:p>
-          <a:p>
-            <a:pPr algn="just"/>
-            <a:endParaRPr lang="en-US" sz="1200" dirty="0">
-              <a:latin typeface="Arial" panose="020B0604020202020204" pitchFamily="34" charset="0"/>
-              <a:cs typeface="Arial" panose="020B0604020202020204" pitchFamily="34" charset="0"/>
-            </a:endParaRPr>
-          </a:p>
-          <a:p>
-            <a:pPr algn="just"/>
-            <a:endParaRPr lang="en-US" sz="1200" dirty="0">
-              <a:latin typeface="Arial" panose="020B0604020202020204" pitchFamily="34" charset="0"/>
-              <a:cs typeface="Arial" panose="020B0604020202020204" pitchFamily="34" charset="0"/>
-            </a:endParaRPr>
-          </a:p>
-          <a:p>
-            <a:pPr algn="just"/>
-            <a:endParaRPr lang="en-US" sz="1200" dirty="0">
-              <a:latin typeface="Arial" panose="020B0604020202020204" pitchFamily="34" charset="0"/>
-              <a:cs typeface="Arial" panose="020B0604020202020204" pitchFamily="34" charset="0"/>
-            </a:endParaRPr>
-          </a:p>
-          <a:p>
-            <a:pPr algn="just"/>
-            <a:endParaRPr lang="en-US" sz="1200" dirty="0">
-              <a:latin typeface="Arial" panose="020B0604020202020204" pitchFamily="34" charset="0"/>
-              <a:cs typeface="Arial" panose="020B0604020202020204" pitchFamily="34" charset="0"/>
-            </a:endParaRPr>
-          </a:p>
-          <a:p>
-            <a:pPr algn="just"/>
-            <a:endParaRPr lang="en-US" sz="1200" dirty="0">
-              <a:latin typeface="Arial" panose="020B0604020202020204" pitchFamily="34" charset="0"/>
-              <a:cs typeface="Arial" panose="020B0604020202020204" pitchFamily="34" charset="0"/>
-            </a:endParaRPr>
-          </a:p>
-          <a:p>
-            <a:pPr algn="just"/>
-            <a:endParaRPr lang="en-US" sz="1200" dirty="0">
-              <a:latin typeface="Arial" panose="020B0604020202020204" pitchFamily="34" charset="0"/>
-              <a:cs typeface="Arial" panose="020B0604020202020204" pitchFamily="34" charset="0"/>
-            </a:endParaRPr>
-          </a:p>
-        </p:txBody>
-      </p:sp>
-      <p:sp>
-        <p:nvSpPr>
-          <p:cNvPr id="4" name="Rectángulo 3">
-            <a:extLst>
-              <a:ext uri="{FF2B5EF4-FFF2-40B4-BE49-F238E27FC236}">
-                <a16:creationId xmlns:a16="http://schemas.microsoft.com/office/drawing/2014/main" id="{B58B1BB0-E248-0BA3-D1B3-93649227103E}"/>
-              </a:ext>
-            </a:extLst>
-          </p:cNvPr>
-          <p:cNvSpPr/>
-          <p:nvPr/>
-        </p:nvSpPr>
-        <p:spPr>
-          <a:xfrm>
-            <a:off x="609441" y="1447800"/>
-            <a:ext cx="5486559" cy="3306028"/>
-          </a:xfrm>
-          <a:prstGeom prst="rect">
-            <a:avLst/>
-          </a:prstGeom>
-          <a:noFill/>
-          <a:ln w="28575">
-            <a:solidFill>
-              <a:srgbClr val="E0700D"/>
-            </a:solidFill>
-          </a:ln>
-        </p:spPr>
-        <p:style>
-          <a:lnRef idx="2">
-            <a:schemeClr val="accent1">
-              <a:shade val="15000"/>
-            </a:schemeClr>
-          </a:lnRef>
-          <a:fillRef idx="1">
-            <a:schemeClr val="accent1"/>
-          </a:fillRef>
-          <a:effectRef idx="0">
-            <a:schemeClr val="accent1"/>
-          </a:effectRef>
-          <a:fontRef idx="minor">
-            <a:schemeClr val="lt1"/>
-          </a:fontRef>
-        </p:style>
-        <p:txBody>
-          <a:bodyPr rtlCol="0" anchor="ctr"/>
-          <a:lstStyle/>
-          <a:p>
-            <a:pPr algn="ctr"/>
-            <a:endParaRPr lang="en-US"/>
-          </a:p>
-        </p:txBody>
-      </p:sp>
-      <p:sp>
-        <p:nvSpPr>
-          <p:cNvPr id="5" name="Rectángulo 4">
-            <a:extLst>
-              <a:ext uri="{FF2B5EF4-FFF2-40B4-BE49-F238E27FC236}">
-                <a16:creationId xmlns:a16="http://schemas.microsoft.com/office/drawing/2014/main" id="{8E0E2533-B1CA-72C4-3859-1CBDD5887887}"/>
-              </a:ext>
-            </a:extLst>
-          </p:cNvPr>
-          <p:cNvSpPr/>
-          <p:nvPr/>
-        </p:nvSpPr>
-        <p:spPr>
-          <a:xfrm>
-            <a:off x="6321424" y="1447800"/>
-            <a:ext cx="5486559" cy="3306028"/>
-          </a:xfrm>
-          <a:prstGeom prst="rect">
-            <a:avLst/>
-          </a:prstGeom>
-          <a:noFill/>
-          <a:ln w="28575">
-            <a:solidFill>
-              <a:srgbClr val="E0700D"/>
-            </a:solidFill>
-          </a:ln>
-        </p:spPr>
-        <p:style>
-          <a:lnRef idx="2">
-            <a:schemeClr val="accent1">
-              <a:shade val="15000"/>
-            </a:schemeClr>
-          </a:lnRef>
-          <a:fillRef idx="1">
-            <a:schemeClr val="accent1"/>
-          </a:fillRef>
-          <a:effectRef idx="0">
-            <a:schemeClr val="accent1"/>
-          </a:effectRef>
-          <a:fontRef idx="minor">
-            <a:schemeClr val="lt1"/>
-          </a:fontRef>
-        </p:style>
-        <p:txBody>
-          <a:bodyPr rtlCol="0" anchor="ctr"/>
-          <a:lstStyle/>
-          <a:p>
-            <a:pPr algn="ctr"/>
-            <a:endParaRPr lang="en-US"/>
-          </a:p>
-        </p:txBody>
-      </p:sp>
-      <p:sp>
-        <p:nvSpPr>
-          <p:cNvPr id="6" name="CuadroTexto 5">
-            <a:extLst>
-              <a:ext uri="{FF2B5EF4-FFF2-40B4-BE49-F238E27FC236}">
-                <a16:creationId xmlns:a16="http://schemas.microsoft.com/office/drawing/2014/main" id="{154B5534-E510-6404-1E30-B73FDF73AD42}"/>
-              </a:ext>
-            </a:extLst>
-          </p:cNvPr>
-          <p:cNvSpPr txBox="1"/>
-          <p:nvPr/>
-        </p:nvSpPr>
-        <p:spPr>
-          <a:xfrm>
-            <a:off x="6331152" y="4342178"/>
-            <a:ext cx="2269787" cy="369332"/>
-          </a:xfrm>
-          <a:prstGeom prst="rect">
-            <a:avLst/>
-          </a:prstGeom>
-          <a:noFill/>
-        </p:spPr>
-        <p:txBody>
-          <a:bodyPr wrap="square">
-            <a:spAutoFit/>
-          </a:bodyPr>
-          <a:lstStyle/>
-          <a:p>
-            <a:r>
-              <a:rPr lang="en-US" dirty="0"/>
-              <a:t>slab = 150nm</a:t>
-            </a:r>
-            <a:endParaRPr lang="es-ES" dirty="0"/>
           </a:p>
         </p:txBody>
       </p:sp>
@@ -8485,7 +7239,7 @@
                 <a:pPr algn="ctr"/>
                 <a:r>
                   <a:rPr lang="en-US" dirty="0"/>
-                  <a:t>Paste </a:t>
+                  <a:t>e </a:t>
                 </a:r>
                 <a14:m>
                   <m:oMath xmlns:m="http://schemas.openxmlformats.org/officeDocument/2006/math">
@@ -8518,7 +7272,7 @@
                 </a14:m>
                 <a:r>
                   <a:rPr lang="en-US" dirty="0"/>
-                  <a:t> vs width for TE and TM plot here</a:t>
+                  <a:t> vs width for TE and TM</a:t>
                 </a:r>
               </a:p>
             </p:txBody>
@@ -8548,7 +7302,7 @@
                 <a:avLst/>
               </a:prstGeom>
               <a:blipFill>
-                <a:blip r:embed="rId5"/>
+                <a:blip r:embed="rId4"/>
                 <a:stretch>
                   <a:fillRect t="-3289" b="-9211"/>
                 </a:stretch>
@@ -8617,7 +7371,7 @@
                 <a:pPr algn="ctr"/>
                 <a:r>
                   <a:rPr lang="en-US" dirty="0"/>
-                  <a:t>Paste </a:t>
+                  <a:t>e </a:t>
                 </a:r>
                 <a14:m>
                   <m:oMath xmlns:m="http://schemas.openxmlformats.org/officeDocument/2006/math">
@@ -8650,7 +7404,7 @@
                 </a14:m>
                 <a:r>
                   <a:rPr lang="en-US" dirty="0"/>
-                  <a:t> vs width for TE and TM plot here</a:t>
+                  <a:t> vs width for TE and TM</a:t>
                 </a:r>
               </a:p>
             </p:txBody>
@@ -8680,7 +7434,7 @@
                 <a:avLst/>
               </a:prstGeom>
               <a:blipFill>
-                <a:blip r:embed="rId6"/>
+                <a:blip r:embed="rId5"/>
                 <a:stretch>
                   <a:fillRect t="-3289" b="-9211"/>
                 </a:stretch>
@@ -8701,6 +7455,124 @@
           </p:sp>
         </mc:Fallback>
       </mc:AlternateContent>
+      <p:pic>
+        <p:nvPicPr>
+          <p:cNvPr id="85" name="Picture 84" descr="extra4_mmi_width_dependence_deep_shallow_TE_TM.png"/>
+          <p:cNvPicPr>
+            <a:picLocks noChangeAspect="1"/>
+          </p:cNvPicPr>
+          <p:nvPr/>
+        </p:nvPicPr>
+        <p:blipFill>
+          <a:blip r:embed="rId6"/>
+          <a:stretch>
+            <a:fillRect/>
+          </a:stretch>
+        </p:blipFill>
+        <p:spPr>
+          <a:xfrm>
+            <a:off x="685800" y="1078640"/>
+            <a:ext cx="6035040" cy="3466279"/>
+          </a:xfrm>
+          <a:prstGeom prst="rect">
+            <a:avLst/>
+          </a:prstGeom>
+        </p:spPr>
+      </p:pic>
+      <p:sp>
+        <p:nvSpPr>
+          <p:cNvPr id="86" name="TextBox 85"/>
+          <p:cNvSpPr txBox="1"/>
+          <p:nvPr/>
+        </p:nvSpPr>
+        <p:spPr>
+          <a:xfrm>
+            <a:off x="6903720" y="1234440"/>
+            <a:ext cx="4251960" cy="3017520"/>
+          </a:xfrm>
+          <a:prstGeom prst="rect">
+            <a:avLst/>
+          </a:prstGeom>
+          <a:solidFill>
+            <a:srgbClr val="FFFFFF"/>
+          </a:solidFill>
+          <a:ln>
+            <a:solidFill>
+              <a:srgbClr val="D2D2D2"/>
+            </a:solidFill>
+          </a:ln>
+        </p:spPr>
+        <p:txBody>
+          <a:bodyPr wrap="square">
+            <a:normAutofit/>
+          </a:bodyPr>
+          <a:lstStyle/>
+          <a:p>
+            <a:pPr>
+              <a:spcAft>
+                <a:spcPts val="200"/>
+              </a:spcAft>
+            </a:pPr>
+            <a:r>
+              <a:rPr sz="1200" b="1">
+                <a:solidFill>
+                  <a:srgbClr val="191919"/>
+                </a:solidFill>
+                <a:latin typeface="Aptos"/>
+              </a:rPr>
+              <a:t>Polarization-independent point?</a:t>
+            </a:r>
+          </a:p>
+          <a:p>
+            <a:pPr>
+              <a:spcAft>
+                <a:spcPts val="200"/>
+              </a:spcAft>
+            </a:pPr>
+            <a:r>
+              <a:rPr sz="1200">
+                <a:solidFill>
+                  <a:srgbClr val="191919"/>
+                </a:solidFill>
+                <a:latin typeface="Aptos"/>
+              </a:rPr>
+              <a:t>No exact TE/TM match was found in the sampled widths.</a:t>
+            </a:r>
+          </a:p>
+          <a:p>
+            <a:pPr>
+              <a:spcAft>
+                <a:spcPts val="200"/>
+              </a:spcAft>
+            </a:pPr>
+            <a:r>
+              <a:rPr sz="1200">
+                <a:solidFill>
+                  <a:srgbClr val="191919"/>
+                </a:solidFill>
+                <a:latin typeface="Aptos"/>
+              </a:rPr>
+              <a:t>Closest sampled point for both deep and shallow: W = 10.0 um.</a:t>
+            </a:r>
+          </a:p>
+          <a:p>
+            <a:pPr>
+              <a:spcAft>
+                <a:spcPts val="200"/>
+              </a:spcAft>
+            </a:pPr>
+            <a:r>
+              <a:rPr sz="1200">
+                <a:solidFill>
+                  <a:srgbClr val="191919"/>
+                </a:solidFill>
+                <a:latin typeface="Aptos"/>
+              </a:rPr>
+              <a:t>TE/TM Lpi difference: deep = 1.07%, shallow = 0.58%. Further fine tuning would be needed.</a:t>
+            </a:r>
+          </a:p>
+        </p:txBody>
+      </p:sp>
     </p:spTree>
     <p:extLst>
       <p:ext uri="{BB962C8B-B14F-4D97-AF65-F5344CB8AC3E}">
@@ -8971,10 +7843,10 @@
           <p:nvPr/>
         </p:nvPicPr>
         <p:blipFill>
-          <a:blip r:embed="rId2">
+          <a:blip>
             <a:extLst>
               <a:ext uri="{96DAC541-7B7A-43D3-8B79-37D633B846F1}">
-                <asvg:svgBlip xmlns:asvg="http://schemas.microsoft.com/office/drawing/2016/SVG/main" r:embed="rId3"/>
+                <asvg:svgBlip xmlns:asvg="http://schemas.microsoft.com/office/drawing/2016/SVG/main" r:embed="rId2"/>
               </a:ext>
             </a:extLst>
           </a:blip>
@@ -9148,156 +8020,57 @@
             </a:lvl9pPr>
           </a:lstStyle>
           <a:p>
-            <a:pPr algn="just"/>
-            <a:r>
-              <a:rPr lang="en-US" sz="2000" b="1" kern="0" dirty="0">
-                <a:solidFill>
-                  <a:sysClr val="windowText" lastClr="000000"/>
-                </a:solidFill>
-                <a:sym typeface="Wingdings" pitchFamily="2" charset="2"/>
+            <a:r>
+              <a:rPr sz="1600">
+                <a:latin typeface="Aptos"/>
               </a:rPr>
               <a:t>SCRIPTS</a:t>
             </a:r>
           </a:p>
           <a:p>
-            <a:pPr marL="342900" indent="-342900" algn="just">
-              <a:buFont typeface="Arial" panose="020B0604020202020204" pitchFamily="34" charset="0"/>
-              <a:buChar char="•"/>
-            </a:pPr>
-            <a:r>
-              <a:rPr lang="en-US" kern="0" dirty="0">
-                <a:solidFill>
-                  <a:sysClr val="windowText" lastClr="000000"/>
-                </a:solidFill>
-                <a:sym typeface="Wingdings" pitchFamily="2" charset="2"/>
+            <a:r>
+              <a:rPr sz="1600">
+                <a:latin typeface="Aptos"/>
               </a:rPr>
-              <a:t>From 	GitHub  </a:t>
-            </a:r>
-          </a:p>
-          <a:p>
-            <a:pPr marL="800100" lvl="1" indent="-342900" algn="just">
-              <a:buFont typeface="Arial" panose="020B0604020202020204" pitchFamily="34" charset="0"/>
-              <a:buChar char="•"/>
-            </a:pPr>
-            <a:r>
-              <a:rPr lang="en-US" kern="0" dirty="0">
-                <a:solidFill>
-                  <a:sysClr val="windowText" lastClr="000000"/>
-                </a:solidFill>
-                <a:sym typeface="Wingdings" pitchFamily="2" charset="2"/>
+              <a:t>From GitHub -&gt; Fork the repo: https://github.com/cccanvas-upv/cifoin-lab2.git</a:t>
+            </a:r>
+          </a:p>
+          <a:p>
+            <a:r>
+              <a:rPr sz="1600">
+                <a:latin typeface="Aptos"/>
               </a:rPr>
-              <a:t>Fork the repo: https://github.com/cccanvas-upv/cifoin-lab2.git</a:t>
-            </a:r>
-          </a:p>
-          <a:p>
-            <a:pPr marL="800100" lvl="1" indent="-342900" algn="just">
-              <a:buFont typeface="Arial" panose="020B0604020202020204" pitchFamily="34" charset="0"/>
-              <a:buChar char="•"/>
-            </a:pPr>
-            <a:r>
-              <a:rPr lang="en-US" kern="0" dirty="0">
-                <a:solidFill>
-                  <a:sysClr val="windowText" lastClr="000000"/>
-                </a:solidFill>
-                <a:sym typeface="Wingdings" pitchFamily="2" charset="2"/>
+              <a:t>Clone the repo using VSCode</a:t>
+            </a:r>
+          </a:p>
+          <a:p>
+            <a:r>
+              <a:rPr sz="1600">
+                <a:latin typeface="Aptos"/>
               </a:rPr>
-              <a:t>Clone the repo using </a:t>
-            </a:r>
-            <a:r>
-              <a:rPr lang="en-US" kern="0" dirty="0" err="1">
-                <a:solidFill>
-                  <a:sysClr val="windowText" lastClr="000000"/>
-                </a:solidFill>
-                <a:sym typeface="Wingdings" pitchFamily="2" charset="2"/>
+              <a:t>Terminal: uv sync</a:t>
+            </a:r>
+          </a:p>
+          <a:p>
+            <a:r>
+              <a:rPr sz="1600">
+                <a:latin typeface="Aptos"/>
               </a:rPr>
-              <a:t>VSCode</a:t>
-            </a:r>
-            <a:endParaRPr lang="en-US" kern="0" dirty="0">
-              <a:solidFill>
-                <a:sysClr val="windowText" lastClr="000000"/>
-              </a:solidFill>
-              <a:sym typeface="Wingdings" pitchFamily="2" charset="2"/>
+              <a:t>Run the Jupyter Notebook: COUPLERS_Student.ipynb</a:t>
+            </a:r>
+          </a:p>
+          <a:p>
+            <a:endParaRPr sz="1600">
+              <a:latin typeface="Aptos"/>
             </a:endParaRPr>
           </a:p>
           <a:p>
-            <a:pPr marL="342900" indent="-342900" algn="just">
-              <a:buFont typeface="Arial" panose="020B0604020202020204" pitchFamily="34" charset="0"/>
-              <a:buChar char="•"/>
-            </a:pPr>
-            <a:r>
-              <a:rPr lang="en-US" kern="0" dirty="0">
-                <a:solidFill>
-                  <a:sysClr val="windowText" lastClr="000000"/>
-                </a:solidFill>
+            <a:r>
+              <a:rPr sz="1600">
+                <a:latin typeface="Aptos"/>
               </a:rPr>
-              <a:t>Run the </a:t>
-            </a:r>
-            <a:r>
-              <a:rPr lang="en-US" kern="0" dirty="0" err="1">
-                <a:solidFill>
-                  <a:sysClr val="windowText" lastClr="000000"/>
-                </a:solidFill>
-              </a:rPr>
-              <a:t>Jupyter</a:t>
-            </a:r>
-            <a:r>
-              <a:rPr lang="en-US" kern="0" dirty="0">
-                <a:solidFill>
-                  <a:sysClr val="windowText" lastClr="000000"/>
-                </a:solidFill>
-              </a:rPr>
-              <a:t> Notebook: </a:t>
-            </a:r>
-          </a:p>
-          <a:p>
-            <a:pPr marL="800100" lvl="1" indent="-342900" algn="just">
-              <a:buFont typeface="Arial" panose="020B0604020202020204" pitchFamily="34" charset="0"/>
-              <a:buChar char="•"/>
-            </a:pPr>
-            <a:r>
-              <a:rPr lang="en-US" kern="0" dirty="0" err="1">
-                <a:solidFill>
-                  <a:sysClr val="windowText" lastClr="000000"/>
-                </a:solidFill>
-              </a:rPr>
-              <a:t>COUPLERS_Student.ipynb</a:t>
-            </a:r>
-            <a:r>
-              <a:rPr lang="en-US" kern="0" dirty="0">
-                <a:solidFill>
-                  <a:sysClr val="windowText" lastClr="000000"/>
-                </a:solidFill>
-              </a:rPr>
-              <a:t> </a:t>
-            </a:r>
-          </a:p>
-          <a:p>
-            <a:pPr algn="just"/>
-            <a:endParaRPr lang="en-US" b="1" i="1" dirty="0"/>
-          </a:p>
-          <a:p>
-            <a:pPr algn="just"/>
-            <a:r>
-              <a:rPr lang="en-US" b="1" i="1" dirty="0"/>
-              <a:t>Cross-Sections </a:t>
-            </a:r>
-            <a:r>
-              <a:rPr lang="en-US" i="1" dirty="0"/>
-              <a:t>to be studied:</a:t>
-            </a:r>
-            <a:endParaRPr lang="en-US" b="1" i="1" dirty="0"/>
-          </a:p>
-          <a:p>
-            <a:pPr algn="just"/>
-            <a:endParaRPr lang="en-US" sz="2000" b="1" i="1" dirty="0"/>
-          </a:p>
-          <a:p>
-            <a:pPr algn="just"/>
-            <a:endParaRPr lang="en-US" sz="2000" kern="0" dirty="0">
-              <a:solidFill>
-                <a:sysClr val="windowText" lastClr="000000"/>
-              </a:solidFill>
-            </a:endParaRPr>
+              <a:t>Cross-Sections to be studied:</a:t>
+            </a:r>
           </a:p>
         </p:txBody>
       </p:sp>
@@ -11085,31 +9858,20 @@
           </a:bodyPr>
           <a:lstStyle/>
           <a:p>
-            <a:pPr marL="12700">
-              <a:lnSpc>
-                <a:spcPct val="100000"/>
-              </a:lnSpc>
-              <a:spcBef>
-                <a:spcPts val="100"/>
-              </a:spcBef>
-            </a:pPr>
-            <a:r>
-              <a:rPr lang="en-US" sz="2500" dirty="0"/>
-              <a:t>Learning outcome #1 – Directional coupler cross-section in </a:t>
-            </a:r>
-            <a:r>
-              <a:rPr lang="en-US" sz="2500" dirty="0" err="1"/>
+            <a:r>
+              <a:rPr sz="2100" b="1" dirty="0">
+                <a:latin typeface="Aptos"/>
+              </a:rPr>
+              <a:t>Learning outcome #1 - Directional coupler cross-section in </a:t>
+            </a:r>
+            <a:r>
+              <a:rPr sz="2100" b="1" dirty="0" err="1">
+                <a:latin typeface="Aptos"/>
+              </a:rPr>
               <a:t>GDSFactory</a:t>
             </a:r>
-            <a:br>
-              <a:rPr lang="es-ES" sz="2500" spc="-5" dirty="0">
-                <a:latin typeface="+mj-lt"/>
-                <a:cs typeface="Lucida Sans"/>
-              </a:rPr>
-            </a:br>
-            <a:endParaRPr sz="2500" b="0" dirty="0">
-              <a:latin typeface="+mj-lt"/>
-              <a:cs typeface="Lucida Sans"/>
+            <a:endParaRPr sz="2100" b="1" dirty="0">
+              <a:latin typeface="Aptos"/>
             </a:endParaRPr>
           </a:p>
         </p:txBody>
@@ -11129,10 +9891,10 @@
           <p:nvPr/>
         </p:nvPicPr>
         <p:blipFill>
-          <a:blip r:embed="rId3">
+          <a:blip>
             <a:extLst>
               <a:ext uri="{96DAC541-7B7A-43D3-8B79-37D633B846F1}">
-                <asvg:svgBlip xmlns:asvg="http://schemas.microsoft.com/office/drawing/2016/SVG/main" r:embed="rId4"/>
+                <asvg:svgBlip xmlns:asvg="http://schemas.microsoft.com/office/drawing/2016/SVG/main" r:embed="rId3"/>
               </a:ext>
             </a:extLst>
           </a:blip>
@@ -11213,391 +9975,165 @@
           </a:p>
         </p:txBody>
       </p:sp>
-      <mc:AlternateContent xmlns:mc="http://schemas.openxmlformats.org/markup-compatibility/2006" xmlns:a14="http://schemas.microsoft.com/office/drawing/2010/main">
-        <mc:Choice Requires="a14">
-          <p:sp>
-            <p:nvSpPr>
-              <p:cNvPr id="4" name="Marcador de texto 2">
-                <a:extLst>
-                  <a:ext uri="{FF2B5EF4-FFF2-40B4-BE49-F238E27FC236}">
-                    <a16:creationId xmlns:a16="http://schemas.microsoft.com/office/drawing/2014/main" id="{AA9E72FF-B948-6B7A-8909-97C6BE95D6FB}"/>
-                  </a:ext>
-                </a:extLst>
-              </p:cNvPr>
-              <p:cNvSpPr txBox="1">
-                <a:spLocks/>
-              </p:cNvSpPr>
-              <p:nvPr/>
-            </p:nvSpPr>
-            <p:spPr>
-              <a:xfrm>
-                <a:off x="608012" y="1295400"/>
-                <a:ext cx="11048999" cy="4958137"/>
-              </a:xfrm>
-              <a:prstGeom prst="rect">
-                <a:avLst/>
-              </a:prstGeom>
-            </p:spPr>
-            <p:txBody>
-              <a:bodyPr>
-                <a:normAutofit/>
-              </a:bodyPr>
-              <a:lstStyle>
-                <a:lvl1pPr marL="0">
-                  <a:defRPr>
-                    <a:latin typeface="+mn-lt"/>
-                    <a:ea typeface="+mn-ea"/>
-                    <a:cs typeface="+mn-cs"/>
-                  </a:defRPr>
-                </a:lvl1pPr>
-                <a:lvl2pPr marL="457200">
-                  <a:defRPr>
-                    <a:latin typeface="+mn-lt"/>
-                    <a:ea typeface="+mn-ea"/>
-                    <a:cs typeface="+mn-cs"/>
-                  </a:defRPr>
-                </a:lvl2pPr>
-                <a:lvl3pPr marL="914400">
-                  <a:defRPr>
-                    <a:latin typeface="+mn-lt"/>
-                    <a:ea typeface="+mn-ea"/>
-                    <a:cs typeface="+mn-cs"/>
-                  </a:defRPr>
-                </a:lvl3pPr>
-                <a:lvl4pPr marL="1371600">
-                  <a:defRPr>
-                    <a:latin typeface="+mn-lt"/>
-                    <a:ea typeface="+mn-ea"/>
-                    <a:cs typeface="+mn-cs"/>
-                  </a:defRPr>
-                </a:lvl4pPr>
-                <a:lvl5pPr marL="1828800">
-                  <a:defRPr>
-                    <a:latin typeface="+mn-lt"/>
-                    <a:ea typeface="+mn-ea"/>
-                    <a:cs typeface="+mn-cs"/>
-                  </a:defRPr>
-                </a:lvl5pPr>
-                <a:lvl6pPr marL="2286000">
-                  <a:defRPr>
-                    <a:latin typeface="+mn-lt"/>
-                    <a:ea typeface="+mn-ea"/>
-                    <a:cs typeface="+mn-cs"/>
-                  </a:defRPr>
-                </a:lvl6pPr>
-                <a:lvl7pPr marL="2743200">
-                  <a:defRPr>
-                    <a:latin typeface="+mn-lt"/>
-                    <a:ea typeface="+mn-ea"/>
-                    <a:cs typeface="+mn-cs"/>
-                  </a:defRPr>
-                </a:lvl7pPr>
-                <a:lvl8pPr marL="3200400">
-                  <a:defRPr>
-                    <a:latin typeface="+mn-lt"/>
-                    <a:ea typeface="+mn-ea"/>
-                    <a:cs typeface="+mn-cs"/>
-                  </a:defRPr>
-                </a:lvl8pPr>
-                <a:lvl9pPr marL="3657600">
-                  <a:defRPr>
-                    <a:latin typeface="+mn-lt"/>
-                    <a:ea typeface="+mn-ea"/>
-                    <a:cs typeface="+mn-cs"/>
-                  </a:defRPr>
-                </a:lvl9pPr>
-              </a:lstStyle>
-              <a:p>
-                <a:pPr marL="0" indent="0">
-                  <a:buNone/>
-                </a:pPr>
-                <a:r>
-                  <a:rPr lang="en-US" sz="2000" b="1" dirty="0"/>
-                  <a:t>INSTRUCTOR:</a:t>
-                </a:r>
-              </a:p>
-              <a:p>
-                <a:pPr marL="342900" indent="-342900" algn="just">
-                  <a:buFont typeface="Arial" panose="020B0604020202020204" pitchFamily="34" charset="0"/>
-                  <a:buChar char="•"/>
-                </a:pPr>
-                <a:r>
-                  <a:rPr lang="en-US" sz="2000" dirty="0"/>
-                  <a:t>Present Python and </a:t>
-                </a:r>
-                <a:r>
-                  <a:rPr lang="en-US" sz="2000" dirty="0" err="1"/>
-                  <a:t>GDSFactory</a:t>
-                </a:r>
-                <a:r>
-                  <a:rPr lang="en-US" sz="2000" dirty="0"/>
-                  <a:t> implementation of DC cross-section</a:t>
-                </a:r>
-              </a:p>
-              <a:p>
-                <a:pPr marL="342900" indent="-342900" algn="just">
-                  <a:buFont typeface="Arial" panose="020B0604020202020204" pitchFamily="34" charset="0"/>
-                  <a:buChar char="•"/>
-                </a:pPr>
-                <a:r>
-                  <a:rPr lang="en-US" sz="2000" dirty="0"/>
-                  <a:t>Describe how to obtain the beating length </a:t>
-                </a:r>
-                <a14:m>
-                  <m:oMath xmlns:m="http://schemas.openxmlformats.org/officeDocument/2006/math">
-                    <m:sSub>
-                      <m:sSubPr>
-                        <m:ctrlPr>
-                          <a:rPr lang="es-ES" sz="2000" b="0" i="1" smtClean="0">
-                            <a:latin typeface="Cambria Math" panose="02040503050406030204" pitchFamily="18" charset="0"/>
-                          </a:rPr>
-                        </m:ctrlPr>
-                      </m:sSubPr>
-                      <m:e>
-                        <m:r>
-                          <a:rPr lang="es-ES" sz="2000" b="0" i="1" smtClean="0">
-                            <a:latin typeface="Cambria Math" panose="02040503050406030204" pitchFamily="18" charset="0"/>
-                          </a:rPr>
-                          <m:t>𝐿</m:t>
-                        </m:r>
-                      </m:e>
-                      <m:sub>
-                        <m:r>
-                          <a:rPr lang="es-ES" sz="2000" b="0" i="1" smtClean="0">
-                            <a:latin typeface="Cambria Math" panose="02040503050406030204" pitchFamily="18" charset="0"/>
-                          </a:rPr>
-                          <m:t>𝜋</m:t>
-                        </m:r>
-                      </m:sub>
-                    </m:sSub>
-                  </m:oMath>
-                </a14:m>
-                <a:endParaRPr lang="en-US" sz="2000" dirty="0"/>
-              </a:p>
-              <a:p>
-                <a:pPr marL="342900" indent="-342900" algn="just">
-                  <a:buFont typeface="Arial" panose="020B0604020202020204" pitchFamily="34" charset="0"/>
-                  <a:buChar char="•"/>
-                </a:pPr>
-                <a:r>
-                  <a:rPr lang="en-US" sz="2000" dirty="0"/>
-                  <a:t>Describe the outputs.</a:t>
-                </a:r>
-              </a:p>
-              <a:p>
-                <a:pPr marL="0" indent="0" algn="just">
-                  <a:buNone/>
-                </a:pPr>
-                <a:r>
-                  <a:rPr lang="en-US" sz="2000" b="1" dirty="0"/>
-                  <a:t>ALL EXAMPLE #1: </a:t>
-                </a:r>
-                <a:r>
-                  <a:rPr lang="en-US" sz="2000" dirty="0"/>
-                  <a:t>waveguide width 1.2 µm, gap between waveguides 0.6 µm, deep </a:t>
-                </a:r>
-                <a:r>
-                  <a:rPr lang="en-US" sz="2000" dirty="0" err="1"/>
-                  <a:t>wvg</a:t>
-                </a:r>
-                <a:r>
-                  <a:rPr lang="en-US" sz="2000" dirty="0"/>
-                  <a:t>, wavelength start and end same 1.55 µm </a:t>
-                </a:r>
-                <a:r>
-                  <a:rPr lang="en-US" sz="2000" dirty="0">
-                    <a:sym typeface="Wingdings" pitchFamily="2" charset="2"/>
-                  </a:rPr>
-                  <a:t> all ”Run”</a:t>
-                </a:r>
-                <a:endParaRPr lang="en-US" sz="2000" dirty="0"/>
-              </a:p>
-              <a:p>
-                <a:pPr marL="0" indent="0" algn="just">
-                  <a:buNone/>
-                </a:pPr>
-                <a:r>
-                  <a:rPr lang="en-US" sz="2000" b="1" dirty="0"/>
-                  <a:t>ALL: </a:t>
-                </a:r>
-                <a:r>
-                  <a:rPr lang="en-US" sz="2000" dirty="0"/>
-                  <a:t>Follow</a:t>
-                </a:r>
-                <a:r>
-                  <a:rPr lang="en-US" sz="2000" b="1" dirty="0"/>
-                  <a:t> </a:t>
-                </a:r>
-                <a:r>
-                  <a:rPr lang="en-US" sz="2000" dirty="0"/>
-                  <a:t>instructor, that will show how to 1) plot mode, 2) explore the results (neff …)</a:t>
-                </a:r>
-              </a:p>
-              <a:p>
-                <a:pPr algn="just"/>
-                <a:endParaRPr lang="en-US" sz="2000" b="1" i="1" dirty="0"/>
-              </a:p>
-              <a:p>
-                <a:pPr algn="just"/>
-                <a:endParaRPr lang="en-US" sz="2000" kern="0" dirty="0">
-                  <a:solidFill>
-                    <a:sysClr val="windowText" lastClr="000000"/>
-                  </a:solidFill>
-                </a:endParaRPr>
-              </a:p>
-            </p:txBody>
-          </p:sp>
-        </mc:Choice>
-        <mc:Fallback xmlns="">
-          <p:sp>
-            <p:nvSpPr>
-              <p:cNvPr id="4" name="Marcador de texto 2">
-                <a:extLst>
-                  <a:ext uri="{FF2B5EF4-FFF2-40B4-BE49-F238E27FC236}">
-                    <a16:creationId xmlns:a16="http://schemas.microsoft.com/office/drawing/2014/main" id="{AA9E72FF-B948-6B7A-8909-97C6BE95D6FB}"/>
-                  </a:ext>
-                </a:extLst>
-              </p:cNvPr>
-              <p:cNvSpPr txBox="1">
-                <a:spLocks noRot="1" noChangeAspect="1" noMove="1" noResize="1" noEditPoints="1" noAdjustHandles="1" noChangeArrowheads="1" noChangeShapeType="1" noTextEdit="1"/>
-              </p:cNvSpPr>
-              <p:nvPr/>
-            </p:nvSpPr>
-            <p:spPr>
-              <a:xfrm>
-                <a:off x="608012" y="1295400"/>
-                <a:ext cx="11048999" cy="4958137"/>
-              </a:xfrm>
-              <a:prstGeom prst="rect">
-                <a:avLst/>
-              </a:prstGeom>
-              <a:blipFill>
-                <a:blip r:embed="rId5"/>
-                <a:stretch>
-                  <a:fillRect l="-607" t="-738" r="-552"/>
-                </a:stretch>
-              </a:blipFill>
-            </p:spPr>
-            <p:txBody>
-              <a:bodyPr/>
-              <a:lstStyle/>
-              <a:p>
-                <a:r>
-                  <a:rPr lang="es-ES">
-                    <a:noFill/>
-                  </a:rPr>
-                  <a:t> </a:t>
-                </a:r>
-              </a:p>
-            </p:txBody>
-          </p:sp>
-        </mc:Fallback>
-      </mc:AlternateContent>
-      <p:sp>
-        <p:nvSpPr>
-          <p:cNvPr id="2" name="CuadroTexto 1">
-            <a:extLst>
-              <a:ext uri="{FF2B5EF4-FFF2-40B4-BE49-F238E27FC236}">
-                <a16:creationId xmlns:a16="http://schemas.microsoft.com/office/drawing/2014/main" id="{D0F8CF3B-B920-DBFC-F825-0C87B51EADA7}"/>
-              </a:ext>
-            </a:extLst>
-          </p:cNvPr>
+      <p:pic>
+        <p:nvPicPr>
+          <p:cNvPr id="85" name="Picture 84" descr="image.png"/>
+          <p:cNvPicPr>
+            <a:picLocks noChangeAspect="1"/>
+          </p:cNvPicPr>
+          <p:nvPr/>
+        </p:nvPicPr>
+        <p:blipFill>
+          <a:blip r:embed="rId4"/>
+          <a:stretch>
+            <a:fillRect/>
+          </a:stretch>
+        </p:blipFill>
+        <p:spPr>
+          <a:xfrm>
+            <a:off x="838200" y="1572385"/>
+            <a:ext cx="2743200" cy="1930149"/>
+          </a:xfrm>
+          <a:prstGeom prst="rect">
+            <a:avLst/>
+          </a:prstGeom>
+        </p:spPr>
+      </p:pic>
+      <p:pic>
+        <p:nvPicPr>
+          <p:cNvPr id="86" name="Picture 85" descr="image.png"/>
+          <p:cNvPicPr>
+            <a:picLocks noChangeAspect="1"/>
+          </p:cNvPicPr>
+          <p:nvPr/>
+        </p:nvPicPr>
+        <p:blipFill>
+          <a:blip r:embed="rId5"/>
+          <a:stretch>
+            <a:fillRect/>
+          </a:stretch>
+        </p:blipFill>
+        <p:spPr>
+          <a:xfrm>
+            <a:off x="5410200" y="762000"/>
+            <a:ext cx="4999169" cy="3805338"/>
+          </a:xfrm>
+          <a:prstGeom prst="rect">
+            <a:avLst/>
+          </a:prstGeom>
+        </p:spPr>
+      </p:pic>
+      <p:sp>
+        <p:nvSpPr>
+          <p:cNvPr id="87" name="TextBox 86"/>
           <p:cNvSpPr txBox="1"/>
           <p:nvPr/>
         </p:nvSpPr>
         <p:spPr>
           <a:xfrm>
-            <a:off x="609441" y="4860334"/>
-            <a:ext cx="11199971" cy="1200329"/>
+            <a:off x="685800" y="4668395"/>
+            <a:ext cx="10652760" cy="1234440"/>
           </a:xfrm>
           <a:prstGeom prst="rect">
             <a:avLst/>
           </a:prstGeom>
           <a:solidFill>
-            <a:schemeClr val="bg1">
-              <a:lumMod val="95000"/>
-            </a:schemeClr>
+            <a:srgbClr val="FFFFFF"/>
           </a:solidFill>
-          <a:ln w="28575">
+          <a:ln>
             <a:solidFill>
-              <a:srgbClr val="E0700D"/>
+              <a:srgbClr val="D2D2D2"/>
             </a:solidFill>
           </a:ln>
         </p:spPr>
         <p:txBody>
-          <a:bodyPr wrap="square" rtlCol="0">
-            <a:spAutoFit/>
+          <a:bodyPr wrap="square">
+            <a:normAutofit/>
           </a:bodyPr>
           <a:lstStyle/>
           <a:p>
-            <a:pPr algn="just"/>
-            <a:r>
-              <a:rPr lang="en-US" sz="1200" dirty="0">
-                <a:latin typeface="Arial" panose="020B0604020202020204" pitchFamily="34" charset="0"/>
-                <a:cs typeface="Arial" panose="020B0604020202020204" pitchFamily="34" charset="0"/>
+            <a:pPr>
+              <a:spcAft>
+                <a:spcPts val="200"/>
+              </a:spcAft>
+            </a:pPr>
+            <a:r>
+              <a:rPr sz="1200" dirty="0" err="1">
+                <a:solidFill>
+                  <a:srgbClr val="191919"/>
+                </a:solidFill>
+                <a:latin typeface="Aptos"/>
               </a:rPr>
-              <a:t>Document all your results (neff, plot fields </a:t>
-            </a:r>
-            <a:r>
-              <a:rPr lang="en-US" sz="1200">
-                <a:latin typeface="Arial" panose="020B0604020202020204" pitchFamily="34" charset="0"/>
-                <a:cs typeface="Arial" panose="020B0604020202020204" pitchFamily="34" charset="0"/>
+              <a:t>n_eff</a:t>
+            </a:r>
+            <a:r>
+              <a:rPr sz="1200" dirty="0">
+                <a:solidFill>
+                  <a:srgbClr val="191919"/>
+                </a:solidFill>
+                <a:latin typeface="Aptos"/>
               </a:rPr>
-              <a:t>of different modes, </a:t>
-            </a:r>
-            <a:r>
-              <a:rPr lang="en-US" sz="1200" dirty="0">
-                <a:latin typeface="Arial" panose="020B0604020202020204" pitchFamily="34" charset="0"/>
-                <a:cs typeface="Arial" panose="020B0604020202020204" pitchFamily="34" charset="0"/>
+              <a:t>: TE even/odd = 1.609425 / 1.601166; TM even/odd = 1.535403 / 1.520573.</a:t>
+            </a:r>
+          </a:p>
+          <a:p>
+            <a:pPr>
+              <a:spcAft>
+                <a:spcPts val="200"/>
+              </a:spcAft>
+            </a:pPr>
+            <a:r>
+              <a:rPr sz="1200" dirty="0">
+                <a:solidFill>
+                  <a:srgbClr val="191919"/>
+                </a:solidFill>
+                <a:latin typeface="Aptos"/>
               </a:rPr>
-              <a:t>comparison between </a:t>
-            </a:r>
-            <a:r>
-              <a:rPr lang="en-US" sz="1200">
-                <a:latin typeface="Arial" panose="020B0604020202020204" pitchFamily="34" charset="0"/>
-                <a:cs typeface="Arial" panose="020B0604020202020204" pitchFamily="34" charset="0"/>
+              <a:t>TE fraction is ~0.995 for modes 0-1 and TM fraction is ~0.99 for modes 2-3.</a:t>
+            </a:r>
+          </a:p>
+          <a:p>
+            <a:pPr>
+              <a:spcAft>
+                <a:spcPts val="200"/>
+              </a:spcAft>
+            </a:pPr>
+            <a:r>
+              <a:rPr sz="1200" dirty="0" err="1">
+                <a:solidFill>
+                  <a:srgbClr val="191919"/>
+                </a:solidFill>
+                <a:latin typeface="Aptos"/>
               </a:rPr>
-              <a:t>different polarizations…)</a:t>
-            </a:r>
-            <a:endParaRPr lang="en-US" sz="1200" dirty="0">
-              <a:latin typeface="Arial" panose="020B0604020202020204" pitchFamily="34" charset="0"/>
-              <a:cs typeface="Arial" panose="020B0604020202020204" pitchFamily="34" charset="0"/>
-            </a:endParaRPr>
-          </a:p>
-          <a:p>
-            <a:pPr algn="just"/>
-            <a:endParaRPr lang="en-US" sz="1200" dirty="0">
-              <a:latin typeface="Arial" panose="020B0604020202020204" pitchFamily="34" charset="0"/>
-              <a:cs typeface="Arial" panose="020B0604020202020204" pitchFamily="34" charset="0"/>
-            </a:endParaRPr>
-          </a:p>
-          <a:p>
-            <a:pPr algn="just"/>
-            <a:endParaRPr lang="en-US" sz="1200" dirty="0">
-              <a:latin typeface="Arial" panose="020B0604020202020204" pitchFamily="34" charset="0"/>
-              <a:cs typeface="Arial" panose="020B0604020202020204" pitchFamily="34" charset="0"/>
-            </a:endParaRPr>
-          </a:p>
-          <a:p>
-            <a:pPr algn="just"/>
-            <a:endParaRPr lang="en-US" sz="1200" dirty="0">
-              <a:latin typeface="Arial" panose="020B0604020202020204" pitchFamily="34" charset="0"/>
-              <a:cs typeface="Arial" panose="020B0604020202020204" pitchFamily="34" charset="0"/>
-            </a:endParaRPr>
-          </a:p>
-          <a:p>
-            <a:pPr algn="just"/>
-            <a:endParaRPr lang="en-US" sz="1200" dirty="0">
-              <a:latin typeface="Arial" panose="020B0604020202020204" pitchFamily="34" charset="0"/>
-              <a:cs typeface="Arial" panose="020B0604020202020204" pitchFamily="34" charset="0"/>
-            </a:endParaRPr>
-          </a:p>
-          <a:p>
-            <a:pPr algn="just"/>
-            <a:endParaRPr lang="en-US" sz="1200" dirty="0">
-              <a:latin typeface="Arial" panose="020B0604020202020204" pitchFamily="34" charset="0"/>
-              <a:cs typeface="Arial" panose="020B0604020202020204" pitchFamily="34" charset="0"/>
-            </a:endParaRPr>
+              <a:t>Lpi_TE</a:t>
+            </a:r>
+            <a:r>
+              <a:rPr sz="1200" dirty="0">
+                <a:solidFill>
+                  <a:srgbClr val="191919"/>
+                </a:solidFill>
+                <a:latin typeface="Aptos"/>
+              </a:rPr>
+              <a:t> = 93.84 um and </a:t>
+            </a:r>
+            <a:r>
+              <a:rPr sz="1200" dirty="0" err="1">
+                <a:solidFill>
+                  <a:srgbClr val="191919"/>
+                </a:solidFill>
+                <a:latin typeface="Aptos"/>
+              </a:rPr>
+              <a:t>Lpi_TM</a:t>
+            </a:r>
+            <a:r>
+              <a:rPr sz="1200" dirty="0">
+                <a:solidFill>
+                  <a:srgbClr val="191919"/>
+                </a:solidFill>
+                <a:latin typeface="Aptos"/>
+              </a:rPr>
+              <a:t> = 52.26 um, so the coupling length is polarization dependent.</a:t>
+            </a:r>
           </a:p>
         </p:txBody>
       </p:sp>
@@ -11668,32 +10204,19 @@
           </a:bodyPr>
           <a:lstStyle/>
           <a:p>
-            <a:pPr marL="12700">
-              <a:lnSpc>
-                <a:spcPct val="100000"/>
-              </a:lnSpc>
-              <a:spcBef>
-                <a:spcPts val="100"/>
-              </a:spcBef>
-            </a:pPr>
-            <a:r>
-              <a:rPr lang="en-US" sz="2500" dirty="0"/>
-              <a:t>Learning outcome #2 – Directional coupler length and coupling coefficient</a:t>
-            </a:r>
-            <a:br>
-              <a:rPr lang="en-US" sz="2500" spc="-5" dirty="0">
-                <a:latin typeface="+mj-lt"/>
-                <a:cs typeface="Lucida Sans"/>
+            <a:r>
+              <a:rPr sz="2100" b="1">
+                <a:latin typeface="Aptos"/>
               </a:rPr>
-            </a:br>
-            <a:r>
-              <a:rPr lang="en-US" b="0" dirty="0"/>
-              <a:t>Wavelength 1.5 µm – width 1.2 µm – gap 0.6 µm – thickness 300 nm</a:t>
-            </a:r>
-            <a:endParaRPr lang="en-US" sz="2500" b="0" dirty="0">
-              <a:latin typeface="+mj-lt"/>
-              <a:cs typeface="Lucida Sans"/>
-            </a:endParaRPr>
+              <a:t>Learning outcome #2 - Directional coupler length and coupling coefficient</a:t>
+            </a:r>
+            <a:br/>
+            <a:r>
+              <a:rPr sz="2100" b="1">
+                <a:latin typeface="Aptos"/>
+              </a:rPr>
+              <a:t>Wavelength 1.5 um - width 1.2 um - gap 0.6 um - thickness 300 nm</a:t>
+            </a:r>
           </a:p>
         </p:txBody>
       </p:sp>
@@ -11712,10 +10235,10 @@
           <p:nvPr/>
         </p:nvPicPr>
         <p:blipFill>
-          <a:blip r:embed="rId3">
+          <a:blip>
             <a:extLst>
               <a:ext uri="{96DAC541-7B7A-43D3-8B79-37D633B846F1}">
-                <asvg:svgBlip xmlns:asvg="http://schemas.microsoft.com/office/drawing/2016/SVG/main" r:embed="rId4"/>
+                <asvg:svgBlip xmlns:asvg="http://schemas.microsoft.com/office/drawing/2016/SVG/main" r:embed="rId3"/>
               </a:ext>
             </a:extLst>
           </a:blip>
@@ -11796,236 +10319,92 @@
           </a:p>
         </p:txBody>
       </p:sp>
-      <p:sp>
-        <p:nvSpPr>
-          <p:cNvPr id="2" name="CuadroTexto 1">
-            <a:extLst>
-              <a:ext uri="{FF2B5EF4-FFF2-40B4-BE49-F238E27FC236}">
-                <a16:creationId xmlns:a16="http://schemas.microsoft.com/office/drawing/2014/main" id="{CA5F0FDF-2A95-453B-4ECA-AEB637FF2694}"/>
-              </a:ext>
-            </a:extLst>
-          </p:cNvPr>
-          <p:cNvSpPr txBox="1"/>
-          <p:nvPr/>
-        </p:nvSpPr>
-        <p:spPr>
-          <a:xfrm>
-            <a:off x="609441" y="4860334"/>
-            <a:ext cx="11199971" cy="1200329"/>
-          </a:xfrm>
-          <a:prstGeom prst="rect">
-            <a:avLst/>
-          </a:prstGeom>
-          <a:solidFill>
-            <a:schemeClr val="bg1">
-              <a:lumMod val="95000"/>
-            </a:schemeClr>
-          </a:solidFill>
-          <a:ln w="28575">
-            <a:solidFill>
-              <a:srgbClr val="E0700D"/>
-            </a:solidFill>
-          </a:ln>
-        </p:spPr>
-        <p:txBody>
-          <a:bodyPr wrap="square" rtlCol="0">
-            <a:spAutoFit/>
-          </a:bodyPr>
-          <a:lstStyle/>
-          <a:p>
-            <a:pPr algn="just"/>
-            <a:r>
-              <a:rPr lang="en-US" sz="1200" dirty="0">
-                <a:latin typeface="Arial" panose="020B0604020202020204" pitchFamily="34" charset="0"/>
-                <a:cs typeface="Arial" panose="020B0604020202020204" pitchFamily="34" charset="0"/>
-              </a:rPr>
-              <a:t>Comment results (distance needed for a complete energy transfer between waveguides, distance needed for splitting power in half.. )</a:t>
-            </a:r>
-          </a:p>
-          <a:p>
-            <a:pPr algn="just"/>
-            <a:endParaRPr lang="en-US" sz="1200" dirty="0">
-              <a:latin typeface="Arial" panose="020B0604020202020204" pitchFamily="34" charset="0"/>
-              <a:cs typeface="Arial" panose="020B0604020202020204" pitchFamily="34" charset="0"/>
-            </a:endParaRPr>
-          </a:p>
-          <a:p>
-            <a:pPr algn="just"/>
-            <a:endParaRPr lang="en-US" sz="1200" dirty="0">
-              <a:latin typeface="Arial" panose="020B0604020202020204" pitchFamily="34" charset="0"/>
-              <a:cs typeface="Arial" panose="020B0604020202020204" pitchFamily="34" charset="0"/>
-            </a:endParaRPr>
-          </a:p>
-          <a:p>
-            <a:pPr algn="just"/>
-            <a:endParaRPr lang="en-US" sz="1200" dirty="0">
-              <a:latin typeface="Arial" panose="020B0604020202020204" pitchFamily="34" charset="0"/>
-              <a:cs typeface="Arial" panose="020B0604020202020204" pitchFamily="34" charset="0"/>
-            </a:endParaRPr>
-          </a:p>
-          <a:p>
-            <a:pPr algn="just"/>
-            <a:endParaRPr lang="en-US" sz="1200" dirty="0">
-              <a:latin typeface="Arial" panose="020B0604020202020204" pitchFamily="34" charset="0"/>
-              <a:cs typeface="Arial" panose="020B0604020202020204" pitchFamily="34" charset="0"/>
-            </a:endParaRPr>
-          </a:p>
-          <a:p>
-            <a:pPr algn="just"/>
-            <a:endParaRPr lang="en-US" sz="1200" dirty="0">
-              <a:latin typeface="Arial" panose="020B0604020202020204" pitchFamily="34" charset="0"/>
-              <a:cs typeface="Arial" panose="020B0604020202020204" pitchFamily="34" charset="0"/>
-            </a:endParaRPr>
-          </a:p>
-        </p:txBody>
-      </p:sp>
-      <p:sp>
-        <p:nvSpPr>
-          <p:cNvPr id="7" name="Rectángulo 6">
-            <a:extLst>
-              <a:ext uri="{FF2B5EF4-FFF2-40B4-BE49-F238E27FC236}">
-                <a16:creationId xmlns:a16="http://schemas.microsoft.com/office/drawing/2014/main" id="{21F754A5-65BC-14A3-5F55-75716FFA9027}"/>
-              </a:ext>
-            </a:extLst>
-          </p:cNvPr>
-          <p:cNvSpPr/>
-          <p:nvPr/>
-        </p:nvSpPr>
-        <p:spPr>
-          <a:xfrm>
-            <a:off x="609441" y="1418373"/>
-            <a:ext cx="11199971" cy="3306028"/>
-          </a:xfrm>
-          <a:prstGeom prst="rect">
-            <a:avLst/>
-          </a:prstGeom>
-          <a:noFill/>
-          <a:ln w="28575">
-            <a:solidFill>
-              <a:srgbClr val="E0700D"/>
-            </a:solidFill>
-          </a:ln>
-        </p:spPr>
-        <p:style>
-          <a:lnRef idx="2">
-            <a:schemeClr val="accent1">
-              <a:shade val="15000"/>
-            </a:schemeClr>
-          </a:lnRef>
-          <a:fillRef idx="1">
-            <a:schemeClr val="accent1"/>
-          </a:fillRef>
-          <a:effectRef idx="0">
-            <a:schemeClr val="accent1"/>
-          </a:effectRef>
-          <a:fontRef idx="minor">
-            <a:schemeClr val="lt1"/>
-          </a:fontRef>
-        </p:style>
-        <p:txBody>
-          <a:bodyPr rtlCol="0" anchor="ctr"/>
-          <a:lstStyle/>
-          <a:p>
-            <a:pPr algn="ctr"/>
-            <a:endParaRPr lang="en-US"/>
-          </a:p>
-        </p:txBody>
-      </p:sp>
-      <p:sp>
-        <p:nvSpPr>
-          <p:cNvPr id="8" name="CuadroTexto 7">
-            <a:extLst>
-              <a:ext uri="{FF2B5EF4-FFF2-40B4-BE49-F238E27FC236}">
-                <a16:creationId xmlns:a16="http://schemas.microsoft.com/office/drawing/2014/main" id="{CD9C65D4-5494-F5CE-1094-CB0A32C33876}"/>
-              </a:ext>
-            </a:extLst>
-          </p:cNvPr>
-          <p:cNvSpPr txBox="1"/>
-          <p:nvPr/>
-        </p:nvSpPr>
-        <p:spPr>
-          <a:xfrm>
-            <a:off x="3909688" y="2609722"/>
-            <a:ext cx="4546634" cy="923330"/>
-          </a:xfrm>
-          <a:prstGeom prst="rect">
-            <a:avLst/>
-          </a:prstGeom>
-          <a:noFill/>
-        </p:spPr>
-        <p:txBody>
-          <a:bodyPr wrap="square" rtlCol="0">
-            <a:spAutoFit/>
-          </a:bodyPr>
-          <a:lstStyle/>
-          <a:p>
-            <a:pPr algn="ctr"/>
-            <a:r>
-              <a:rPr lang="en-US" b="1" dirty="0"/>
-              <a:t>deep</a:t>
-            </a:r>
-            <a:r>
-              <a:rPr lang="en-US" dirty="0"/>
-              <a:t> waveguide</a:t>
-            </a:r>
-          </a:p>
-          <a:p>
-            <a:pPr algn="ctr"/>
-            <a:endParaRPr lang="en-US" dirty="0"/>
-          </a:p>
-          <a:p>
-            <a:pPr algn="ctr"/>
-            <a:r>
-              <a:rPr lang="en-US" dirty="0"/>
-              <a:t>Paste L/</a:t>
-            </a:r>
-            <a:r>
-              <a:rPr lang="en-US" dirty="0" err="1"/>
-              <a:t>Lpi</a:t>
-            </a:r>
-            <a:r>
-              <a:rPr lang="en-US" dirty="0"/>
-              <a:t> vs K plot here</a:t>
-            </a:r>
-          </a:p>
-        </p:txBody>
-      </p:sp>
       <p:pic>
         <p:nvPicPr>
-          <p:cNvPr id="6" name="Imagen 5" descr="Forma&#10;&#10;Descripción generada automáticamente con confianza media">
-            <a:extLst>
-              <a:ext uri="{FF2B5EF4-FFF2-40B4-BE49-F238E27FC236}">
-                <a16:creationId xmlns:a16="http://schemas.microsoft.com/office/drawing/2014/main" id="{380A8455-6386-C7D5-7BB6-B79D8D91F0EF}"/>
-              </a:ext>
-            </a:extLst>
-          </p:cNvPr>
+          <p:cNvPr id="85" name="Picture 84" descr="image.png"/>
           <p:cNvPicPr>
             <a:picLocks noChangeAspect="1"/>
           </p:cNvPicPr>
           <p:nvPr/>
         </p:nvPicPr>
         <p:blipFill>
-          <a:blip r:embed="rId5" cstate="print">
-            <a:extLst>
-              <a:ext uri="{28A0092B-C50C-407E-A947-70E740481C1C}">
-                <a14:useLocalDpi xmlns:a14="http://schemas.microsoft.com/office/drawing/2010/main" val="0"/>
-              </a:ext>
-            </a:extLst>
-          </a:blip>
+          <a:blip r:embed="rId4"/>
           <a:stretch>
             <a:fillRect/>
           </a:stretch>
         </p:blipFill>
         <p:spPr>
           <a:xfrm>
-            <a:off x="382588" y="1626040"/>
-            <a:ext cx="3383313" cy="983682"/>
+            <a:off x="3372847" y="1097280"/>
+            <a:ext cx="5141505" cy="3246120"/>
           </a:xfrm>
           <a:prstGeom prst="rect">
             <a:avLst/>
           </a:prstGeom>
         </p:spPr>
       </p:pic>
+      <p:sp>
+        <p:nvSpPr>
+          <p:cNvPr id="86" name="TextBox 85"/>
+          <p:cNvSpPr txBox="1"/>
+          <p:nvPr/>
+        </p:nvSpPr>
+        <p:spPr>
+          <a:xfrm>
+            <a:off x="777240" y="4434840"/>
+            <a:ext cx="10469880" cy="1143000"/>
+          </a:xfrm>
+          <a:prstGeom prst="rect">
+            <a:avLst/>
+          </a:prstGeom>
+          <a:solidFill>
+            <a:srgbClr val="FFFFFF"/>
+          </a:solidFill>
+          <a:ln>
+            <a:solidFill>
+              <a:srgbClr val="D2D2D2"/>
+            </a:solidFill>
+          </a:ln>
+        </p:spPr>
+        <p:txBody>
+          <a:bodyPr wrap="square">
+            <a:normAutofit/>
+          </a:bodyPr>
+          <a:lstStyle/>
+          <a:p>
+            <a:pPr>
+              <a:spcAft>
+                <a:spcPts val="200"/>
+              </a:spcAft>
+            </a:pPr>
+            <a:r>
+              <a:rPr sz="1200">
+                <a:solidFill>
+                  <a:srgbClr val="191919"/>
+                </a:solidFill>
+                <a:latin typeface="Aptos"/>
+              </a:rPr>
+              <a:t>At lambda = 1.50 um, the deep directional coupler gives Lpi_TE = 118.67 um and L_50/50 = 59.34 um.</a:t>
+            </a:r>
+          </a:p>
+          <a:p>
+            <a:pPr>
+              <a:spcAft>
+                <a:spcPts val="200"/>
+              </a:spcAft>
+            </a:pPr>
+            <a:r>
+              <a:rPr sz="1200">
+                <a:solidFill>
+                  <a:srgbClr val="191919"/>
+                </a:solidFill>
+                <a:latin typeface="Aptos"/>
+              </a:rPr>
+              <a:t>The normalized response is K = sin^2(pi L / 2 Lpi): 50/50 at L/Lpi = 0.5 and complete transfer at L/Lpi = 1.</a:t>
+            </a:r>
+          </a:p>
+        </p:txBody>
+      </p:sp>
     </p:spTree>
     <p:extLst>
       <p:ext uri="{BB962C8B-B14F-4D97-AF65-F5344CB8AC3E}">
@@ -12093,32 +10472,19 @@
           </a:bodyPr>
           <a:lstStyle/>
           <a:p>
-            <a:pPr marL="12700">
-              <a:lnSpc>
-                <a:spcPct val="100000"/>
-              </a:lnSpc>
-              <a:spcBef>
-                <a:spcPts val="100"/>
-              </a:spcBef>
-            </a:pPr>
-            <a:r>
-              <a:rPr lang="en-US" sz="2500" dirty="0"/>
-              <a:t>Learning outcome #3 – 2x2 Directional Coupler</a:t>
-            </a:r>
-            <a:br>
-              <a:rPr lang="en-US" sz="2500" spc="-5" dirty="0">
-                <a:latin typeface="+mj-lt"/>
-                <a:cs typeface="Lucida Sans"/>
+            <a:r>
+              <a:rPr sz="2100" b="1">
+                <a:latin typeface="Aptos"/>
               </a:rPr>
-            </a:br>
-            <a:r>
-              <a:rPr lang="en-US" b="0" dirty="0"/>
-              <a:t>Wavelength 1.55 µm – Sweep gaps between 0.2 and 1.2 µm in steps of 0.2 µm</a:t>
-            </a:r>
-            <a:endParaRPr lang="en-US" sz="2500" b="0" dirty="0">
-              <a:latin typeface="+mj-lt"/>
-              <a:cs typeface="Lucida Sans"/>
-            </a:endParaRPr>
+              <a:t>Learning outcome #3 - 2x2 Directional Coupler</a:t>
+            </a:r>
+            <a:br/>
+            <a:r>
+              <a:rPr sz="2100" b="1">
+                <a:latin typeface="Aptos"/>
+              </a:rPr>
+              <a:t>Wavelength 1.55 um - gap sweep 0.2 to 1.2 um</a:t>
+            </a:r>
           </a:p>
         </p:txBody>
       </p:sp>
@@ -12137,10 +10503,10 @@
           <p:nvPr/>
         </p:nvPicPr>
         <p:blipFill>
-          <a:blip r:embed="rId3">
+          <a:blip>
             <a:extLst>
               <a:ext uri="{96DAC541-7B7A-43D3-8B79-37D633B846F1}">
-                <asvg:svgBlip xmlns:asvg="http://schemas.microsoft.com/office/drawing/2016/SVG/main" r:embed="rId4"/>
+                <asvg:svgBlip xmlns:asvg="http://schemas.microsoft.com/office/drawing/2016/SVG/main" r:embed="rId3"/>
               </a:ext>
             </a:extLst>
           </a:blip>
@@ -12221,202 +10587,112 @@
           </a:p>
         </p:txBody>
       </p:sp>
-      <p:sp>
-        <p:nvSpPr>
-          <p:cNvPr id="2" name="CuadroTexto 1">
-            <a:extLst>
-              <a:ext uri="{FF2B5EF4-FFF2-40B4-BE49-F238E27FC236}">
-                <a16:creationId xmlns:a16="http://schemas.microsoft.com/office/drawing/2014/main" id="{82A62DD6-5488-72A1-9926-0CAEE59089A9}"/>
-              </a:ext>
-            </a:extLst>
-          </p:cNvPr>
+      <p:pic>
+        <p:nvPicPr>
+          <p:cNvPr id="85" name="Picture 84" descr="image.png"/>
+          <p:cNvPicPr>
+            <a:picLocks noChangeAspect="1"/>
+          </p:cNvPicPr>
+          <p:nvPr/>
+        </p:nvPicPr>
+        <p:blipFill>
+          <a:blip r:embed="rId4"/>
+          <a:stretch>
+            <a:fillRect/>
+          </a:stretch>
+        </p:blipFill>
+        <p:spPr>
+          <a:xfrm>
+            <a:off x="685800" y="1942632"/>
+            <a:ext cx="4754880" cy="1189655"/>
+          </a:xfrm>
+          <a:prstGeom prst="rect">
+            <a:avLst/>
+          </a:prstGeom>
+        </p:spPr>
+      </p:pic>
+      <p:pic>
+        <p:nvPicPr>
+          <p:cNvPr id="86" name="Picture 85" descr="image.png"/>
+          <p:cNvPicPr>
+            <a:picLocks noChangeAspect="1"/>
+          </p:cNvPicPr>
+          <p:nvPr/>
+        </p:nvPicPr>
+        <p:blipFill>
+          <a:blip r:embed="rId5"/>
+          <a:stretch>
+            <a:fillRect/>
+          </a:stretch>
+        </p:blipFill>
+        <p:spPr>
+          <a:xfrm>
+            <a:off x="5853929" y="1051560"/>
+            <a:ext cx="4979941" cy="2971800"/>
+          </a:xfrm>
+          <a:prstGeom prst="rect">
+            <a:avLst/>
+          </a:prstGeom>
+        </p:spPr>
+      </p:pic>
+      <p:sp>
+        <p:nvSpPr>
+          <p:cNvPr id="87" name="TextBox 86"/>
           <p:cNvSpPr txBox="1"/>
           <p:nvPr/>
         </p:nvSpPr>
         <p:spPr>
           <a:xfrm>
-            <a:off x="609441" y="4860334"/>
-            <a:ext cx="11199971" cy="1200329"/>
+            <a:off x="685800" y="4251960"/>
+            <a:ext cx="10652760" cy="1371600"/>
           </a:xfrm>
           <a:prstGeom prst="rect">
             <a:avLst/>
           </a:prstGeom>
           <a:solidFill>
-            <a:schemeClr val="bg1">
-              <a:lumMod val="95000"/>
-            </a:schemeClr>
+            <a:srgbClr val="FFFFFF"/>
           </a:solidFill>
-          <a:ln w="28575">
+          <a:ln>
             <a:solidFill>
-              <a:srgbClr val="E0700D"/>
+              <a:srgbClr val="D2D2D2"/>
             </a:solidFill>
           </a:ln>
         </p:spPr>
         <p:txBody>
-          <a:bodyPr wrap="square" rtlCol="0">
-            <a:spAutoFit/>
+          <a:bodyPr wrap="square">
+            <a:normAutofit/>
           </a:bodyPr>
           <a:lstStyle/>
           <a:p>
-            <a:pPr algn="just"/>
-            <a:r>
-              <a:rPr lang="en-US" sz="1200" dirty="0">
-                <a:latin typeface="Arial" panose="020B0604020202020204" pitchFamily="34" charset="0"/>
-                <a:cs typeface="Arial" panose="020B0604020202020204" pitchFamily="34" charset="0"/>
+            <a:pPr>
+              <a:spcAft>
+                <a:spcPts val="200"/>
+              </a:spcAft>
+            </a:pPr>
+            <a:r>
+              <a:rPr sz="1100">
+                <a:solidFill>
+                  <a:srgbClr val="191919"/>
+                </a:solidFill>
+                <a:latin typeface="Aptos"/>
               </a:rPr>
-              <a:t>Comment results (Coupling relationship, </a:t>
-            </a:r>
-            <a:r>
-              <a:rPr lang="en-US" sz="1200" dirty="0" err="1">
-                <a:latin typeface="Arial" panose="020B0604020202020204" pitchFamily="34" charset="0"/>
-                <a:cs typeface="Arial" panose="020B0604020202020204" pitchFamily="34" charset="0"/>
+              <a:t>Gap sweep Lpi [um]: 0.2-&gt;25.81, 0.4-&gt;50.11, 0.6-&gt;94.03, 0.8-&gt;173.96, 1.0-&gt;318.88, 1.2-&gt;580.43.</a:t>
+            </a:r>
+          </a:p>
+          <a:p>
+            <a:pPr>
+              <a:spcAft>
+                <a:spcPts val="200"/>
+              </a:spcAft>
+            </a:pPr>
+            <a:r>
+              <a:rPr sz="1100">
+                <a:solidFill>
+                  <a:srgbClr val="191919"/>
+                </a:solidFill>
+                <a:latin typeface="Aptos"/>
               </a:rPr>
-              <a:t>Lpi</a:t>
-            </a:r>
-            <a:r>
-              <a:rPr lang="en-US" sz="1200" dirty="0">
-                <a:latin typeface="Arial" panose="020B0604020202020204" pitchFamily="34" charset="0"/>
-                <a:cs typeface="Arial" panose="020B0604020202020204" pitchFamily="34" charset="0"/>
-              </a:rPr>
-              <a:t>, losses, … )</a:t>
-            </a:r>
-          </a:p>
-          <a:p>
-            <a:pPr algn="just"/>
-            <a:endParaRPr lang="en-US" sz="1200" dirty="0">
-              <a:latin typeface="Arial" panose="020B0604020202020204" pitchFamily="34" charset="0"/>
-              <a:cs typeface="Arial" panose="020B0604020202020204" pitchFamily="34" charset="0"/>
-            </a:endParaRPr>
-          </a:p>
-          <a:p>
-            <a:pPr algn="just"/>
-            <a:endParaRPr lang="en-US" sz="1200" dirty="0">
-              <a:latin typeface="Arial" panose="020B0604020202020204" pitchFamily="34" charset="0"/>
-              <a:cs typeface="Arial" panose="020B0604020202020204" pitchFamily="34" charset="0"/>
-            </a:endParaRPr>
-          </a:p>
-          <a:p>
-            <a:pPr algn="just"/>
-            <a:endParaRPr lang="en-US" sz="1200" dirty="0">
-              <a:latin typeface="Arial" panose="020B0604020202020204" pitchFamily="34" charset="0"/>
-              <a:cs typeface="Arial" panose="020B0604020202020204" pitchFamily="34" charset="0"/>
-            </a:endParaRPr>
-          </a:p>
-          <a:p>
-            <a:pPr algn="just"/>
-            <a:endParaRPr lang="en-US" sz="1200" dirty="0">
-              <a:latin typeface="Arial" panose="020B0604020202020204" pitchFamily="34" charset="0"/>
-              <a:cs typeface="Arial" panose="020B0604020202020204" pitchFamily="34" charset="0"/>
-            </a:endParaRPr>
-          </a:p>
-          <a:p>
-            <a:pPr algn="just"/>
-            <a:endParaRPr lang="en-US" sz="1200" dirty="0">
-              <a:latin typeface="Arial" panose="020B0604020202020204" pitchFamily="34" charset="0"/>
-              <a:cs typeface="Arial" panose="020B0604020202020204" pitchFamily="34" charset="0"/>
-            </a:endParaRPr>
-          </a:p>
-        </p:txBody>
-      </p:sp>
-      <p:sp>
-        <p:nvSpPr>
-          <p:cNvPr id="7" name="Rectángulo 6">
-            <a:extLst>
-              <a:ext uri="{FF2B5EF4-FFF2-40B4-BE49-F238E27FC236}">
-                <a16:creationId xmlns:a16="http://schemas.microsoft.com/office/drawing/2014/main" id="{FBC7D187-267A-ADD4-764C-D3820B8ED302}"/>
-              </a:ext>
-            </a:extLst>
-          </p:cNvPr>
-          <p:cNvSpPr/>
-          <p:nvPr/>
-        </p:nvSpPr>
-        <p:spPr>
-          <a:xfrm>
-            <a:off x="609441" y="1418373"/>
-            <a:ext cx="11199971" cy="3306028"/>
-          </a:xfrm>
-          <a:prstGeom prst="rect">
-            <a:avLst/>
-          </a:prstGeom>
-          <a:noFill/>
-          <a:ln w="28575">
-            <a:solidFill>
-              <a:srgbClr val="E0700D"/>
-            </a:solidFill>
-          </a:ln>
-        </p:spPr>
-        <p:style>
-          <a:lnRef idx="2">
-            <a:schemeClr val="accent1">
-              <a:shade val="15000"/>
-            </a:schemeClr>
-          </a:lnRef>
-          <a:fillRef idx="1">
-            <a:schemeClr val="accent1"/>
-          </a:fillRef>
-          <a:effectRef idx="0">
-            <a:schemeClr val="accent1"/>
-          </a:effectRef>
-          <a:fontRef idx="minor">
-            <a:schemeClr val="lt1"/>
-          </a:fontRef>
-        </p:style>
-        <p:txBody>
-          <a:bodyPr rtlCol="0" anchor="ctr"/>
-          <a:lstStyle/>
-          <a:p>
-            <a:pPr algn="ctr"/>
-            <a:endParaRPr lang="en-US"/>
-          </a:p>
-        </p:txBody>
-      </p:sp>
-      <p:sp>
-        <p:nvSpPr>
-          <p:cNvPr id="8" name="CuadroTexto 7">
-            <a:extLst>
-              <a:ext uri="{FF2B5EF4-FFF2-40B4-BE49-F238E27FC236}">
-                <a16:creationId xmlns:a16="http://schemas.microsoft.com/office/drawing/2014/main" id="{1EF5BFDA-8EC1-8C73-A932-F36C4DB93C73}"/>
-              </a:ext>
-            </a:extLst>
-          </p:cNvPr>
-          <p:cNvSpPr txBox="1"/>
-          <p:nvPr/>
-        </p:nvSpPr>
-        <p:spPr>
-          <a:xfrm>
-            <a:off x="2286000" y="2671278"/>
-            <a:ext cx="7718580" cy="923330"/>
-          </a:xfrm>
-          <a:prstGeom prst="rect">
-            <a:avLst/>
-          </a:prstGeom>
-          <a:noFill/>
-        </p:spPr>
-        <p:txBody>
-          <a:bodyPr wrap="square" rtlCol="0">
-            <a:spAutoFit/>
-          </a:bodyPr>
-          <a:lstStyle/>
-          <a:p>
-            <a:pPr algn="ctr"/>
-            <a:r>
-              <a:rPr lang="en-US" b="1" dirty="0"/>
-              <a:t>deep</a:t>
-            </a:r>
-            <a:r>
-              <a:rPr lang="en-US" dirty="0"/>
-              <a:t> waveguide</a:t>
-            </a:r>
-          </a:p>
-          <a:p>
-            <a:pPr algn="ctr"/>
-            <a:endParaRPr lang="en-US" dirty="0"/>
-          </a:p>
-          <a:p>
-            <a:pPr algn="ctr"/>
-            <a:r>
-              <a:rPr lang="en-US" dirty="0"/>
-              <a:t>Paste propagation plots and output text here</a:t>
+              <a:t>For gap = 0.6 um: L_50/50 = 47.01 um, ratio = 0.500/0.500 and EL = 0.135 dB. Larger gap reduces evanescent coupling and increases Lpi; EL is not monotonic in this EME sweep.</a:t>
             </a:r>
           </a:p>
         </p:txBody>
@@ -12488,36 +10764,21 @@
           </a:bodyPr>
           <a:lstStyle/>
           <a:p>
-            <a:pPr marL="12700">
-              <a:lnSpc>
-                <a:spcPct val="100000"/>
-              </a:lnSpc>
-              <a:spcBef>
-                <a:spcPts val="100"/>
-              </a:spcBef>
-            </a:pPr>
-            <a:r>
-              <a:rPr lang="en-US" sz="2500" dirty="0"/>
-              <a:t>Learning outcome #4 – Parallel uncoupled waveguides – TE0 mode</a:t>
+            <a:r>
+              <a:rPr sz="2100" b="1" dirty="0">
+                <a:latin typeface="Aptos"/>
+              </a:rPr>
+              <a:t>Learning outcome #4 - Parallel uncoupled waveguides - TE0 mode</a:t>
             </a:r>
             <a:br>
-              <a:rPr lang="en-US" sz="2500" spc="-5" dirty="0">
-                <a:latin typeface="+mj-lt"/>
-                <a:cs typeface="Lucida Sans"/>
+              <a:rPr dirty="0"/>
+            </a:br>
+            <a:r>
+              <a:rPr sz="2100" b="1" dirty="0">
+                <a:latin typeface="Aptos"/>
               </a:rPr>
-            </a:br>
-            <a:r>
-              <a:rPr lang="en-US" b="0" dirty="0"/>
-              <a:t>Wavelength 1.55 µm, width 1.0 µm, gap to be found for uncoupled </a:t>
-            </a:r>
-            <a:r>
-              <a:rPr lang="en-US" b="0" dirty="0" err="1"/>
-              <a:t>wvgs</a:t>
-            </a:r>
-            <a:endParaRPr lang="en-US" sz="2500" b="0" dirty="0">
-              <a:latin typeface="+mj-lt"/>
-              <a:cs typeface="Lucida Sans"/>
-            </a:endParaRPr>
+              <a:t>Wavelength 1.55 um, width 1.0 um, L = 10 mm</a:t>
+            </a:r>
           </a:p>
         </p:txBody>
       </p:sp>
@@ -12536,10 +10797,10 @@
           <p:nvPr/>
         </p:nvPicPr>
         <p:blipFill>
-          <a:blip r:embed="rId3">
+          <a:blip>
             <a:extLst>
               <a:ext uri="{96DAC541-7B7A-43D3-8B79-37D633B846F1}">
-                <asvg:svgBlip xmlns:asvg="http://schemas.microsoft.com/office/drawing/2016/SVG/main" r:embed="rId4"/>
+                <asvg:svgBlip xmlns:asvg="http://schemas.microsoft.com/office/drawing/2016/SVG/main" r:embed="rId3"/>
               </a:ext>
             </a:extLst>
           </a:blip>
@@ -12617,231 +10878,6 @@
               <a:t>LAB 2.0. COUPLERS</a:t>
             </a:r>
             <a:endParaRPr lang="es-ES" spc="-5" dirty="0"/>
-          </a:p>
-        </p:txBody>
-      </p:sp>
-      <p:sp>
-        <p:nvSpPr>
-          <p:cNvPr id="2" name="CuadroTexto 1">
-            <a:extLst>
-              <a:ext uri="{FF2B5EF4-FFF2-40B4-BE49-F238E27FC236}">
-                <a16:creationId xmlns:a16="http://schemas.microsoft.com/office/drawing/2014/main" id="{CA5F0FDF-2A95-453B-4ECA-AEB637FF2694}"/>
-              </a:ext>
-            </a:extLst>
-          </p:cNvPr>
-          <p:cNvSpPr txBox="1"/>
-          <p:nvPr/>
-        </p:nvSpPr>
-        <p:spPr>
-          <a:xfrm>
-            <a:off x="609441" y="4627196"/>
-            <a:ext cx="11199971" cy="2123658"/>
-          </a:xfrm>
-          <a:prstGeom prst="rect">
-            <a:avLst/>
-          </a:prstGeom>
-          <a:solidFill>
-            <a:schemeClr val="bg1">
-              <a:lumMod val="95000"/>
-            </a:schemeClr>
-          </a:solidFill>
-          <a:ln w="28575">
-            <a:solidFill>
-              <a:srgbClr val="E0700D"/>
-            </a:solidFill>
-          </a:ln>
-        </p:spPr>
-        <p:txBody>
-          <a:bodyPr wrap="square" rtlCol="0">
-            <a:spAutoFit/>
-          </a:bodyPr>
-          <a:lstStyle/>
-          <a:p>
-            <a:pPr algn="just"/>
-            <a:r>
-              <a:rPr lang="en-US" sz="1200" b="1" dirty="0">
-                <a:latin typeface="Arial" panose="020B0604020202020204" pitchFamily="34" charset="0"/>
-                <a:cs typeface="Arial" panose="020B0604020202020204" pitchFamily="34" charset="0"/>
-              </a:rPr>
-              <a:t>Hints:</a:t>
-            </a:r>
-          </a:p>
-          <a:p>
-            <a:pPr algn="just"/>
-            <a:r>
-              <a:rPr lang="en-US" sz="1200" dirty="0">
-                <a:latin typeface="Arial" panose="020B0604020202020204" pitchFamily="34" charset="0"/>
-                <a:cs typeface="Arial" panose="020B0604020202020204" pitchFamily="34" charset="0"/>
-              </a:rPr>
-              <a:t>All waveguides running in parallel are coupled somehow. Controlling the degree of coupling is key for those waveguides you don’t want coupling over certain level (i.e. uncoupled waveguides). Uncoupled waveguide definition, we will use K&lt;0.01. Parallel waveguide length = 10 mm (typical length of a chip). Find minimum gap shallow / deep w=1.0µm </a:t>
-            </a:r>
-            <a:r>
-              <a:rPr lang="en-US" sz="1200" dirty="0" err="1">
-                <a:latin typeface="Arial" panose="020B0604020202020204" pitchFamily="34" charset="0"/>
-                <a:cs typeface="Arial" panose="020B0604020202020204" pitchFamily="34" charset="0"/>
-              </a:rPr>
-              <a:t>wvl</a:t>
-            </a:r>
-            <a:r>
-              <a:rPr lang="en-US" sz="1200" dirty="0">
-                <a:latin typeface="Arial" panose="020B0604020202020204" pitchFamily="34" charset="0"/>
-                <a:cs typeface="Arial" panose="020B0604020202020204" pitchFamily="34" charset="0"/>
-              </a:rPr>
-              <a:t> 1.55 µm.</a:t>
-            </a:r>
-          </a:p>
-          <a:p>
-            <a:pPr algn="just"/>
-            <a:endParaRPr lang="en-US" sz="1200" dirty="0">
-              <a:latin typeface="Arial" panose="020B0604020202020204" pitchFamily="34" charset="0"/>
-              <a:cs typeface="Arial" panose="020B0604020202020204" pitchFamily="34" charset="0"/>
-            </a:endParaRPr>
-          </a:p>
-          <a:p>
-            <a:pPr algn="just"/>
-            <a:endParaRPr lang="en-US" sz="1200" dirty="0">
-              <a:latin typeface="Arial" panose="020B0604020202020204" pitchFamily="34" charset="0"/>
-              <a:cs typeface="Arial" panose="020B0604020202020204" pitchFamily="34" charset="0"/>
-            </a:endParaRPr>
-          </a:p>
-          <a:p>
-            <a:pPr algn="just"/>
-            <a:endParaRPr lang="en-US" sz="1200" dirty="0">
-              <a:latin typeface="Arial" panose="020B0604020202020204" pitchFamily="34" charset="0"/>
-              <a:cs typeface="Arial" panose="020B0604020202020204" pitchFamily="34" charset="0"/>
-            </a:endParaRPr>
-          </a:p>
-          <a:p>
-            <a:pPr algn="just"/>
-            <a:endParaRPr lang="en-US" sz="1200" dirty="0">
-              <a:latin typeface="Arial" panose="020B0604020202020204" pitchFamily="34" charset="0"/>
-              <a:cs typeface="Arial" panose="020B0604020202020204" pitchFamily="34" charset="0"/>
-            </a:endParaRPr>
-          </a:p>
-          <a:p>
-            <a:pPr algn="just"/>
-            <a:endParaRPr lang="en-US" sz="1200" dirty="0">
-              <a:latin typeface="Arial" panose="020B0604020202020204" pitchFamily="34" charset="0"/>
-              <a:cs typeface="Arial" panose="020B0604020202020204" pitchFamily="34" charset="0"/>
-            </a:endParaRPr>
-          </a:p>
-          <a:p>
-            <a:pPr algn="just"/>
-            <a:endParaRPr lang="en-US" sz="1200" dirty="0">
-              <a:latin typeface="Arial" panose="020B0604020202020204" pitchFamily="34" charset="0"/>
-              <a:cs typeface="Arial" panose="020B0604020202020204" pitchFamily="34" charset="0"/>
-            </a:endParaRPr>
-          </a:p>
-          <a:p>
-            <a:pPr algn="just"/>
-            <a:endParaRPr lang="en-US" sz="1200" dirty="0">
-              <a:latin typeface="Arial" panose="020B0604020202020204" pitchFamily="34" charset="0"/>
-              <a:cs typeface="Arial" panose="020B0604020202020204" pitchFamily="34" charset="0"/>
-            </a:endParaRPr>
-          </a:p>
-        </p:txBody>
-      </p:sp>
-      <p:sp>
-        <p:nvSpPr>
-          <p:cNvPr id="4" name="Rectángulo 3">
-            <a:extLst>
-              <a:ext uri="{FF2B5EF4-FFF2-40B4-BE49-F238E27FC236}">
-                <a16:creationId xmlns:a16="http://schemas.microsoft.com/office/drawing/2014/main" id="{FB4B77A0-B37C-3130-FB52-4E560C66946F}"/>
-              </a:ext>
-            </a:extLst>
-          </p:cNvPr>
-          <p:cNvSpPr/>
-          <p:nvPr/>
-        </p:nvSpPr>
-        <p:spPr>
-          <a:xfrm>
-            <a:off x="609441" y="1219200"/>
-            <a:ext cx="5486559" cy="3306028"/>
-          </a:xfrm>
-          <a:prstGeom prst="rect">
-            <a:avLst/>
-          </a:prstGeom>
-          <a:noFill/>
-          <a:ln w="28575">
-            <a:solidFill>
-              <a:srgbClr val="E0700D"/>
-            </a:solidFill>
-          </a:ln>
-        </p:spPr>
-        <p:style>
-          <a:lnRef idx="2">
-            <a:schemeClr val="accent1">
-              <a:shade val="15000"/>
-            </a:schemeClr>
-          </a:lnRef>
-          <a:fillRef idx="1">
-            <a:schemeClr val="accent1"/>
-          </a:fillRef>
-          <a:effectRef idx="0">
-            <a:schemeClr val="accent1"/>
-          </a:effectRef>
-          <a:fontRef idx="minor">
-            <a:schemeClr val="lt1"/>
-          </a:fontRef>
-        </p:style>
-        <p:txBody>
-          <a:bodyPr rtlCol="0" anchor="ctr"/>
-          <a:lstStyle/>
-          <a:p>
-            <a:pPr algn="ctr"/>
-            <a:endParaRPr lang="en-US"/>
-          </a:p>
-        </p:txBody>
-      </p:sp>
-      <p:sp>
-        <p:nvSpPr>
-          <p:cNvPr id="5" name="Rectángulo 4">
-            <a:extLst>
-              <a:ext uri="{FF2B5EF4-FFF2-40B4-BE49-F238E27FC236}">
-                <a16:creationId xmlns:a16="http://schemas.microsoft.com/office/drawing/2014/main" id="{DA7ECAA3-0876-C0FB-D7E5-448FCC5ED226}"/>
-              </a:ext>
-            </a:extLst>
-          </p:cNvPr>
-          <p:cNvSpPr/>
-          <p:nvPr/>
-        </p:nvSpPr>
-        <p:spPr>
-          <a:xfrm>
-            <a:off x="6321424" y="1219200"/>
-            <a:ext cx="5486559" cy="3306028"/>
-          </a:xfrm>
-          <a:prstGeom prst="rect">
-            <a:avLst/>
-          </a:prstGeom>
-          <a:noFill/>
-          <a:ln w="28575">
-            <a:solidFill>
-              <a:srgbClr val="E0700D"/>
-            </a:solidFill>
-          </a:ln>
-        </p:spPr>
-        <p:style>
-          <a:lnRef idx="2">
-            <a:schemeClr val="accent1">
-              <a:shade val="15000"/>
-            </a:schemeClr>
-          </a:lnRef>
-          <a:fillRef idx="1">
-            <a:schemeClr val="accent1"/>
-          </a:fillRef>
-          <a:effectRef idx="0">
-            <a:schemeClr val="accent1"/>
-          </a:effectRef>
-          <a:fontRef idx="minor">
-            <a:schemeClr val="lt1"/>
-          </a:fontRef>
-        </p:style>
-        <p:txBody>
-          <a:bodyPr rtlCol="0" anchor="ctr"/>
-          <a:lstStyle/>
-          <a:p>
-            <a:pPr algn="ctr"/>
-            <a:endParaRPr lang="en-US"/>
           </a:p>
         </p:txBody>
       </p:sp>
@@ -12862,7 +10898,7 @@
             <p:spPr>
               <a:xfrm>
                 <a:off x="1079403" y="2480496"/>
-                <a:ext cx="4546634" cy="1477328"/>
+                <a:ext cx="4546634" cy="1200329"/>
               </a:xfrm>
               <a:prstGeom prst="rect">
                 <a:avLst/>
@@ -12893,7 +10929,7 @@
                 <a:pPr algn="ctr"/>
                 <a:r>
                   <a:rPr lang="en-US" dirty="0"/>
-                  <a:t>Paste </a:t>
+                  <a:t>e </a:t>
                 </a:r>
                 <a14:m>
                   <m:oMath xmlns:m="http://schemas.openxmlformats.org/officeDocument/2006/math">
@@ -12943,15 +10979,15 @@
             <p:spPr>
               <a:xfrm>
                 <a:off x="1079403" y="2480496"/>
-                <a:ext cx="4546634" cy="1477328"/>
+                <a:ext cx="4546634" cy="1200329"/>
               </a:xfrm>
               <a:prstGeom prst="rect">
                 <a:avLst/>
               </a:prstGeom>
               <a:blipFill>
-                <a:blip r:embed="rId5"/>
+                <a:blip r:embed="rId4"/>
                 <a:stretch>
-                  <a:fillRect t="-2479"/>
+                  <a:fillRect t="-3046"/>
                 </a:stretch>
               </a:blipFill>
             </p:spPr>
@@ -12970,8 +11006,8 @@
           </p:sp>
         </mc:Fallback>
       </mc:AlternateContent>
-      <mc:AlternateContent xmlns:mc="http://schemas.openxmlformats.org/markup-compatibility/2006">
-        <mc:Choice xmlns:a14="http://schemas.microsoft.com/office/drawing/2010/main" Requires="a14">
+      <mc:AlternateContent xmlns:mc="http://schemas.openxmlformats.org/markup-compatibility/2006" xmlns:a14="http://schemas.microsoft.com/office/drawing/2010/main">
+        <mc:Choice Requires="a14">
           <p:sp>
             <p:nvSpPr>
               <p:cNvPr id="10" name="CuadroTexto 9">
@@ -12987,7 +11023,7 @@
             <p:spPr>
               <a:xfrm>
                 <a:off x="6883366" y="2480496"/>
-                <a:ext cx="4546634" cy="1477328"/>
+                <a:ext cx="4546634" cy="1200329"/>
               </a:xfrm>
               <a:prstGeom prst="rect">
                 <a:avLst/>
@@ -13029,7 +11065,7 @@
                 <a:pPr algn="ctr"/>
                 <a:r>
                   <a:rPr lang="en-US" dirty="0"/>
-                  <a:t>Paste </a:t>
+                  <a:t>e </a:t>
                 </a:r>
                 <a14:m>
                   <m:oMath xmlns:m="http://schemas.openxmlformats.org/officeDocument/2006/math">
@@ -13057,7 +11093,7 @@
             </p:txBody>
           </p:sp>
         </mc:Choice>
-        <mc:Fallback>
+        <mc:Fallback xmlns="">
           <p:sp>
             <p:nvSpPr>
               <p:cNvPr id="10" name="CuadroTexto 9">
@@ -13075,15 +11111,15 @@
             <p:spPr>
               <a:xfrm>
                 <a:off x="6883366" y="2480496"/>
-                <a:ext cx="4546634" cy="1477328"/>
+                <a:ext cx="4546634" cy="1200329"/>
               </a:xfrm>
               <a:prstGeom prst="rect">
                 <a:avLst/>
               </a:prstGeom>
               <a:blipFill>
-                <a:blip r:embed="rId6"/>
+                <a:blip r:embed="rId5"/>
                 <a:stretch>
-                  <a:fillRect t="-2479" b="-5785"/>
+                  <a:fillRect t="-3046" b="-7107"/>
                 </a:stretch>
               </a:blipFill>
             </p:spPr>
@@ -13102,6 +11138,166 @@
           </p:sp>
         </mc:Fallback>
       </mc:AlternateContent>
+      <p:pic>
+        <p:nvPicPr>
+          <p:cNvPr id="4" name="Imagen 3">
+            <a:extLst>
+              <a:ext uri="{FF2B5EF4-FFF2-40B4-BE49-F238E27FC236}">
+                <a16:creationId xmlns:a16="http://schemas.microsoft.com/office/drawing/2014/main" id="{188AFB32-6290-1EDA-65A9-3F010417A5F1}"/>
+              </a:ext>
+            </a:extLst>
+          </p:cNvPr>
+          <p:cNvPicPr>
+            <a:picLocks/>
+          </p:cNvPicPr>
+          <p:nvPr/>
+        </p:nvPicPr>
+        <p:blipFill>
+          <a:blip r:embed="rId6" cstate="print">
+            <a:extLst>
+              <a:ext uri="{28A0092B-C50C-407E-A947-70E740481C1C}">
+                <a14:useLocalDpi xmlns:a14="http://schemas.microsoft.com/office/drawing/2010/main" val="0"/>
+              </a:ext>
+            </a:extLst>
+          </a:blip>
+          <a:stretch>
+            <a:fillRect/>
+          </a:stretch>
+        </p:blipFill>
+        <p:spPr>
+          <a:xfrm>
+            <a:off x="609600" y="1270000"/>
+            <a:ext cx="4953000" cy="2851150"/>
+          </a:xfrm>
+          <a:prstGeom prst="rect">
+            <a:avLst/>
+          </a:prstGeom>
+        </p:spPr>
+      </p:pic>
+      <p:pic>
+        <p:nvPicPr>
+          <p:cNvPr id="6" name="Imagen 5">
+            <a:extLst>
+              <a:ext uri="{FF2B5EF4-FFF2-40B4-BE49-F238E27FC236}">
+                <a16:creationId xmlns:a16="http://schemas.microsoft.com/office/drawing/2014/main" id="{52BFD043-1095-BEC0-E879-EFA386CEE414}"/>
+              </a:ext>
+            </a:extLst>
+          </p:cNvPr>
+          <p:cNvPicPr>
+            <a:picLocks/>
+          </p:cNvPicPr>
+          <p:nvPr/>
+        </p:nvPicPr>
+        <p:blipFill>
+          <a:blip r:embed="rId7" cstate="print">
+            <a:extLst>
+              <a:ext uri="{28A0092B-C50C-407E-A947-70E740481C1C}">
+                <a14:useLocalDpi xmlns:a14="http://schemas.microsoft.com/office/drawing/2010/main" val="0"/>
+              </a:ext>
+            </a:extLst>
+          </a:blip>
+          <a:stretch>
+            <a:fillRect/>
+          </a:stretch>
+        </p:blipFill>
+        <p:spPr>
+          <a:xfrm>
+            <a:off x="6629400" y="1270000"/>
+            <a:ext cx="4953000" cy="2851150"/>
+          </a:xfrm>
+          <a:prstGeom prst="rect">
+            <a:avLst/>
+          </a:prstGeom>
+        </p:spPr>
+      </p:pic>
+      <p:sp>
+        <p:nvSpPr>
+          <p:cNvPr id="7" name="Rectángulo 6">
+            <a:extLst>
+              <a:ext uri="{FF2B5EF4-FFF2-40B4-BE49-F238E27FC236}">
+                <a16:creationId xmlns:a16="http://schemas.microsoft.com/office/drawing/2014/main" id="{BF9A14E8-59F6-2DAE-1A0B-B50787C2B8AD}"/>
+              </a:ext>
+            </a:extLst>
+          </p:cNvPr>
+          <p:cNvSpPr/>
+          <p:nvPr/>
+        </p:nvSpPr>
+        <p:spPr>
+          <a:xfrm>
+            <a:off x="762000" y="4495800"/>
+            <a:ext cx="10668000" cy="1041400"/>
+          </a:xfrm>
+          <a:prstGeom prst="rect">
+            <a:avLst/>
+          </a:prstGeom>
+          <a:solidFill>
+            <a:srgbClr val="FFFFFF"/>
+          </a:solidFill>
+          <a:ln w="9525">
+            <a:solidFill>
+              <a:srgbClr val="D0D0D0"/>
+            </a:solidFill>
+          </a:ln>
+        </p:spPr>
+        <p:style>
+          <a:lnRef idx="2">
+            <a:schemeClr val="accent1">
+              <a:shade val="15000"/>
+            </a:schemeClr>
+          </a:lnRef>
+          <a:fillRef idx="1">
+            <a:schemeClr val="accent1"/>
+          </a:fillRef>
+          <a:effectRef idx="0">
+            <a:schemeClr val="accent1"/>
+          </a:effectRef>
+          <a:fontRef idx="minor">
+            <a:schemeClr val="lt1"/>
+          </a:fontRef>
+        </p:style>
+        <p:txBody>
+          <a:bodyPr lIns="101600" tIns="76200" rIns="101600" bIns="76200" rtlCol="0" anchor="ctr"/>
+          <a:lstStyle/>
+          <a:p>
+            <a:pPr algn="ctr">
+              <a:spcAft>
+                <a:spcPts val="400"/>
+              </a:spcAft>
+            </a:pPr>
+            <a:r>
+              <a:rPr lang="en-US" sz="1300">
+                <a:solidFill>
+                  <a:srgbClr val="202020"/>
+                </a:solidFill>
+                <a:latin typeface="Arial" panose="020B0604020202020204" pitchFamily="34" charset="0"/>
+              </a:rPr>
+              <a:t>First sampled K&lt;0.01 points can be periodic recurrences for exactly 10 mm, so they are reported but not used as the final layout rule.</a:t>
+            </a:r>
+          </a:p>
+          <a:p>
+            <a:pPr algn="ctr">
+              <a:spcAft>
+                <a:spcPts val="400"/>
+              </a:spcAft>
+            </a:pPr>
+            <a:r>
+              <a:rPr lang="en-US" sz="1300">
+                <a:solidFill>
+                  <a:srgbClr val="202020"/>
+                </a:solidFill>
+                <a:latin typeface="Arial" panose="020B0604020202020204" pitchFamily="34" charset="0"/>
+              </a:rPr>
+              <a:t>Conservative criterion: invert K = sin^2(pi L / 2 Lpi) and require Lpi &gt; 156.8 mm; selected gaps are deep = 4.0 um and shallow = 5.0 um.</a:t>
+            </a:r>
+            <a:endParaRPr lang="es-ES" sz="1300">
+              <a:solidFill>
+                <a:srgbClr val="202020"/>
+              </a:solidFill>
+              <a:latin typeface="Arial" panose="020B0604020202020204" pitchFamily="34" charset="0"/>
+            </a:endParaRPr>
+          </a:p>
+        </p:txBody>
+      </p:sp>
     </p:spTree>
     <p:extLst>
       <p:ext uri="{BB962C8B-B14F-4D97-AF65-F5344CB8AC3E}">
@@ -13310,22 +11506,12 @@
           </a:bodyPr>
           <a:lstStyle/>
           <a:p>
-            <a:pPr marL="12700">
-              <a:lnSpc>
-                <a:spcPct val="100000"/>
-              </a:lnSpc>
-              <a:spcBef>
-                <a:spcPts val="100"/>
-              </a:spcBef>
-            </a:pPr>
-            <a:r>
-              <a:rPr lang="en-US" sz="2500" dirty="0"/>
-              <a:t>Learning outcome #5 – Multimode Interference (MMI) Coupler cross-section</a:t>
-            </a:r>
-            <a:endParaRPr lang="en-US" sz="2500" b="0" dirty="0">
-              <a:latin typeface="+mj-lt"/>
-              <a:cs typeface="Lucida Sans"/>
-            </a:endParaRPr>
+            <a:r>
+              <a:rPr sz="2100" b="1">
+                <a:latin typeface="Aptos"/>
+              </a:rPr>
+              <a:t>Learning outcome #5 - Multimode Interference (MMI) Coupler cross-section</a:t>
+            </a:r>
           </a:p>
         </p:txBody>
       </p:sp>
@@ -13344,10 +11530,10 @@
           <p:nvPr/>
         </p:nvPicPr>
         <p:blipFill>
-          <a:blip r:embed="rId3">
+          <a:blip>
             <a:extLst>
               <a:ext uri="{96DAC541-7B7A-43D3-8B79-37D633B846F1}">
-                <asvg:svgBlip xmlns:asvg="http://schemas.microsoft.com/office/drawing/2016/SVG/main" r:embed="rId4"/>
+                <asvg:svgBlip xmlns:asvg="http://schemas.microsoft.com/office/drawing/2016/SVG/main" r:embed="rId3"/>
               </a:ext>
             </a:extLst>
           </a:blip>
@@ -13428,391 +11614,113 @@
           </a:p>
         </p:txBody>
       </p:sp>
-      <mc:AlternateContent xmlns:mc="http://schemas.openxmlformats.org/markup-compatibility/2006">
-        <mc:Choice xmlns:a14="http://schemas.microsoft.com/office/drawing/2010/main" Requires="a14">
-          <p:sp>
-            <p:nvSpPr>
-              <p:cNvPr id="4" name="Marcador de texto 2">
-                <a:extLst>
-                  <a:ext uri="{FF2B5EF4-FFF2-40B4-BE49-F238E27FC236}">
-                    <a16:creationId xmlns:a16="http://schemas.microsoft.com/office/drawing/2014/main" id="{D838A93A-BFC8-0124-93CE-FDC193435A0C}"/>
-                  </a:ext>
-                </a:extLst>
-              </p:cNvPr>
-              <p:cNvSpPr txBox="1">
-                <a:spLocks/>
-              </p:cNvSpPr>
-              <p:nvPr/>
-            </p:nvSpPr>
-            <p:spPr>
-              <a:xfrm>
-                <a:off x="608012" y="1295400"/>
-                <a:ext cx="11048999" cy="4958137"/>
-              </a:xfrm>
-              <a:prstGeom prst="rect">
-                <a:avLst/>
-              </a:prstGeom>
-            </p:spPr>
-            <p:txBody>
-              <a:bodyPr>
-                <a:normAutofit/>
-              </a:bodyPr>
-              <a:lstStyle>
-                <a:lvl1pPr marL="0">
-                  <a:defRPr>
-                    <a:latin typeface="+mn-lt"/>
-                    <a:ea typeface="+mn-ea"/>
-                    <a:cs typeface="+mn-cs"/>
-                  </a:defRPr>
-                </a:lvl1pPr>
-                <a:lvl2pPr marL="457200">
-                  <a:defRPr>
-                    <a:latin typeface="+mn-lt"/>
-                    <a:ea typeface="+mn-ea"/>
-                    <a:cs typeface="+mn-cs"/>
-                  </a:defRPr>
-                </a:lvl2pPr>
-                <a:lvl3pPr marL="914400">
-                  <a:defRPr>
-                    <a:latin typeface="+mn-lt"/>
-                    <a:ea typeface="+mn-ea"/>
-                    <a:cs typeface="+mn-cs"/>
-                  </a:defRPr>
-                </a:lvl3pPr>
-                <a:lvl4pPr marL="1371600">
-                  <a:defRPr>
-                    <a:latin typeface="+mn-lt"/>
-                    <a:ea typeface="+mn-ea"/>
-                    <a:cs typeface="+mn-cs"/>
-                  </a:defRPr>
-                </a:lvl4pPr>
-                <a:lvl5pPr marL="1828800">
-                  <a:defRPr>
-                    <a:latin typeface="+mn-lt"/>
-                    <a:ea typeface="+mn-ea"/>
-                    <a:cs typeface="+mn-cs"/>
-                  </a:defRPr>
-                </a:lvl5pPr>
-                <a:lvl6pPr marL="2286000">
-                  <a:defRPr>
-                    <a:latin typeface="+mn-lt"/>
-                    <a:ea typeface="+mn-ea"/>
-                    <a:cs typeface="+mn-cs"/>
-                  </a:defRPr>
-                </a:lvl6pPr>
-                <a:lvl7pPr marL="2743200">
-                  <a:defRPr>
-                    <a:latin typeface="+mn-lt"/>
-                    <a:ea typeface="+mn-ea"/>
-                    <a:cs typeface="+mn-cs"/>
-                  </a:defRPr>
-                </a:lvl7pPr>
-                <a:lvl8pPr marL="3200400">
-                  <a:defRPr>
-                    <a:latin typeface="+mn-lt"/>
-                    <a:ea typeface="+mn-ea"/>
-                    <a:cs typeface="+mn-cs"/>
-                  </a:defRPr>
-                </a:lvl8pPr>
-                <a:lvl9pPr marL="3657600">
-                  <a:defRPr>
-                    <a:latin typeface="+mn-lt"/>
-                    <a:ea typeface="+mn-ea"/>
-                    <a:cs typeface="+mn-cs"/>
-                  </a:defRPr>
-                </a:lvl9pPr>
-              </a:lstStyle>
-              <a:p>
-                <a:pPr marL="0" indent="0">
-                  <a:buNone/>
-                </a:pPr>
-                <a:r>
-                  <a:rPr lang="en-US" sz="2000" b="1" dirty="0"/>
-                  <a:t>INSTRUCTOR:</a:t>
-                </a:r>
-              </a:p>
-              <a:p>
-                <a:pPr marL="342900" indent="-342900" algn="just">
-                  <a:buFont typeface="Arial" panose="020B0604020202020204" pitchFamily="34" charset="0"/>
-                  <a:buChar char="•"/>
-                </a:pPr>
-                <a:r>
-                  <a:rPr lang="en-US" sz="2000" dirty="0"/>
-                  <a:t>Present Python and </a:t>
-                </a:r>
-                <a:r>
-                  <a:rPr lang="en-US" sz="2000" dirty="0" err="1"/>
-                  <a:t>GDSFactory</a:t>
-                </a:r>
-                <a:r>
-                  <a:rPr lang="en-US" sz="2000" dirty="0"/>
-                  <a:t> implementation of DC cross-section</a:t>
-                </a:r>
-              </a:p>
-              <a:p>
-                <a:pPr marL="342900" indent="-342900" algn="just">
-                  <a:buFont typeface="Arial" panose="020B0604020202020204" pitchFamily="34" charset="0"/>
-                  <a:buChar char="•"/>
-                </a:pPr>
-                <a:r>
-                  <a:rPr lang="en-US" sz="2000" dirty="0"/>
-                  <a:t>Describe how to obtain the length </a:t>
-                </a:r>
-                <a14:m>
-                  <m:oMath xmlns:m="http://schemas.openxmlformats.org/officeDocument/2006/math">
-                    <m:sSub>
-                      <m:sSubPr>
-                        <m:ctrlPr>
-                          <a:rPr lang="es-ES" sz="2000" b="0" i="1" smtClean="0">
-                            <a:latin typeface="Cambria Math" panose="02040503050406030204" pitchFamily="18" charset="0"/>
-                          </a:rPr>
-                        </m:ctrlPr>
-                      </m:sSubPr>
-                      <m:e>
-                        <m:r>
-                          <a:rPr lang="es-ES" sz="2000" b="0" i="1" smtClean="0">
-                            <a:latin typeface="Cambria Math" panose="02040503050406030204" pitchFamily="18" charset="0"/>
-                          </a:rPr>
-                          <m:t>𝐿</m:t>
-                        </m:r>
-                      </m:e>
-                      <m:sub>
-                        <m:r>
-                          <a:rPr lang="es-ES" sz="2000" b="0" i="1" smtClean="0">
-                            <a:latin typeface="Cambria Math" panose="02040503050406030204" pitchFamily="18" charset="0"/>
-                          </a:rPr>
-                          <m:t>𝜋</m:t>
-                        </m:r>
-                      </m:sub>
-                    </m:sSub>
-                  </m:oMath>
-                </a14:m>
-                <a:endParaRPr lang="en-US" sz="2000" dirty="0"/>
-              </a:p>
-              <a:p>
-                <a:pPr marL="342900" indent="-342900" algn="just">
-                  <a:buFont typeface="Arial" panose="020B0604020202020204" pitchFamily="34" charset="0"/>
-                  <a:buChar char="•"/>
-                </a:pPr>
-                <a:r>
-                  <a:rPr lang="en-US" sz="2000" dirty="0"/>
-                  <a:t>Describe the outputs.</a:t>
-                </a:r>
-              </a:p>
-              <a:p>
-                <a:pPr marL="0" indent="0" algn="just">
-                  <a:buNone/>
-                </a:pPr>
-                <a:r>
-                  <a:rPr lang="en-US" sz="2000" b="1" dirty="0"/>
-                  <a:t>ALL EXAMPLE #2: </a:t>
-                </a:r>
-                <a:r>
-                  <a:rPr lang="en-US" sz="2000" dirty="0"/>
-                  <a:t>waveguide width 12 µm, gap between waveguides 0.6 µm, deep </a:t>
-                </a:r>
-                <a:r>
-                  <a:rPr lang="en-US" sz="2000" dirty="0" err="1"/>
-                  <a:t>wvg</a:t>
-                </a:r>
-                <a:r>
-                  <a:rPr lang="en-US" sz="2000" dirty="0"/>
-                  <a:t>, wavelength start and end same 1.55 µm </a:t>
-                </a:r>
-                <a:r>
-                  <a:rPr lang="en-US" sz="2000" dirty="0">
-                    <a:sym typeface="Wingdings" pitchFamily="2" charset="2"/>
-                  </a:rPr>
-                  <a:t> all ”Run”</a:t>
-                </a:r>
-                <a:endParaRPr lang="en-US" sz="2000" dirty="0"/>
-              </a:p>
-              <a:p>
-                <a:pPr marL="0" indent="0" algn="just">
-                  <a:buNone/>
-                </a:pPr>
-                <a:r>
-                  <a:rPr lang="en-US" sz="2000" b="1" dirty="0"/>
-                  <a:t>ALL: </a:t>
-                </a:r>
-                <a:r>
-                  <a:rPr lang="en-US" sz="2000" dirty="0"/>
-                  <a:t>Follow</a:t>
-                </a:r>
-                <a:r>
-                  <a:rPr lang="en-US" sz="2000" b="1" dirty="0"/>
-                  <a:t> </a:t>
-                </a:r>
-                <a:r>
-                  <a:rPr lang="en-US" sz="2000" dirty="0"/>
-                  <a:t>instructor, that will show how to 1) plot mode, 2) explore the results (neff …)</a:t>
-                </a:r>
-              </a:p>
-              <a:p>
-                <a:pPr algn="just"/>
-                <a:endParaRPr lang="en-US" sz="2000" b="1" i="1" u="sng" dirty="0"/>
-              </a:p>
-              <a:p>
-                <a:pPr algn="just"/>
-                <a:endParaRPr lang="en-US" sz="2000" kern="0" dirty="0">
-                  <a:solidFill>
-                    <a:sysClr val="windowText" lastClr="000000"/>
-                  </a:solidFill>
-                </a:endParaRPr>
-              </a:p>
-            </p:txBody>
-          </p:sp>
-        </mc:Choice>
-        <mc:Fallback>
-          <p:sp>
-            <p:nvSpPr>
-              <p:cNvPr id="4" name="Marcador de texto 2">
-                <a:extLst>
-                  <a:ext uri="{FF2B5EF4-FFF2-40B4-BE49-F238E27FC236}">
-                    <a16:creationId xmlns:a16="http://schemas.microsoft.com/office/drawing/2014/main" id="{D838A93A-BFC8-0124-93CE-FDC193435A0C}"/>
-                  </a:ext>
-                </a:extLst>
-              </p:cNvPr>
-              <p:cNvSpPr txBox="1">
-                <a:spLocks noRot="1" noChangeAspect="1" noMove="1" noResize="1" noEditPoints="1" noAdjustHandles="1" noChangeArrowheads="1" noChangeShapeType="1" noTextEdit="1"/>
-              </p:cNvSpPr>
-              <p:nvPr/>
-            </p:nvSpPr>
-            <p:spPr>
-              <a:xfrm>
-                <a:off x="608012" y="1295400"/>
-                <a:ext cx="11048999" cy="4958137"/>
-              </a:xfrm>
-              <a:prstGeom prst="rect">
-                <a:avLst/>
-              </a:prstGeom>
-              <a:blipFill>
-                <a:blip r:embed="rId5"/>
-                <a:stretch>
-                  <a:fillRect l="-607" t="-738" r="-552"/>
-                </a:stretch>
-              </a:blipFill>
-            </p:spPr>
-            <p:txBody>
-              <a:bodyPr/>
-              <a:lstStyle/>
-              <a:p>
-                <a:r>
-                  <a:rPr lang="es-ES">
-                    <a:noFill/>
-                  </a:rPr>
-                  <a:t> </a:t>
-                </a:r>
-              </a:p>
-            </p:txBody>
-          </p:sp>
-        </mc:Fallback>
-      </mc:AlternateContent>
-      <p:sp>
-        <p:nvSpPr>
-          <p:cNvPr id="2" name="CuadroTexto 1">
-            <a:extLst>
-              <a:ext uri="{FF2B5EF4-FFF2-40B4-BE49-F238E27FC236}">
-                <a16:creationId xmlns:a16="http://schemas.microsoft.com/office/drawing/2014/main" id="{FDE3A197-9508-F9F1-1FEB-FF883D78C151}"/>
-              </a:ext>
-            </a:extLst>
-          </p:cNvPr>
+      <p:pic>
+        <p:nvPicPr>
+          <p:cNvPr id="85" name="Picture 84" descr="image.png"/>
+          <p:cNvPicPr>
+            <a:picLocks noChangeAspect="1"/>
+          </p:cNvPicPr>
+          <p:nvPr/>
+        </p:nvPicPr>
+        <p:blipFill>
+          <a:blip r:embed="rId4"/>
+          <a:stretch>
+            <a:fillRect/>
+          </a:stretch>
+        </p:blipFill>
+        <p:spPr>
+          <a:xfrm>
+            <a:off x="594360" y="1548847"/>
+            <a:ext cx="2743200" cy="1977226"/>
+          </a:xfrm>
+          <a:prstGeom prst="rect">
+            <a:avLst/>
+          </a:prstGeom>
+        </p:spPr>
+      </p:pic>
+      <p:pic>
+        <p:nvPicPr>
+          <p:cNvPr id="86" name="Picture 85" descr="lo5_mmi_modes_contact.png"/>
+          <p:cNvPicPr>
+            <a:picLocks noChangeAspect="1"/>
+          </p:cNvPicPr>
+          <p:nvPr/>
+        </p:nvPicPr>
+        <p:blipFill>
+          <a:blip r:embed="rId5"/>
+          <a:stretch>
+            <a:fillRect/>
+          </a:stretch>
+        </p:blipFill>
+        <p:spPr>
+          <a:xfrm>
+            <a:off x="3429000" y="1454621"/>
+            <a:ext cx="7955278" cy="2202254"/>
+          </a:xfrm>
+          <a:prstGeom prst="rect">
+            <a:avLst/>
+          </a:prstGeom>
+        </p:spPr>
+      </p:pic>
+      <p:sp>
+        <p:nvSpPr>
+          <p:cNvPr id="87" name="TextBox 86"/>
           <p:cNvSpPr txBox="1"/>
           <p:nvPr/>
         </p:nvSpPr>
         <p:spPr>
           <a:xfrm>
-            <a:off x="609441" y="4860334"/>
-            <a:ext cx="11199971" cy="1200329"/>
+            <a:off x="685800" y="4343400"/>
+            <a:ext cx="10652760" cy="1234440"/>
           </a:xfrm>
           <a:prstGeom prst="rect">
             <a:avLst/>
           </a:prstGeom>
           <a:solidFill>
-            <a:schemeClr val="bg1">
-              <a:lumMod val="95000"/>
-            </a:schemeClr>
+            <a:srgbClr val="FFFFFF"/>
           </a:solidFill>
-          <a:ln w="28575">
+          <a:ln>
             <a:solidFill>
-              <a:srgbClr val="E0700D"/>
+              <a:srgbClr val="D2D2D2"/>
             </a:solidFill>
           </a:ln>
         </p:spPr>
         <p:txBody>
-          <a:bodyPr wrap="square" rtlCol="0">
-            <a:spAutoFit/>
+          <a:bodyPr wrap="square">
+            <a:normAutofit/>
           </a:bodyPr>
           <a:lstStyle/>
           <a:p>
-            <a:pPr algn="just"/>
-            <a:r>
-              <a:rPr lang="en-US" sz="1200" dirty="0">
-                <a:latin typeface="Arial" panose="020B0604020202020204" pitchFamily="34" charset="0"/>
-                <a:cs typeface="Arial" panose="020B0604020202020204" pitchFamily="34" charset="0"/>
+            <a:pPr>
+              <a:spcAft>
+                <a:spcPts val="200"/>
+              </a:spcAft>
+            </a:pPr>
+            <a:r>
+              <a:rPr sz="1200">
+                <a:solidFill>
+                  <a:srgbClr val="191919"/>
+                </a:solidFill>
+                <a:latin typeface="Aptos"/>
               </a:rPr>
-              <a:t>Document all your results (neff, plot fields </a:t>
-            </a:r>
-            <a:r>
-              <a:rPr lang="en-US" sz="1200">
-                <a:latin typeface="Arial" panose="020B0604020202020204" pitchFamily="34" charset="0"/>
-                <a:cs typeface="Arial" panose="020B0604020202020204" pitchFamily="34" charset="0"/>
+              <a:t>For W_MMI = 12 um, first TE-like modes: n_eff = 1.678660 and 1.675127. First TM-like modes: n_eff = 1.577421 and 1.573889.</a:t>
+            </a:r>
+          </a:p>
+          <a:p>
+            <a:pPr>
+              <a:spcAft>
+                <a:spcPts val="200"/>
+              </a:spcAft>
+            </a:pPr>
+            <a:r>
+              <a:rPr sz="1200">
+                <a:solidFill>
+                  <a:srgbClr val="191919"/>
+                </a:solidFill>
+                <a:latin typeface="Aptos"/>
               </a:rPr>
-              <a:t>of different modes, </a:t>
-            </a:r>
-            <a:r>
-              <a:rPr lang="en-US" sz="1200" dirty="0">
-                <a:latin typeface="Arial" panose="020B0604020202020204" pitchFamily="34" charset="0"/>
-                <a:cs typeface="Arial" panose="020B0604020202020204" pitchFamily="34" charset="0"/>
-              </a:rPr>
-              <a:t>comparison between </a:t>
-            </a:r>
-            <a:r>
-              <a:rPr lang="en-US" sz="1200">
-                <a:latin typeface="Arial" panose="020B0604020202020204" pitchFamily="34" charset="0"/>
-                <a:cs typeface="Arial" panose="020B0604020202020204" pitchFamily="34" charset="0"/>
-              </a:rPr>
-              <a:t>different polarizations…)</a:t>
-            </a:r>
-            <a:endParaRPr lang="en-US" sz="1200" dirty="0">
-              <a:latin typeface="Arial" panose="020B0604020202020204" pitchFamily="34" charset="0"/>
-              <a:cs typeface="Arial" panose="020B0604020202020204" pitchFamily="34" charset="0"/>
-            </a:endParaRPr>
-          </a:p>
-          <a:p>
-            <a:pPr algn="just"/>
-            <a:endParaRPr lang="en-US" sz="1200" dirty="0">
-              <a:latin typeface="Arial" panose="020B0604020202020204" pitchFamily="34" charset="0"/>
-              <a:cs typeface="Arial" panose="020B0604020202020204" pitchFamily="34" charset="0"/>
-            </a:endParaRPr>
-          </a:p>
-          <a:p>
-            <a:pPr algn="just"/>
-            <a:endParaRPr lang="en-US" sz="1200" dirty="0">
-              <a:latin typeface="Arial" panose="020B0604020202020204" pitchFamily="34" charset="0"/>
-              <a:cs typeface="Arial" panose="020B0604020202020204" pitchFamily="34" charset="0"/>
-            </a:endParaRPr>
-          </a:p>
-          <a:p>
-            <a:pPr algn="just"/>
-            <a:endParaRPr lang="en-US" sz="1200" dirty="0">
-              <a:latin typeface="Arial" panose="020B0604020202020204" pitchFamily="34" charset="0"/>
-              <a:cs typeface="Arial" panose="020B0604020202020204" pitchFamily="34" charset="0"/>
-            </a:endParaRPr>
-          </a:p>
-          <a:p>
-            <a:pPr algn="just"/>
-            <a:endParaRPr lang="en-US" sz="1200" dirty="0">
-              <a:latin typeface="Arial" panose="020B0604020202020204" pitchFamily="34" charset="0"/>
-              <a:cs typeface="Arial" panose="020B0604020202020204" pitchFamily="34" charset="0"/>
-            </a:endParaRPr>
-          </a:p>
-          <a:p>
-            <a:pPr algn="just"/>
-            <a:endParaRPr lang="en-US" sz="1200" dirty="0">
-              <a:latin typeface="Arial" panose="020B0604020202020204" pitchFamily="34" charset="0"/>
-              <a:cs typeface="Arial" panose="020B0604020202020204" pitchFamily="34" charset="0"/>
-            </a:endParaRPr>
+              <a:t>Lpi_TE = 219.41 um and Lpi_TM = 219.48 um. The deep MMI body is almost polarization matched for this width, but not exactly identical.</a:t>
+            </a:r>
           </a:p>
         </p:txBody>
       </p:sp>
